--- a/STM32G4_Agent_Plan.pptx
+++ b/STM32G4_Agent_Plan.pptx
@@ -3589,7 +3589,7 @@
                   <a:srgbClr val="FFFFFF"/>
                 </a:solidFill>
               </a:rPr>
-              <a:t>기간: 4~6주  |  Gemma-4-31B</a:t>
+              <a:t>기간: 4~6주  |  Gemma 4 26B MoE</a:t>
             </a:r>
           </a:p>
         </p:txBody>
@@ -4477,8 +4477,8 @@
                   <a:srgbClr val="1A1A1A"/>
                 </a:solidFill>
               </a:rPr>
-              <a:t>기존 FOC 알고리즘 11개 모듈
-+ 신규 작성 4개 모듈</a:t>
+              <a:t>오픈소스 FOC 코드 + golden_modules/
+(8개 오픈소스 프로젝트 기반)</a:t>
             </a:r>
           </a:p>
         </p:txBody>
@@ -5821,7 +5821,7 @@
                   <a:srgbClr val="1A1A1A"/>
                 </a:solidFill>
               </a:rPr>
-              <a:t>Gemma-4-31B</a:t>
+              <a:t>Gemma 4 31B Dense</a:t>
             </a:r>
           </a:p>
         </p:txBody>
@@ -5889,7 +5889,7 @@
                   <a:srgbClr val="1A1A1A"/>
                 </a:solidFill>
               </a:rPr>
-              <a:t>~60~80GB</a:t>
+              <a:t>~60~70GB</a:t>
             </a:r>
           </a:p>
         </p:txBody>
@@ -5923,7 +5923,7 @@
                   <a:srgbClr val="1A1A1A"/>
                 </a:solidFill>
               </a:rPr>
-              <a:t>검증 리포트 포맷 통일</a:t>
+              <a:t>3계층 리포트 포맷 통일</a:t>
             </a:r>
           </a:p>
         </p:txBody>
@@ -6034,7 +6034,7 @@
                   <a:srgbClr val="1A1A1A"/>
                 </a:solidFill>
               </a:rPr>
-              <a:t>Gemma-4-31B</a:t>
+              <a:t>Gemma 4 26B MoE</a:t>
             </a:r>
           </a:p>
         </p:txBody>
@@ -6102,7 +6102,7 @@
                   <a:srgbClr val="1A1A1A"/>
                 </a:solidFill>
               </a:rPr>
-              <a:t>~30~40GB</a:t>
+              <a:t>~40~50GB</a:t>
             </a:r>
           </a:p>
         </p:txBody>
@@ -6136,7 +6136,7 @@
                   <a:srgbClr val="1A1A1A"/>
                 </a:solidFill>
               </a:rPr>
-              <a:t>사내 코딩 스타일 적용</a:t>
+              <a:t>USER CODE 삽입 정확도</a:t>
             </a:r>
           </a:p>
         </p:txBody>
@@ -6281,7 +6281,7 @@
                   <a:srgbClr val="1A1A1A"/>
                 </a:solidFill>
               </a:rPr>
-              <a:t>기존 FOC 코드 + CubeMX 생성 코드 조합</a:t>
+              <a:t>오픈소스 FOC 코드 + CubeMX 생성 코드 조합</a:t>
             </a:r>
           </a:p>
         </p:txBody>
@@ -6426,7 +6426,7 @@
                   <a:srgbClr val="1A1A1A"/>
                 </a:solidFill>
               </a:rPr>
-              <a:t>ST MCSDK 생성 코드 (다양한 파라미터 조합)</a:t>
+              <a:t>오픈소스 회로도 기반 검증 에러 자동 생성</a:t>
             </a:r>
           </a:p>
         </p:txBody>
@@ -6571,7 +6571,7 @@
                   <a:srgbClr val="1A1A1A"/>
                 </a:solidFill>
               </a:rPr>
-              <a:t>신규 Golden Module 조합 자동 생성</a:t>
+              <a:t>Golden Module 조합 자동 생성</a:t>
             </a:r>
           </a:p>
         </p:txBody>
@@ -6972,7 +6972,7 @@
                   <a:srgbClr val="1B3A6B"/>
                 </a:solidFill>
               </a:rPr>
-              <a:t>💡  DGX Spark 128GB → A100 없이 72B / 32B QLoRA 파인튜닝 모두 가능</a:t>
+              <a:t>💡  DGX Spark 128GB → 31B Dense / 26B MoE QLoRA 파인튜닝 모두 가능</a:t>
             </a:r>
           </a:p>
         </p:txBody>
@@ -7144,7 +7144,7 @@
                   <a:srgbClr val="FFFFFF"/>
                 </a:solidFill>
               </a:rPr>
-              <a:t>기존 보유 최적화 코드 → Golden Module 직접 등록</a:t>
+              <a:t>오픈소스 FOC 코드 기반 → Golden Module 가공·등록</a:t>
             </a:r>
           </a:p>
         </p:txBody>
@@ -8567,7 +8567,7 @@
                   <a:srgbClr val="107C10"/>
                 </a:solidFill>
               </a:rPr>
-              <a:t>foc_clarke.c</a:t>
+              <a:t>bldc_6step_hall.c</a:t>
             </a:r>
           </a:p>
         </p:txBody>
@@ -8601,7 +8601,7 @@
                   <a:srgbClr val="606060"/>
                 </a:solidFill>
               </a:rPr>
-              <a:t>Clarke 변환 (abc→αβ)</a:t>
+              <a:t>6-step Hall + BRK 보호</a:t>
             </a:r>
           </a:p>
         </p:txBody>
@@ -8712,7 +8712,7 @@
                   <a:srgbClr val="107C10"/>
                 </a:solidFill>
               </a:rPr>
-              <a:t>foc_park.c</a:t>
+              <a:t>dc_motor_pid.c</a:t>
             </a:r>
           </a:p>
         </p:txBody>
@@ -8746,7 +8746,7 @@
                   <a:srgbClr val="606060"/>
                 </a:solidFill>
               </a:rPr>
-              <a:t>Park 변환, CORDIC 최적화</a:t>
+              <a:t>DC H-bridge PID (완성)</a:t>
             </a:r>
           </a:p>
         </p:txBody>
@@ -8857,7 +8857,7 @@
                   <a:srgbClr val="107C10"/>
                 </a:solidFill>
               </a:rPr>
-              <a:t>foc_inv_park.c</a:t>
+              <a:t>fdcan_motor_cmd.c</a:t>
             </a:r>
           </a:p>
         </p:txBody>
@@ -8891,7 +8891,7 @@
                   <a:srgbClr val="606060"/>
                 </a:solidFill>
               </a:rPr>
-              <a:t>역 Park 변환</a:t>
+              <a:t>FDCAN 커맨드 파싱 (완성)</a:t>
             </a:r>
           </a:p>
         </p:txBody>
@@ -9002,7 +9002,7 @@
                   <a:srgbClr val="107C10"/>
                 </a:solidFill>
               </a:rPr>
-              <a:t>foc_svpwm.c</a:t>
+              <a:t>multi_axis_sync.c</a:t>
             </a:r>
           </a:p>
         </p:txBody>
@@ -9036,7 +9036,7 @@
                   <a:srgbClr val="606060"/>
                 </a:solidFill>
               </a:rPr>
-              <a:t>Space Vector PWM</a:t>
+              <a:t>TIM 동기화 (완성)</a:t>
             </a:r>
           </a:p>
         </p:txBody>
@@ -9050,1021 +9050,6 @@
         <p:spPr>
           <a:xfrm>
             <a:off x="6583680" y="2898648"/>
-            <a:ext cx="5303520" cy="274320"/>
-          </a:xfrm>
-          <a:prstGeom prst="rect">
-            <a:avLst/>
-          </a:prstGeom>
-          <a:solidFill>
-            <a:srgbClr val="D9F0D9"/>
-          </a:solidFill>
-          <a:ln>
-            <a:noFill/>
-          </a:ln>
-        </p:spPr>
-        <p:style>
-          <a:lnRef idx="1">
-            <a:schemeClr val="accent1"/>
-          </a:lnRef>
-          <a:fillRef idx="3">
-            <a:schemeClr val="accent1"/>
-          </a:fillRef>
-          <a:effectRef idx="2">
-            <a:schemeClr val="accent1"/>
-          </a:effectRef>
-          <a:fontRef idx="minor">
-            <a:schemeClr val="lt1"/>
-          </a:fontRef>
-        </p:style>
-        <p:txBody>
-          <a:bodyPr rtlCol="0" anchor="ctr"/>
-          <a:lstStyle/>
-          <a:p>
-            <a:pPr algn="ctr"/>
-          </a:p>
-        </p:txBody>
-      </p:sp>
-      <p:sp>
-        <p:nvSpPr>
-          <p:cNvPr id="58" name="TextBox 57"/>
-          <p:cNvSpPr txBox="1"/>
-          <p:nvPr/>
-        </p:nvSpPr>
-        <p:spPr>
-          <a:xfrm>
-            <a:off x="6675120" y="2916936"/>
-            <a:ext cx="274320" cy="237744"/>
-          </a:xfrm>
-          <a:prstGeom prst="rect">
-            <a:avLst/>
-          </a:prstGeom>
-          <a:noFill/>
-        </p:spPr>
-        <p:txBody>
-          <a:bodyPr wrap="square">
-            <a:spAutoFit/>
-          </a:bodyPr>
-          <a:lstStyle/>
-          <a:p>
-            <a:pPr algn="l"/>
-            <a:r>
-              <a:rPr sz="1000" b="0" i="0">
-                <a:solidFill>
-                  <a:srgbClr val="1A1A1A"/>
-                </a:solidFill>
-              </a:rPr>
-              <a:t>✅</a:t>
-            </a:r>
-          </a:p>
-        </p:txBody>
-      </p:sp>
-      <p:sp>
-        <p:nvSpPr>
-          <p:cNvPr id="59" name="TextBox 58"/>
-          <p:cNvSpPr txBox="1"/>
-          <p:nvPr/>
-        </p:nvSpPr>
-        <p:spPr>
-          <a:xfrm>
-            <a:off x="6995160" y="2916936"/>
-            <a:ext cx="2194560" cy="237744"/>
-          </a:xfrm>
-          <a:prstGeom prst="rect">
-            <a:avLst/>
-          </a:prstGeom>
-          <a:noFill/>
-        </p:spPr>
-        <p:txBody>
-          <a:bodyPr wrap="square">
-            <a:spAutoFit/>
-          </a:bodyPr>
-          <a:lstStyle/>
-          <a:p>
-            <a:pPr algn="l"/>
-            <a:r>
-              <a:rPr sz="950" b="1" i="0">
-                <a:solidFill>
-                  <a:srgbClr val="107C10"/>
-                </a:solidFill>
-              </a:rPr>
-              <a:t>foc_current_pi.c</a:t>
-            </a:r>
-          </a:p>
-        </p:txBody>
-      </p:sp>
-      <p:sp>
-        <p:nvSpPr>
-          <p:cNvPr id="60" name="TextBox 59"/>
-          <p:cNvSpPr txBox="1"/>
-          <p:nvPr/>
-        </p:nvSpPr>
-        <p:spPr>
-          <a:xfrm>
-            <a:off x="9281160" y="2916936"/>
-            <a:ext cx="2468880" cy="237744"/>
-          </a:xfrm>
-          <a:prstGeom prst="rect">
-            <a:avLst/>
-          </a:prstGeom>
-          <a:noFill/>
-        </p:spPr>
-        <p:txBody>
-          <a:bodyPr wrap="square">
-            <a:spAutoFit/>
-          </a:bodyPr>
-          <a:lstStyle/>
-          <a:p>
-            <a:pPr algn="l"/>
-            <a:r>
-              <a:rPr sz="950" b="0" i="0">
-                <a:solidFill>
-                  <a:srgbClr val="606060"/>
-                </a:solidFill>
-              </a:rPr>
-              <a:t>Id/Iq PI + Anti-windup</a:t>
-            </a:r>
-          </a:p>
-        </p:txBody>
-      </p:sp>
-      <p:sp>
-        <p:nvSpPr>
-          <p:cNvPr id="61" name="Rectangle 60"/>
-          <p:cNvSpPr/>
-          <p:nvPr/>
-        </p:nvSpPr>
-        <p:spPr>
-          <a:xfrm>
-            <a:off x="6583680" y="3200400"/>
-            <a:ext cx="5303520" cy="274320"/>
-          </a:xfrm>
-          <a:prstGeom prst="rect">
-            <a:avLst/>
-          </a:prstGeom>
-          <a:solidFill>
-            <a:srgbClr val="D9F0D9"/>
-          </a:solidFill>
-          <a:ln>
-            <a:noFill/>
-          </a:ln>
-        </p:spPr>
-        <p:style>
-          <a:lnRef idx="1">
-            <a:schemeClr val="accent1"/>
-          </a:lnRef>
-          <a:fillRef idx="3">
-            <a:schemeClr val="accent1"/>
-          </a:fillRef>
-          <a:effectRef idx="2">
-            <a:schemeClr val="accent1"/>
-          </a:effectRef>
-          <a:fontRef idx="minor">
-            <a:schemeClr val="lt1"/>
-          </a:fontRef>
-        </p:style>
-        <p:txBody>
-          <a:bodyPr rtlCol="0" anchor="ctr"/>
-          <a:lstStyle/>
-          <a:p>
-            <a:pPr algn="ctr"/>
-          </a:p>
-        </p:txBody>
-      </p:sp>
-      <p:sp>
-        <p:nvSpPr>
-          <p:cNvPr id="62" name="TextBox 61"/>
-          <p:cNvSpPr txBox="1"/>
-          <p:nvPr/>
-        </p:nvSpPr>
-        <p:spPr>
-          <a:xfrm>
-            <a:off x="6675120" y="3218688"/>
-            <a:ext cx="274320" cy="237744"/>
-          </a:xfrm>
-          <a:prstGeom prst="rect">
-            <a:avLst/>
-          </a:prstGeom>
-          <a:noFill/>
-        </p:spPr>
-        <p:txBody>
-          <a:bodyPr wrap="square">
-            <a:spAutoFit/>
-          </a:bodyPr>
-          <a:lstStyle/>
-          <a:p>
-            <a:pPr algn="l"/>
-            <a:r>
-              <a:rPr sz="1000" b="0" i="0">
-                <a:solidFill>
-                  <a:srgbClr val="1A1A1A"/>
-                </a:solidFill>
-              </a:rPr>
-              <a:t>✅</a:t>
-            </a:r>
-          </a:p>
-        </p:txBody>
-      </p:sp>
-      <p:sp>
-        <p:nvSpPr>
-          <p:cNvPr id="63" name="TextBox 62"/>
-          <p:cNvSpPr txBox="1"/>
-          <p:nvPr/>
-        </p:nvSpPr>
-        <p:spPr>
-          <a:xfrm>
-            <a:off x="6995160" y="3218688"/>
-            <a:ext cx="2194560" cy="237744"/>
-          </a:xfrm>
-          <a:prstGeom prst="rect">
-            <a:avLst/>
-          </a:prstGeom>
-          <a:noFill/>
-        </p:spPr>
-        <p:txBody>
-          <a:bodyPr wrap="square">
-            <a:spAutoFit/>
-          </a:bodyPr>
-          <a:lstStyle/>
-          <a:p>
-            <a:pPr algn="l"/>
-            <a:r>
-              <a:rPr sz="950" b="1" i="0">
-                <a:solidFill>
-                  <a:srgbClr val="107C10"/>
-                </a:solidFill>
-              </a:rPr>
-              <a:t>foc_speed_pi.c</a:t>
-            </a:r>
-          </a:p>
-        </p:txBody>
-      </p:sp>
-      <p:sp>
-        <p:nvSpPr>
-          <p:cNvPr id="64" name="TextBox 63"/>
-          <p:cNvSpPr txBox="1"/>
-          <p:nvPr/>
-        </p:nvSpPr>
-        <p:spPr>
-          <a:xfrm>
-            <a:off x="9281160" y="3218688"/>
-            <a:ext cx="2468880" cy="237744"/>
-          </a:xfrm>
-          <a:prstGeom prst="rect">
-            <a:avLst/>
-          </a:prstGeom>
-          <a:noFill/>
-        </p:spPr>
-        <p:txBody>
-          <a:bodyPr wrap="square">
-            <a:spAutoFit/>
-          </a:bodyPr>
-          <a:lstStyle/>
-          <a:p>
-            <a:pPr algn="l"/>
-            <a:r>
-              <a:rPr sz="950" b="0" i="0">
-                <a:solidFill>
-                  <a:srgbClr val="606060"/>
-                </a:solidFill>
-              </a:rPr>
-              <a:t>속도 PI 제어기</a:t>
-            </a:r>
-          </a:p>
-        </p:txBody>
-      </p:sp>
-      <p:sp>
-        <p:nvSpPr>
-          <p:cNvPr id="65" name="Rectangle 64"/>
-          <p:cNvSpPr/>
-          <p:nvPr/>
-        </p:nvSpPr>
-        <p:spPr>
-          <a:xfrm>
-            <a:off x="6583680" y="3502152"/>
-            <a:ext cx="5303520" cy="274320"/>
-          </a:xfrm>
-          <a:prstGeom prst="rect">
-            <a:avLst/>
-          </a:prstGeom>
-          <a:solidFill>
-            <a:srgbClr val="D9F0D9"/>
-          </a:solidFill>
-          <a:ln>
-            <a:noFill/>
-          </a:ln>
-        </p:spPr>
-        <p:style>
-          <a:lnRef idx="1">
-            <a:schemeClr val="accent1"/>
-          </a:lnRef>
-          <a:fillRef idx="3">
-            <a:schemeClr val="accent1"/>
-          </a:fillRef>
-          <a:effectRef idx="2">
-            <a:schemeClr val="accent1"/>
-          </a:effectRef>
-          <a:fontRef idx="minor">
-            <a:schemeClr val="lt1"/>
-          </a:fontRef>
-        </p:style>
-        <p:txBody>
-          <a:bodyPr rtlCol="0" anchor="ctr"/>
-          <a:lstStyle/>
-          <a:p>
-            <a:pPr algn="ctr"/>
-          </a:p>
-        </p:txBody>
-      </p:sp>
-      <p:sp>
-        <p:nvSpPr>
-          <p:cNvPr id="66" name="TextBox 65"/>
-          <p:cNvSpPr txBox="1"/>
-          <p:nvPr/>
-        </p:nvSpPr>
-        <p:spPr>
-          <a:xfrm>
-            <a:off x="6675120" y="3520440"/>
-            <a:ext cx="274320" cy="237744"/>
-          </a:xfrm>
-          <a:prstGeom prst="rect">
-            <a:avLst/>
-          </a:prstGeom>
-          <a:noFill/>
-        </p:spPr>
-        <p:txBody>
-          <a:bodyPr wrap="square">
-            <a:spAutoFit/>
-          </a:bodyPr>
-          <a:lstStyle/>
-          <a:p>
-            <a:pPr algn="l"/>
-            <a:r>
-              <a:rPr sz="1000" b="0" i="0">
-                <a:solidFill>
-                  <a:srgbClr val="1A1A1A"/>
-                </a:solidFill>
-              </a:rPr>
-              <a:t>✅</a:t>
-            </a:r>
-          </a:p>
-        </p:txBody>
-      </p:sp>
-      <p:sp>
-        <p:nvSpPr>
-          <p:cNvPr id="67" name="TextBox 66"/>
-          <p:cNvSpPr txBox="1"/>
-          <p:nvPr/>
-        </p:nvSpPr>
-        <p:spPr>
-          <a:xfrm>
-            <a:off x="6995160" y="3520440"/>
-            <a:ext cx="2194560" cy="237744"/>
-          </a:xfrm>
-          <a:prstGeom prst="rect">
-            <a:avLst/>
-          </a:prstGeom>
-          <a:noFill/>
-        </p:spPr>
-        <p:txBody>
-          <a:bodyPr wrap="square">
-            <a:spAutoFit/>
-          </a:bodyPr>
-          <a:lstStyle/>
-          <a:p>
-            <a:pPr algn="l"/>
-            <a:r>
-              <a:rPr sz="950" b="1" i="0">
-                <a:solidFill>
-                  <a:srgbClr val="107C10"/>
-                </a:solidFill>
-              </a:rPr>
-              <a:t>foc_position_pi.c</a:t>
-            </a:r>
-          </a:p>
-        </p:txBody>
-      </p:sp>
-      <p:sp>
-        <p:nvSpPr>
-          <p:cNvPr id="68" name="TextBox 67"/>
-          <p:cNvSpPr txBox="1"/>
-          <p:nvPr/>
-        </p:nvSpPr>
-        <p:spPr>
-          <a:xfrm>
-            <a:off x="9281160" y="3520440"/>
-            <a:ext cx="2468880" cy="237744"/>
-          </a:xfrm>
-          <a:prstGeom prst="rect">
-            <a:avLst/>
-          </a:prstGeom>
-          <a:noFill/>
-        </p:spPr>
-        <p:txBody>
-          <a:bodyPr wrap="square">
-            <a:spAutoFit/>
-          </a:bodyPr>
-          <a:lstStyle/>
-          <a:p>
-            <a:pPr algn="l"/>
-            <a:r>
-              <a:rPr sz="950" b="0" i="0">
-                <a:solidFill>
-                  <a:srgbClr val="606060"/>
-                </a:solidFill>
-              </a:rPr>
-              <a:t>위치 PI 제어기</a:t>
-            </a:r>
-          </a:p>
-        </p:txBody>
-      </p:sp>
-      <p:sp>
-        <p:nvSpPr>
-          <p:cNvPr id="69" name="Rectangle 68"/>
-          <p:cNvSpPr/>
-          <p:nvPr/>
-        </p:nvSpPr>
-        <p:spPr>
-          <a:xfrm>
-            <a:off x="6583680" y="3803904"/>
-            <a:ext cx="5303520" cy="274320"/>
-          </a:xfrm>
-          <a:prstGeom prst="rect">
-            <a:avLst/>
-          </a:prstGeom>
-          <a:solidFill>
-            <a:srgbClr val="D9F0D9"/>
-          </a:solidFill>
-          <a:ln>
-            <a:noFill/>
-          </a:ln>
-        </p:spPr>
-        <p:style>
-          <a:lnRef idx="1">
-            <a:schemeClr val="accent1"/>
-          </a:lnRef>
-          <a:fillRef idx="3">
-            <a:schemeClr val="accent1"/>
-          </a:fillRef>
-          <a:effectRef idx="2">
-            <a:schemeClr val="accent1"/>
-          </a:effectRef>
-          <a:fontRef idx="minor">
-            <a:schemeClr val="lt1"/>
-          </a:fontRef>
-        </p:style>
-        <p:txBody>
-          <a:bodyPr rtlCol="0" anchor="ctr"/>
-          <a:lstStyle/>
-          <a:p>
-            <a:pPr algn="ctr"/>
-          </a:p>
-        </p:txBody>
-      </p:sp>
-      <p:sp>
-        <p:nvSpPr>
-          <p:cNvPr id="70" name="TextBox 69"/>
-          <p:cNvSpPr txBox="1"/>
-          <p:nvPr/>
-        </p:nvSpPr>
-        <p:spPr>
-          <a:xfrm>
-            <a:off x="6675120" y="3822191"/>
-            <a:ext cx="274320" cy="237744"/>
-          </a:xfrm>
-          <a:prstGeom prst="rect">
-            <a:avLst/>
-          </a:prstGeom>
-          <a:noFill/>
-        </p:spPr>
-        <p:txBody>
-          <a:bodyPr wrap="square">
-            <a:spAutoFit/>
-          </a:bodyPr>
-          <a:lstStyle/>
-          <a:p>
-            <a:pPr algn="l"/>
-            <a:r>
-              <a:rPr sz="1000" b="0" i="0">
-                <a:solidFill>
-                  <a:srgbClr val="1A1A1A"/>
-                </a:solidFill>
-              </a:rPr>
-              <a:t>✅</a:t>
-            </a:r>
-          </a:p>
-        </p:txBody>
-      </p:sp>
-      <p:sp>
-        <p:nvSpPr>
-          <p:cNvPr id="71" name="TextBox 70"/>
-          <p:cNvSpPr txBox="1"/>
-          <p:nvPr/>
-        </p:nvSpPr>
-        <p:spPr>
-          <a:xfrm>
-            <a:off x="6995160" y="3822191"/>
-            <a:ext cx="2194560" cy="237744"/>
-          </a:xfrm>
-          <a:prstGeom prst="rect">
-            <a:avLst/>
-          </a:prstGeom>
-          <a:noFill/>
-        </p:spPr>
-        <p:txBody>
-          <a:bodyPr wrap="square">
-            <a:spAutoFit/>
-          </a:bodyPr>
-          <a:lstStyle/>
-          <a:p>
-            <a:pPr algn="l"/>
-            <a:r>
-              <a:rPr sz="950" b="1" i="0">
-                <a:solidFill>
-                  <a:srgbClr val="107C10"/>
-                </a:solidFill>
-              </a:rPr>
-              <a:t>foc_angle_encoder.c</a:t>
-            </a:r>
-          </a:p>
-        </p:txBody>
-      </p:sp>
-      <p:sp>
-        <p:nvSpPr>
-          <p:cNvPr id="72" name="TextBox 71"/>
-          <p:cNvSpPr txBox="1"/>
-          <p:nvPr/>
-        </p:nvSpPr>
-        <p:spPr>
-          <a:xfrm>
-            <a:off x="9281160" y="3822191"/>
-            <a:ext cx="2468880" cy="237744"/>
-          </a:xfrm>
-          <a:prstGeom prst="rect">
-            <a:avLst/>
-          </a:prstGeom>
-          <a:noFill/>
-        </p:spPr>
-        <p:txBody>
-          <a:bodyPr wrap="square">
-            <a:spAutoFit/>
-          </a:bodyPr>
-          <a:lstStyle/>
-          <a:p>
-            <a:pPr algn="l"/>
-            <a:r>
-              <a:rPr sz="950" b="0" i="0">
-                <a:solidFill>
-                  <a:srgbClr val="606060"/>
-                </a:solidFill>
-              </a:rPr>
-              <a:t>증분 엔코더 각도/속도</a:t>
-            </a:r>
-          </a:p>
-        </p:txBody>
-      </p:sp>
-      <p:sp>
-        <p:nvSpPr>
-          <p:cNvPr id="73" name="Rectangle 72"/>
-          <p:cNvSpPr/>
-          <p:nvPr/>
-        </p:nvSpPr>
-        <p:spPr>
-          <a:xfrm>
-            <a:off x="6583680" y="4105656"/>
-            <a:ext cx="5303520" cy="274320"/>
-          </a:xfrm>
-          <a:prstGeom prst="rect">
-            <a:avLst/>
-          </a:prstGeom>
-          <a:solidFill>
-            <a:srgbClr val="D9F0D9"/>
-          </a:solidFill>
-          <a:ln>
-            <a:noFill/>
-          </a:ln>
-        </p:spPr>
-        <p:style>
-          <a:lnRef idx="1">
-            <a:schemeClr val="accent1"/>
-          </a:lnRef>
-          <a:fillRef idx="3">
-            <a:schemeClr val="accent1"/>
-          </a:fillRef>
-          <a:effectRef idx="2">
-            <a:schemeClr val="accent1"/>
-          </a:effectRef>
-          <a:fontRef idx="minor">
-            <a:schemeClr val="lt1"/>
-          </a:fontRef>
-        </p:style>
-        <p:txBody>
-          <a:bodyPr rtlCol="0" anchor="ctr"/>
-          <a:lstStyle/>
-          <a:p>
-            <a:pPr algn="ctr"/>
-          </a:p>
-        </p:txBody>
-      </p:sp>
-      <p:sp>
-        <p:nvSpPr>
-          <p:cNvPr id="74" name="TextBox 73"/>
-          <p:cNvSpPr txBox="1"/>
-          <p:nvPr/>
-        </p:nvSpPr>
-        <p:spPr>
-          <a:xfrm>
-            <a:off x="6675120" y="4123944"/>
-            <a:ext cx="274320" cy="237744"/>
-          </a:xfrm>
-          <a:prstGeom prst="rect">
-            <a:avLst/>
-          </a:prstGeom>
-          <a:noFill/>
-        </p:spPr>
-        <p:txBody>
-          <a:bodyPr wrap="square">
-            <a:spAutoFit/>
-          </a:bodyPr>
-          <a:lstStyle/>
-          <a:p>
-            <a:pPr algn="l"/>
-            <a:r>
-              <a:rPr sz="1000" b="0" i="0">
-                <a:solidFill>
-                  <a:srgbClr val="1A1A1A"/>
-                </a:solidFill>
-              </a:rPr>
-              <a:t>✅</a:t>
-            </a:r>
-          </a:p>
-        </p:txBody>
-      </p:sp>
-      <p:sp>
-        <p:nvSpPr>
-          <p:cNvPr id="75" name="TextBox 74"/>
-          <p:cNvSpPr txBox="1"/>
-          <p:nvPr/>
-        </p:nvSpPr>
-        <p:spPr>
-          <a:xfrm>
-            <a:off x="6995160" y="4123944"/>
-            <a:ext cx="2194560" cy="237744"/>
-          </a:xfrm>
-          <a:prstGeom prst="rect">
-            <a:avLst/>
-          </a:prstGeom>
-          <a:noFill/>
-        </p:spPr>
-        <p:txBody>
-          <a:bodyPr wrap="square">
-            <a:spAutoFit/>
-          </a:bodyPr>
-          <a:lstStyle/>
-          <a:p>
-            <a:pPr algn="l"/>
-            <a:r>
-              <a:rPr sz="950" b="1" i="0">
-                <a:solidFill>
-                  <a:srgbClr val="107C10"/>
-                </a:solidFill>
-              </a:rPr>
-              <a:t>foc_angle_hall.c</a:t>
-            </a:r>
-          </a:p>
-        </p:txBody>
-      </p:sp>
-      <p:sp>
-        <p:nvSpPr>
-          <p:cNvPr id="76" name="TextBox 75"/>
-          <p:cNvSpPr txBox="1"/>
-          <p:nvPr/>
-        </p:nvSpPr>
-        <p:spPr>
-          <a:xfrm>
-            <a:off x="9281160" y="4123944"/>
-            <a:ext cx="2468880" cy="237744"/>
-          </a:xfrm>
-          <a:prstGeom prst="rect">
-            <a:avLst/>
-          </a:prstGeom>
-          <a:noFill/>
-        </p:spPr>
-        <p:txBody>
-          <a:bodyPr wrap="square">
-            <a:spAutoFit/>
-          </a:bodyPr>
-          <a:lstStyle/>
-          <a:p>
-            <a:pPr algn="l"/>
-            <a:r>
-              <a:rPr sz="950" b="0" i="0">
-                <a:solidFill>
-                  <a:srgbClr val="606060"/>
-                </a:solidFill>
-              </a:rPr>
-              <a:t>Hall 센서 → 각도 매핑</a:t>
-            </a:r>
-          </a:p>
-        </p:txBody>
-      </p:sp>
-      <p:sp>
-        <p:nvSpPr>
-          <p:cNvPr id="77" name="Rectangle 76"/>
-          <p:cNvSpPr/>
-          <p:nvPr/>
-        </p:nvSpPr>
-        <p:spPr>
-          <a:xfrm>
-            <a:off x="6583680" y="4407408"/>
-            <a:ext cx="5303520" cy="274320"/>
-          </a:xfrm>
-          <a:prstGeom prst="rect">
-            <a:avLst/>
-          </a:prstGeom>
-          <a:solidFill>
-            <a:srgbClr val="D9F0D9"/>
-          </a:solidFill>
-          <a:ln>
-            <a:noFill/>
-          </a:ln>
-        </p:spPr>
-        <p:style>
-          <a:lnRef idx="1">
-            <a:schemeClr val="accent1"/>
-          </a:lnRef>
-          <a:fillRef idx="3">
-            <a:schemeClr val="accent1"/>
-          </a:fillRef>
-          <a:effectRef idx="2">
-            <a:schemeClr val="accent1"/>
-          </a:effectRef>
-          <a:fontRef idx="minor">
-            <a:schemeClr val="lt1"/>
-          </a:fontRef>
-        </p:style>
-        <p:txBody>
-          <a:bodyPr rtlCol="0" anchor="ctr"/>
-          <a:lstStyle/>
-          <a:p>
-            <a:pPr algn="ctr"/>
-          </a:p>
-        </p:txBody>
-      </p:sp>
-      <p:sp>
-        <p:nvSpPr>
-          <p:cNvPr id="78" name="TextBox 77"/>
-          <p:cNvSpPr txBox="1"/>
-          <p:nvPr/>
-        </p:nvSpPr>
-        <p:spPr>
-          <a:xfrm>
-            <a:off x="6675120" y="4425696"/>
-            <a:ext cx="274320" cy="237744"/>
-          </a:xfrm>
-          <a:prstGeom prst="rect">
-            <a:avLst/>
-          </a:prstGeom>
-          <a:noFill/>
-        </p:spPr>
-        <p:txBody>
-          <a:bodyPr wrap="square">
-            <a:spAutoFit/>
-          </a:bodyPr>
-          <a:lstStyle/>
-          <a:p>
-            <a:pPr algn="l"/>
-            <a:r>
-              <a:rPr sz="1000" b="0" i="0">
-                <a:solidFill>
-                  <a:srgbClr val="1A1A1A"/>
-                </a:solidFill>
-              </a:rPr>
-              <a:t>✅</a:t>
-            </a:r>
-          </a:p>
-        </p:txBody>
-      </p:sp>
-      <p:sp>
-        <p:nvSpPr>
-          <p:cNvPr id="79" name="TextBox 78"/>
-          <p:cNvSpPr txBox="1"/>
-          <p:nvPr/>
-        </p:nvSpPr>
-        <p:spPr>
-          <a:xfrm>
-            <a:off x="6995160" y="4425696"/>
-            <a:ext cx="2194560" cy="237744"/>
-          </a:xfrm>
-          <a:prstGeom prst="rect">
-            <a:avLst/>
-          </a:prstGeom>
-          <a:noFill/>
-        </p:spPr>
-        <p:txBody>
-          <a:bodyPr wrap="square">
-            <a:spAutoFit/>
-          </a:bodyPr>
-          <a:lstStyle/>
-          <a:p>
-            <a:pPr algn="l"/>
-            <a:r>
-              <a:rPr sz="950" b="1" i="0">
-                <a:solidFill>
-                  <a:srgbClr val="107C10"/>
-                </a:solidFill>
-              </a:rPr>
-              <a:t>foc_angle_smo.c</a:t>
-            </a:r>
-          </a:p>
-        </p:txBody>
-      </p:sp>
-      <p:sp>
-        <p:nvSpPr>
-          <p:cNvPr id="80" name="TextBox 79"/>
-          <p:cNvSpPr txBox="1"/>
-          <p:nvPr/>
-        </p:nvSpPr>
-        <p:spPr>
-          <a:xfrm>
-            <a:off x="9281160" y="4425696"/>
-            <a:ext cx="2468880" cy="237744"/>
-          </a:xfrm>
-          <a:prstGeom prst="rect">
-            <a:avLst/>
-          </a:prstGeom>
-          <a:noFill/>
-        </p:spPr>
-        <p:txBody>
-          <a:bodyPr wrap="square">
-            <a:spAutoFit/>
-          </a:bodyPr>
-          <a:lstStyle/>
-          <a:p>
-            <a:pPr algn="l"/>
-            <a:r>
-              <a:rPr sz="950" b="0" i="0">
-                <a:solidFill>
-                  <a:srgbClr val="606060"/>
-                </a:solidFill>
-              </a:rPr>
-              <a:t>Sensorless SMO 옵저버</a:t>
-            </a:r>
-          </a:p>
-        </p:txBody>
-      </p:sp>
-      <p:sp>
-        <p:nvSpPr>
-          <p:cNvPr id="81" name="Rectangle 80"/>
-          <p:cNvSpPr/>
-          <p:nvPr/>
-        </p:nvSpPr>
-        <p:spPr>
-          <a:xfrm>
-            <a:off x="6583680" y="4709160"/>
-            <a:ext cx="5303520" cy="274320"/>
-          </a:xfrm>
-          <a:prstGeom prst="rect">
-            <a:avLst/>
-          </a:prstGeom>
-          <a:solidFill>
-            <a:srgbClr val="D9F0D9"/>
-          </a:solidFill>
-          <a:ln>
-            <a:noFill/>
-          </a:ln>
-        </p:spPr>
-        <p:style>
-          <a:lnRef idx="1">
-            <a:schemeClr val="accent1"/>
-          </a:lnRef>
-          <a:fillRef idx="3">
-            <a:schemeClr val="accent1"/>
-          </a:fillRef>
-          <a:effectRef idx="2">
-            <a:schemeClr val="accent1"/>
-          </a:effectRef>
-          <a:fontRef idx="minor">
-            <a:schemeClr val="lt1"/>
-          </a:fontRef>
-        </p:style>
-        <p:txBody>
-          <a:bodyPr rtlCol="0" anchor="ctr"/>
-          <a:lstStyle/>
-          <a:p>
-            <a:pPr algn="ctr"/>
-          </a:p>
-        </p:txBody>
-      </p:sp>
-      <p:sp>
-        <p:nvSpPr>
-          <p:cNvPr id="82" name="TextBox 81"/>
-          <p:cNvSpPr txBox="1"/>
-          <p:nvPr/>
-        </p:nvSpPr>
-        <p:spPr>
-          <a:xfrm>
-            <a:off x="6675120" y="4727448"/>
-            <a:ext cx="274320" cy="237744"/>
-          </a:xfrm>
-          <a:prstGeom prst="rect">
-            <a:avLst/>
-          </a:prstGeom>
-          <a:noFill/>
-        </p:spPr>
-        <p:txBody>
-          <a:bodyPr wrap="square">
-            <a:spAutoFit/>
-          </a:bodyPr>
-          <a:lstStyle/>
-          <a:p>
-            <a:pPr algn="l"/>
-            <a:r>
-              <a:rPr sz="1000" b="0" i="0">
-                <a:solidFill>
-                  <a:srgbClr val="1A1A1A"/>
-                </a:solidFill>
-              </a:rPr>
-              <a:t>✅</a:t>
-            </a:r>
-          </a:p>
-        </p:txBody>
-      </p:sp>
-      <p:sp>
-        <p:nvSpPr>
-          <p:cNvPr id="83" name="TextBox 82"/>
-          <p:cNvSpPr txBox="1"/>
-          <p:nvPr/>
-        </p:nvSpPr>
-        <p:spPr>
-          <a:xfrm>
-            <a:off x="6995160" y="4727448"/>
-            <a:ext cx="2194560" cy="237744"/>
-          </a:xfrm>
-          <a:prstGeom prst="rect">
-            <a:avLst/>
-          </a:prstGeom>
-          <a:noFill/>
-        </p:spPr>
-        <p:txBody>
-          <a:bodyPr wrap="square">
-            <a:spAutoFit/>
-          </a:bodyPr>
-          <a:lstStyle/>
-          <a:p>
-            <a:pPr algn="l"/>
-            <a:r>
-              <a:rPr sz="950" b="1" i="0">
-                <a:solidFill>
-                  <a:srgbClr val="107C10"/>
-                </a:solidFill>
-              </a:rPr>
-              <a:t>foc_current_sense.c</a:t>
-            </a:r>
-          </a:p>
-        </p:txBody>
-      </p:sp>
-      <p:sp>
-        <p:nvSpPr>
-          <p:cNvPr id="84" name="TextBox 83"/>
-          <p:cNvSpPr txBox="1"/>
-          <p:nvPr/>
-        </p:nvSpPr>
-        <p:spPr>
-          <a:xfrm>
-            <a:off x="9281160" y="4727448"/>
-            <a:ext cx="2468880" cy="237744"/>
-          </a:xfrm>
-          <a:prstGeom prst="rect">
-            <a:avLst/>
-          </a:prstGeom>
-          <a:noFill/>
-        </p:spPr>
-        <p:txBody>
-          <a:bodyPr wrap="square">
-            <a:spAutoFit/>
-          </a:bodyPr>
-          <a:lstStyle/>
-          <a:p>
-            <a:pPr algn="l"/>
-            <a:r>
-              <a:rPr sz="950" b="0" i="0">
-                <a:solidFill>
-                  <a:srgbClr val="606060"/>
-                </a:solidFill>
-              </a:rPr>
-              <a:t>ADC + G4 OPAMP 전류감지</a:t>
-            </a:r>
-          </a:p>
-        </p:txBody>
-      </p:sp>
-      <p:sp>
-        <p:nvSpPr>
-          <p:cNvPr id="85" name="Rectangle 84"/>
-          <p:cNvSpPr/>
-          <p:nvPr/>
-        </p:nvSpPr>
-        <p:spPr>
-          <a:xfrm>
-            <a:off x="6583680" y="5010912"/>
             <a:ext cx="5303520" cy="274320"/>
           </a:xfrm>
           <a:prstGeom prst="rect">
@@ -10101,13 +9086,13 @@
       </p:sp>
       <p:sp>
         <p:nvSpPr>
-          <p:cNvPr id="86" name="TextBox 85"/>
-          <p:cNvSpPr txBox="1"/>
-          <p:nvPr/>
-        </p:nvSpPr>
-        <p:spPr>
-          <a:xfrm>
-            <a:off x="6675120" y="5029200"/>
+          <p:cNvPr id="58" name="TextBox 57"/>
+          <p:cNvSpPr txBox="1"/>
+          <p:nvPr/>
+        </p:nvSpPr>
+        <p:spPr>
+          <a:xfrm>
+            <a:off x="6675120" y="2916936"/>
             <a:ext cx="274320" cy="237744"/>
           </a:xfrm>
           <a:prstGeom prst="rect">
@@ -10128,20 +9113,20 @@
                   <a:srgbClr val="1A1A1A"/>
                 </a:solidFill>
               </a:rPr>
-              <a:t>🔨</a:t>
-            </a:r>
-          </a:p>
-        </p:txBody>
-      </p:sp>
-      <p:sp>
-        <p:nvSpPr>
-          <p:cNvPr id="87" name="TextBox 86"/>
-          <p:cNvSpPr txBox="1"/>
-          <p:nvPr/>
-        </p:nvSpPr>
-        <p:spPr>
-          <a:xfrm>
-            <a:off x="6995160" y="5029200"/>
+              <a:t>⬜</a:t>
+            </a:r>
+          </a:p>
+        </p:txBody>
+      </p:sp>
+      <p:sp>
+        <p:nvSpPr>
+          <p:cNvPr id="59" name="TextBox 58"/>
+          <p:cNvSpPr txBox="1"/>
+          <p:nvPr/>
+        </p:nvSpPr>
+        <p:spPr>
+          <a:xfrm>
+            <a:off x="6995160" y="2916936"/>
             <a:ext cx="2194560" cy="237744"/>
           </a:xfrm>
           <a:prstGeom prst="rect">
@@ -10162,20 +9147,20 @@
                   <a:srgbClr val="E66C00"/>
                 </a:solidFill>
               </a:rPr>
-              <a:t>bldc_6step_hall.c</a:t>
-            </a:r>
-          </a:p>
-        </p:txBody>
-      </p:sp>
-      <p:sp>
-        <p:nvSpPr>
-          <p:cNvPr id="88" name="TextBox 87"/>
-          <p:cNvSpPr txBox="1"/>
-          <p:nvPr/>
-        </p:nvSpPr>
-        <p:spPr>
-          <a:xfrm>
-            <a:off x="9281160" y="5029200"/>
+              <a:t>foc_clarke.c</a:t>
+            </a:r>
+          </a:p>
+        </p:txBody>
+      </p:sp>
+      <p:sp>
+        <p:nvSpPr>
+          <p:cNvPr id="60" name="TextBox 59"/>
+          <p:cNvSpPr txBox="1"/>
+          <p:nvPr/>
+        </p:nvSpPr>
+        <p:spPr>
+          <a:xfrm>
+            <a:off x="9281160" y="2916936"/>
             <a:ext cx="2468880" cy="237744"/>
           </a:xfrm>
           <a:prstGeom prst="rect">
@@ -10196,20 +9181,20 @@
                   <a:srgbClr val="606060"/>
                 </a:solidFill>
               </a:rPr>
-              <a:t>6-step 전환 (신규)</a:t>
-            </a:r>
-          </a:p>
-        </p:txBody>
-      </p:sp>
-      <p:sp>
-        <p:nvSpPr>
-          <p:cNvPr id="89" name="Rectangle 88"/>
+              <a:t>Clarke (오픈소스 가공 예정)</a:t>
+            </a:r>
+          </a:p>
+        </p:txBody>
+      </p:sp>
+      <p:sp>
+        <p:nvSpPr>
+          <p:cNvPr id="61" name="Rectangle 60"/>
           <p:cNvSpPr/>
           <p:nvPr/>
         </p:nvSpPr>
         <p:spPr>
           <a:xfrm>
-            <a:off x="6583680" y="5312664"/>
+            <a:off x="6583680" y="3200400"/>
             <a:ext cx="5303520" cy="274320"/>
           </a:xfrm>
           <a:prstGeom prst="rect">
@@ -10246,13 +9231,13 @@
       </p:sp>
       <p:sp>
         <p:nvSpPr>
-          <p:cNvPr id="90" name="TextBox 89"/>
-          <p:cNvSpPr txBox="1"/>
-          <p:nvPr/>
-        </p:nvSpPr>
-        <p:spPr>
-          <a:xfrm>
-            <a:off x="6675120" y="5330952"/>
+          <p:cNvPr id="62" name="TextBox 61"/>
+          <p:cNvSpPr txBox="1"/>
+          <p:nvPr/>
+        </p:nvSpPr>
+        <p:spPr>
+          <a:xfrm>
+            <a:off x="6675120" y="3218688"/>
             <a:ext cx="274320" cy="237744"/>
           </a:xfrm>
           <a:prstGeom prst="rect">
@@ -10273,20 +9258,20 @@
                   <a:srgbClr val="1A1A1A"/>
                 </a:solidFill>
               </a:rPr>
-              <a:t>🔨</a:t>
-            </a:r>
-          </a:p>
-        </p:txBody>
-      </p:sp>
-      <p:sp>
-        <p:nvSpPr>
-          <p:cNvPr id="91" name="TextBox 90"/>
-          <p:cNvSpPr txBox="1"/>
-          <p:nvPr/>
-        </p:nvSpPr>
-        <p:spPr>
-          <a:xfrm>
-            <a:off x="6995160" y="5330952"/>
+              <a:t>⬜</a:t>
+            </a:r>
+          </a:p>
+        </p:txBody>
+      </p:sp>
+      <p:sp>
+        <p:nvSpPr>
+          <p:cNvPr id="63" name="TextBox 62"/>
+          <p:cNvSpPr txBox="1"/>
+          <p:nvPr/>
+        </p:nvSpPr>
+        <p:spPr>
+          <a:xfrm>
+            <a:off x="6995160" y="3218688"/>
             <a:ext cx="2194560" cy="237744"/>
           </a:xfrm>
           <a:prstGeom prst="rect">
@@ -10307,20 +9292,20 @@
                   <a:srgbClr val="E66C00"/>
                 </a:solidFill>
               </a:rPr>
-              <a:t>dc_motor_pid.c</a:t>
-            </a:r>
-          </a:p>
-        </p:txBody>
-      </p:sp>
-      <p:sp>
-        <p:nvSpPr>
-          <p:cNvPr id="92" name="TextBox 91"/>
-          <p:cNvSpPr txBox="1"/>
-          <p:nvPr/>
-        </p:nvSpPr>
-        <p:spPr>
-          <a:xfrm>
-            <a:off x="9281160" y="5330952"/>
+              <a:t>foc_park.c</a:t>
+            </a:r>
+          </a:p>
+        </p:txBody>
+      </p:sp>
+      <p:sp>
+        <p:nvSpPr>
+          <p:cNvPr id="64" name="TextBox 63"/>
+          <p:cNvSpPr txBox="1"/>
+          <p:nvPr/>
+        </p:nvSpPr>
+        <p:spPr>
+          <a:xfrm>
+            <a:off x="9281160" y="3218688"/>
             <a:ext cx="2468880" cy="237744"/>
           </a:xfrm>
           <a:prstGeom prst="rect">
@@ -10341,20 +9326,20 @@
                   <a:srgbClr val="606060"/>
                 </a:solidFill>
               </a:rPr>
-              <a:t>DC 모터 H-bridge PID (신규)</a:t>
-            </a:r>
-          </a:p>
-        </p:txBody>
-      </p:sp>
-      <p:sp>
-        <p:nvSpPr>
-          <p:cNvPr id="93" name="Rectangle 92"/>
+              <a:t>Park + CORDIC (가공 예정)</a:t>
+            </a:r>
+          </a:p>
+        </p:txBody>
+      </p:sp>
+      <p:sp>
+        <p:nvSpPr>
+          <p:cNvPr id="65" name="Rectangle 64"/>
           <p:cNvSpPr/>
           <p:nvPr/>
         </p:nvSpPr>
         <p:spPr>
           <a:xfrm>
-            <a:off x="6583680" y="5614416"/>
+            <a:off x="6583680" y="3502152"/>
             <a:ext cx="5303520" cy="274320"/>
           </a:xfrm>
           <a:prstGeom prst="rect">
@@ -10391,13 +9376,13 @@
       </p:sp>
       <p:sp>
         <p:nvSpPr>
-          <p:cNvPr id="94" name="TextBox 93"/>
-          <p:cNvSpPr txBox="1"/>
-          <p:nvPr/>
-        </p:nvSpPr>
-        <p:spPr>
-          <a:xfrm>
-            <a:off x="6675120" y="5632704"/>
+          <p:cNvPr id="66" name="TextBox 65"/>
+          <p:cNvSpPr txBox="1"/>
+          <p:nvPr/>
+        </p:nvSpPr>
+        <p:spPr>
+          <a:xfrm>
+            <a:off x="6675120" y="3520440"/>
             <a:ext cx="274320" cy="237744"/>
           </a:xfrm>
           <a:prstGeom prst="rect">
@@ -10418,20 +9403,20 @@
                   <a:srgbClr val="1A1A1A"/>
                 </a:solidFill>
               </a:rPr>
-              <a:t>🔨</a:t>
-            </a:r>
-          </a:p>
-        </p:txBody>
-      </p:sp>
-      <p:sp>
-        <p:nvSpPr>
-          <p:cNvPr id="95" name="TextBox 94"/>
-          <p:cNvSpPr txBox="1"/>
-          <p:nvPr/>
-        </p:nvSpPr>
-        <p:spPr>
-          <a:xfrm>
-            <a:off x="6995160" y="5632704"/>
+              <a:t>⬜</a:t>
+            </a:r>
+          </a:p>
+        </p:txBody>
+      </p:sp>
+      <p:sp>
+        <p:nvSpPr>
+          <p:cNvPr id="67" name="TextBox 66"/>
+          <p:cNvSpPr txBox="1"/>
+          <p:nvPr/>
+        </p:nvSpPr>
+        <p:spPr>
+          <a:xfrm>
+            <a:off x="6995160" y="3520440"/>
             <a:ext cx="2194560" cy="237744"/>
           </a:xfrm>
           <a:prstGeom prst="rect">
@@ -10452,20 +9437,20 @@
                   <a:srgbClr val="E66C00"/>
                 </a:solidFill>
               </a:rPr>
-              <a:t>fdcan_motor_cmd.c</a:t>
-            </a:r>
-          </a:p>
-        </p:txBody>
-      </p:sp>
-      <p:sp>
-        <p:nvSpPr>
-          <p:cNvPr id="96" name="TextBox 95"/>
-          <p:cNvSpPr txBox="1"/>
-          <p:nvPr/>
-        </p:nvSpPr>
-        <p:spPr>
-          <a:xfrm>
-            <a:off x="9281160" y="5632704"/>
+              <a:t>foc_inv_park.c</a:t>
+            </a:r>
+          </a:p>
+        </p:txBody>
+      </p:sp>
+      <p:sp>
+        <p:nvSpPr>
+          <p:cNvPr id="68" name="TextBox 67"/>
+          <p:cNvSpPr txBox="1"/>
+          <p:nvPr/>
+        </p:nvSpPr>
+        <p:spPr>
+          <a:xfrm>
+            <a:off x="9281160" y="3520440"/>
             <a:ext cx="2468880" cy="237744"/>
           </a:xfrm>
           <a:prstGeom prst="rect">
@@ -10486,20 +9471,20 @@
                   <a:srgbClr val="606060"/>
                 </a:solidFill>
               </a:rPr>
-              <a:t>FDCAN 핸들러 (신규)</a:t>
-            </a:r>
-          </a:p>
-        </p:txBody>
-      </p:sp>
-      <p:sp>
-        <p:nvSpPr>
-          <p:cNvPr id="97" name="Rectangle 96"/>
+              <a:t>역 Park (가공 예정)</a:t>
+            </a:r>
+          </a:p>
+        </p:txBody>
+      </p:sp>
+      <p:sp>
+        <p:nvSpPr>
+          <p:cNvPr id="69" name="Rectangle 68"/>
           <p:cNvSpPr/>
           <p:nvPr/>
         </p:nvSpPr>
         <p:spPr>
           <a:xfrm>
-            <a:off x="6583680" y="5916168"/>
+            <a:off x="6583680" y="3803904"/>
             <a:ext cx="5303520" cy="274320"/>
           </a:xfrm>
           <a:prstGeom prst="rect">
@@ -10536,6 +9521,1021 @@
       </p:sp>
       <p:sp>
         <p:nvSpPr>
+          <p:cNvPr id="70" name="TextBox 69"/>
+          <p:cNvSpPr txBox="1"/>
+          <p:nvPr/>
+        </p:nvSpPr>
+        <p:spPr>
+          <a:xfrm>
+            <a:off x="6675120" y="3822191"/>
+            <a:ext cx="274320" cy="237744"/>
+          </a:xfrm>
+          <a:prstGeom prst="rect">
+            <a:avLst/>
+          </a:prstGeom>
+          <a:noFill/>
+        </p:spPr>
+        <p:txBody>
+          <a:bodyPr wrap="square">
+            <a:spAutoFit/>
+          </a:bodyPr>
+          <a:lstStyle/>
+          <a:p>
+            <a:pPr algn="l"/>
+            <a:r>
+              <a:rPr sz="1000" b="0" i="0">
+                <a:solidFill>
+                  <a:srgbClr val="1A1A1A"/>
+                </a:solidFill>
+              </a:rPr>
+              <a:t>⬜</a:t>
+            </a:r>
+          </a:p>
+        </p:txBody>
+      </p:sp>
+      <p:sp>
+        <p:nvSpPr>
+          <p:cNvPr id="71" name="TextBox 70"/>
+          <p:cNvSpPr txBox="1"/>
+          <p:nvPr/>
+        </p:nvSpPr>
+        <p:spPr>
+          <a:xfrm>
+            <a:off x="6995160" y="3822191"/>
+            <a:ext cx="2194560" cy="237744"/>
+          </a:xfrm>
+          <a:prstGeom prst="rect">
+            <a:avLst/>
+          </a:prstGeom>
+          <a:noFill/>
+        </p:spPr>
+        <p:txBody>
+          <a:bodyPr wrap="square">
+            <a:spAutoFit/>
+          </a:bodyPr>
+          <a:lstStyle/>
+          <a:p>
+            <a:pPr algn="l"/>
+            <a:r>
+              <a:rPr sz="950" b="1" i="0">
+                <a:solidFill>
+                  <a:srgbClr val="E66C00"/>
+                </a:solidFill>
+              </a:rPr>
+              <a:t>foc_svpwm.c</a:t>
+            </a:r>
+          </a:p>
+        </p:txBody>
+      </p:sp>
+      <p:sp>
+        <p:nvSpPr>
+          <p:cNvPr id="72" name="TextBox 71"/>
+          <p:cNvSpPr txBox="1"/>
+          <p:nvPr/>
+        </p:nvSpPr>
+        <p:spPr>
+          <a:xfrm>
+            <a:off x="9281160" y="3822191"/>
+            <a:ext cx="2468880" cy="237744"/>
+          </a:xfrm>
+          <a:prstGeom prst="rect">
+            <a:avLst/>
+          </a:prstGeom>
+          <a:noFill/>
+        </p:spPr>
+        <p:txBody>
+          <a:bodyPr wrap="square">
+            <a:spAutoFit/>
+          </a:bodyPr>
+          <a:lstStyle/>
+          <a:p>
+            <a:pPr algn="l"/>
+            <a:r>
+              <a:rPr sz="950" b="0" i="0">
+                <a:solidFill>
+                  <a:srgbClr val="606060"/>
+                </a:solidFill>
+              </a:rPr>
+              <a:t>SVPWM (가공 예정)</a:t>
+            </a:r>
+          </a:p>
+        </p:txBody>
+      </p:sp>
+      <p:sp>
+        <p:nvSpPr>
+          <p:cNvPr id="73" name="Rectangle 72"/>
+          <p:cNvSpPr/>
+          <p:nvPr/>
+        </p:nvSpPr>
+        <p:spPr>
+          <a:xfrm>
+            <a:off x="6583680" y="4105656"/>
+            <a:ext cx="5303520" cy="274320"/>
+          </a:xfrm>
+          <a:prstGeom prst="rect">
+            <a:avLst/>
+          </a:prstGeom>
+          <a:solidFill>
+            <a:srgbClr val="FFF0D6"/>
+          </a:solidFill>
+          <a:ln>
+            <a:noFill/>
+          </a:ln>
+        </p:spPr>
+        <p:style>
+          <a:lnRef idx="1">
+            <a:schemeClr val="accent1"/>
+          </a:lnRef>
+          <a:fillRef idx="3">
+            <a:schemeClr val="accent1"/>
+          </a:fillRef>
+          <a:effectRef idx="2">
+            <a:schemeClr val="accent1"/>
+          </a:effectRef>
+          <a:fontRef idx="minor">
+            <a:schemeClr val="lt1"/>
+          </a:fontRef>
+        </p:style>
+        <p:txBody>
+          <a:bodyPr rtlCol="0" anchor="ctr"/>
+          <a:lstStyle/>
+          <a:p>
+            <a:pPr algn="ctr"/>
+          </a:p>
+        </p:txBody>
+      </p:sp>
+      <p:sp>
+        <p:nvSpPr>
+          <p:cNvPr id="74" name="TextBox 73"/>
+          <p:cNvSpPr txBox="1"/>
+          <p:nvPr/>
+        </p:nvSpPr>
+        <p:spPr>
+          <a:xfrm>
+            <a:off x="6675120" y="4123944"/>
+            <a:ext cx="274320" cy="237744"/>
+          </a:xfrm>
+          <a:prstGeom prst="rect">
+            <a:avLst/>
+          </a:prstGeom>
+          <a:noFill/>
+        </p:spPr>
+        <p:txBody>
+          <a:bodyPr wrap="square">
+            <a:spAutoFit/>
+          </a:bodyPr>
+          <a:lstStyle/>
+          <a:p>
+            <a:pPr algn="l"/>
+            <a:r>
+              <a:rPr sz="1000" b="0" i="0">
+                <a:solidFill>
+                  <a:srgbClr val="1A1A1A"/>
+                </a:solidFill>
+              </a:rPr>
+              <a:t>⬜</a:t>
+            </a:r>
+          </a:p>
+        </p:txBody>
+      </p:sp>
+      <p:sp>
+        <p:nvSpPr>
+          <p:cNvPr id="75" name="TextBox 74"/>
+          <p:cNvSpPr txBox="1"/>
+          <p:nvPr/>
+        </p:nvSpPr>
+        <p:spPr>
+          <a:xfrm>
+            <a:off x="6995160" y="4123944"/>
+            <a:ext cx="2194560" cy="237744"/>
+          </a:xfrm>
+          <a:prstGeom prst="rect">
+            <a:avLst/>
+          </a:prstGeom>
+          <a:noFill/>
+        </p:spPr>
+        <p:txBody>
+          <a:bodyPr wrap="square">
+            <a:spAutoFit/>
+          </a:bodyPr>
+          <a:lstStyle/>
+          <a:p>
+            <a:pPr algn="l"/>
+            <a:r>
+              <a:rPr sz="950" b="1" i="0">
+                <a:solidFill>
+                  <a:srgbClr val="E66C00"/>
+                </a:solidFill>
+              </a:rPr>
+              <a:t>foc_current_pi.c</a:t>
+            </a:r>
+          </a:p>
+        </p:txBody>
+      </p:sp>
+      <p:sp>
+        <p:nvSpPr>
+          <p:cNvPr id="76" name="TextBox 75"/>
+          <p:cNvSpPr txBox="1"/>
+          <p:nvPr/>
+        </p:nvSpPr>
+        <p:spPr>
+          <a:xfrm>
+            <a:off x="9281160" y="4123944"/>
+            <a:ext cx="2468880" cy="237744"/>
+          </a:xfrm>
+          <a:prstGeom prst="rect">
+            <a:avLst/>
+          </a:prstGeom>
+          <a:noFill/>
+        </p:spPr>
+        <p:txBody>
+          <a:bodyPr wrap="square">
+            <a:spAutoFit/>
+          </a:bodyPr>
+          <a:lstStyle/>
+          <a:p>
+            <a:pPr algn="l"/>
+            <a:r>
+              <a:rPr sz="950" b="0" i="0">
+                <a:solidFill>
+                  <a:srgbClr val="606060"/>
+                </a:solidFill>
+              </a:rPr>
+              <a:t>PI 제어기 (가공 예정)</a:t>
+            </a:r>
+          </a:p>
+        </p:txBody>
+      </p:sp>
+      <p:sp>
+        <p:nvSpPr>
+          <p:cNvPr id="77" name="Rectangle 76"/>
+          <p:cNvSpPr/>
+          <p:nvPr/>
+        </p:nvSpPr>
+        <p:spPr>
+          <a:xfrm>
+            <a:off x="6583680" y="4407408"/>
+            <a:ext cx="5303520" cy="274320"/>
+          </a:xfrm>
+          <a:prstGeom prst="rect">
+            <a:avLst/>
+          </a:prstGeom>
+          <a:solidFill>
+            <a:srgbClr val="FFF0D6"/>
+          </a:solidFill>
+          <a:ln>
+            <a:noFill/>
+          </a:ln>
+        </p:spPr>
+        <p:style>
+          <a:lnRef idx="1">
+            <a:schemeClr val="accent1"/>
+          </a:lnRef>
+          <a:fillRef idx="3">
+            <a:schemeClr val="accent1"/>
+          </a:fillRef>
+          <a:effectRef idx="2">
+            <a:schemeClr val="accent1"/>
+          </a:effectRef>
+          <a:fontRef idx="minor">
+            <a:schemeClr val="lt1"/>
+          </a:fontRef>
+        </p:style>
+        <p:txBody>
+          <a:bodyPr rtlCol="0" anchor="ctr"/>
+          <a:lstStyle/>
+          <a:p>
+            <a:pPr algn="ctr"/>
+          </a:p>
+        </p:txBody>
+      </p:sp>
+      <p:sp>
+        <p:nvSpPr>
+          <p:cNvPr id="78" name="TextBox 77"/>
+          <p:cNvSpPr txBox="1"/>
+          <p:nvPr/>
+        </p:nvSpPr>
+        <p:spPr>
+          <a:xfrm>
+            <a:off x="6675120" y="4425696"/>
+            <a:ext cx="274320" cy="237744"/>
+          </a:xfrm>
+          <a:prstGeom prst="rect">
+            <a:avLst/>
+          </a:prstGeom>
+          <a:noFill/>
+        </p:spPr>
+        <p:txBody>
+          <a:bodyPr wrap="square">
+            <a:spAutoFit/>
+          </a:bodyPr>
+          <a:lstStyle/>
+          <a:p>
+            <a:pPr algn="l"/>
+            <a:r>
+              <a:rPr sz="1000" b="0" i="0">
+                <a:solidFill>
+                  <a:srgbClr val="1A1A1A"/>
+                </a:solidFill>
+              </a:rPr>
+              <a:t>⬜</a:t>
+            </a:r>
+          </a:p>
+        </p:txBody>
+      </p:sp>
+      <p:sp>
+        <p:nvSpPr>
+          <p:cNvPr id="79" name="TextBox 78"/>
+          <p:cNvSpPr txBox="1"/>
+          <p:nvPr/>
+        </p:nvSpPr>
+        <p:spPr>
+          <a:xfrm>
+            <a:off x="6995160" y="4425696"/>
+            <a:ext cx="2194560" cy="237744"/>
+          </a:xfrm>
+          <a:prstGeom prst="rect">
+            <a:avLst/>
+          </a:prstGeom>
+          <a:noFill/>
+        </p:spPr>
+        <p:txBody>
+          <a:bodyPr wrap="square">
+            <a:spAutoFit/>
+          </a:bodyPr>
+          <a:lstStyle/>
+          <a:p>
+            <a:pPr algn="l"/>
+            <a:r>
+              <a:rPr sz="950" b="1" i="0">
+                <a:solidFill>
+                  <a:srgbClr val="E66C00"/>
+                </a:solidFill>
+              </a:rPr>
+              <a:t>foc_speed_pi.c</a:t>
+            </a:r>
+          </a:p>
+        </p:txBody>
+      </p:sp>
+      <p:sp>
+        <p:nvSpPr>
+          <p:cNvPr id="80" name="TextBox 79"/>
+          <p:cNvSpPr txBox="1"/>
+          <p:nvPr/>
+        </p:nvSpPr>
+        <p:spPr>
+          <a:xfrm>
+            <a:off x="9281160" y="4425696"/>
+            <a:ext cx="2468880" cy="237744"/>
+          </a:xfrm>
+          <a:prstGeom prst="rect">
+            <a:avLst/>
+          </a:prstGeom>
+          <a:noFill/>
+        </p:spPr>
+        <p:txBody>
+          <a:bodyPr wrap="square">
+            <a:spAutoFit/>
+          </a:bodyPr>
+          <a:lstStyle/>
+          <a:p>
+            <a:pPr algn="l"/>
+            <a:r>
+              <a:rPr sz="950" b="0" i="0">
+                <a:solidFill>
+                  <a:srgbClr val="606060"/>
+                </a:solidFill>
+              </a:rPr>
+              <a:t>속도 PI (가공 예정)</a:t>
+            </a:r>
+          </a:p>
+        </p:txBody>
+      </p:sp>
+      <p:sp>
+        <p:nvSpPr>
+          <p:cNvPr id="81" name="Rectangle 80"/>
+          <p:cNvSpPr/>
+          <p:nvPr/>
+        </p:nvSpPr>
+        <p:spPr>
+          <a:xfrm>
+            <a:off x="6583680" y="4709160"/>
+            <a:ext cx="5303520" cy="274320"/>
+          </a:xfrm>
+          <a:prstGeom prst="rect">
+            <a:avLst/>
+          </a:prstGeom>
+          <a:solidFill>
+            <a:srgbClr val="FFF0D6"/>
+          </a:solidFill>
+          <a:ln>
+            <a:noFill/>
+          </a:ln>
+        </p:spPr>
+        <p:style>
+          <a:lnRef idx="1">
+            <a:schemeClr val="accent1"/>
+          </a:lnRef>
+          <a:fillRef idx="3">
+            <a:schemeClr val="accent1"/>
+          </a:fillRef>
+          <a:effectRef idx="2">
+            <a:schemeClr val="accent1"/>
+          </a:effectRef>
+          <a:fontRef idx="minor">
+            <a:schemeClr val="lt1"/>
+          </a:fontRef>
+        </p:style>
+        <p:txBody>
+          <a:bodyPr rtlCol="0" anchor="ctr"/>
+          <a:lstStyle/>
+          <a:p>
+            <a:pPr algn="ctr"/>
+          </a:p>
+        </p:txBody>
+      </p:sp>
+      <p:sp>
+        <p:nvSpPr>
+          <p:cNvPr id="82" name="TextBox 81"/>
+          <p:cNvSpPr txBox="1"/>
+          <p:nvPr/>
+        </p:nvSpPr>
+        <p:spPr>
+          <a:xfrm>
+            <a:off x="6675120" y="4727448"/>
+            <a:ext cx="274320" cy="237744"/>
+          </a:xfrm>
+          <a:prstGeom prst="rect">
+            <a:avLst/>
+          </a:prstGeom>
+          <a:noFill/>
+        </p:spPr>
+        <p:txBody>
+          <a:bodyPr wrap="square">
+            <a:spAutoFit/>
+          </a:bodyPr>
+          <a:lstStyle/>
+          <a:p>
+            <a:pPr algn="l"/>
+            <a:r>
+              <a:rPr sz="1000" b="0" i="0">
+                <a:solidFill>
+                  <a:srgbClr val="1A1A1A"/>
+                </a:solidFill>
+              </a:rPr>
+              <a:t>⬜</a:t>
+            </a:r>
+          </a:p>
+        </p:txBody>
+      </p:sp>
+      <p:sp>
+        <p:nvSpPr>
+          <p:cNvPr id="83" name="TextBox 82"/>
+          <p:cNvSpPr txBox="1"/>
+          <p:nvPr/>
+        </p:nvSpPr>
+        <p:spPr>
+          <a:xfrm>
+            <a:off x="6995160" y="4727448"/>
+            <a:ext cx="2194560" cy="237744"/>
+          </a:xfrm>
+          <a:prstGeom prst="rect">
+            <a:avLst/>
+          </a:prstGeom>
+          <a:noFill/>
+        </p:spPr>
+        <p:txBody>
+          <a:bodyPr wrap="square">
+            <a:spAutoFit/>
+          </a:bodyPr>
+          <a:lstStyle/>
+          <a:p>
+            <a:pPr algn="l"/>
+            <a:r>
+              <a:rPr sz="950" b="1" i="0">
+                <a:solidFill>
+                  <a:srgbClr val="E66C00"/>
+                </a:solidFill>
+              </a:rPr>
+              <a:t>foc_angle_encoder.c</a:t>
+            </a:r>
+          </a:p>
+        </p:txBody>
+      </p:sp>
+      <p:sp>
+        <p:nvSpPr>
+          <p:cNvPr id="84" name="TextBox 83"/>
+          <p:cNvSpPr txBox="1"/>
+          <p:nvPr/>
+        </p:nvSpPr>
+        <p:spPr>
+          <a:xfrm>
+            <a:off x="9281160" y="4727448"/>
+            <a:ext cx="2468880" cy="237744"/>
+          </a:xfrm>
+          <a:prstGeom prst="rect">
+            <a:avLst/>
+          </a:prstGeom>
+          <a:noFill/>
+        </p:spPr>
+        <p:txBody>
+          <a:bodyPr wrap="square">
+            <a:spAutoFit/>
+          </a:bodyPr>
+          <a:lstStyle/>
+          <a:p>
+            <a:pPr algn="l"/>
+            <a:r>
+              <a:rPr sz="950" b="0" i="0">
+                <a:solidFill>
+                  <a:srgbClr val="606060"/>
+                </a:solidFill>
+              </a:rPr>
+              <a:t>엔코더 (가공 예정)</a:t>
+            </a:r>
+          </a:p>
+        </p:txBody>
+      </p:sp>
+      <p:sp>
+        <p:nvSpPr>
+          <p:cNvPr id="85" name="Rectangle 84"/>
+          <p:cNvSpPr/>
+          <p:nvPr/>
+        </p:nvSpPr>
+        <p:spPr>
+          <a:xfrm>
+            <a:off x="6583680" y="5010912"/>
+            <a:ext cx="5303520" cy="274320"/>
+          </a:xfrm>
+          <a:prstGeom prst="rect">
+            <a:avLst/>
+          </a:prstGeom>
+          <a:solidFill>
+            <a:srgbClr val="FFF0D6"/>
+          </a:solidFill>
+          <a:ln>
+            <a:noFill/>
+          </a:ln>
+        </p:spPr>
+        <p:style>
+          <a:lnRef idx="1">
+            <a:schemeClr val="accent1"/>
+          </a:lnRef>
+          <a:fillRef idx="3">
+            <a:schemeClr val="accent1"/>
+          </a:fillRef>
+          <a:effectRef idx="2">
+            <a:schemeClr val="accent1"/>
+          </a:effectRef>
+          <a:fontRef idx="minor">
+            <a:schemeClr val="lt1"/>
+          </a:fontRef>
+        </p:style>
+        <p:txBody>
+          <a:bodyPr rtlCol="0" anchor="ctr"/>
+          <a:lstStyle/>
+          <a:p>
+            <a:pPr algn="ctr"/>
+          </a:p>
+        </p:txBody>
+      </p:sp>
+      <p:sp>
+        <p:nvSpPr>
+          <p:cNvPr id="86" name="TextBox 85"/>
+          <p:cNvSpPr txBox="1"/>
+          <p:nvPr/>
+        </p:nvSpPr>
+        <p:spPr>
+          <a:xfrm>
+            <a:off x="6675120" y="5029200"/>
+            <a:ext cx="274320" cy="237744"/>
+          </a:xfrm>
+          <a:prstGeom prst="rect">
+            <a:avLst/>
+          </a:prstGeom>
+          <a:noFill/>
+        </p:spPr>
+        <p:txBody>
+          <a:bodyPr wrap="square">
+            <a:spAutoFit/>
+          </a:bodyPr>
+          <a:lstStyle/>
+          <a:p>
+            <a:pPr algn="l"/>
+            <a:r>
+              <a:rPr sz="1000" b="0" i="0">
+                <a:solidFill>
+                  <a:srgbClr val="1A1A1A"/>
+                </a:solidFill>
+              </a:rPr>
+              <a:t>⬜</a:t>
+            </a:r>
+          </a:p>
+        </p:txBody>
+      </p:sp>
+      <p:sp>
+        <p:nvSpPr>
+          <p:cNvPr id="87" name="TextBox 86"/>
+          <p:cNvSpPr txBox="1"/>
+          <p:nvPr/>
+        </p:nvSpPr>
+        <p:spPr>
+          <a:xfrm>
+            <a:off x="6995160" y="5029200"/>
+            <a:ext cx="2194560" cy="237744"/>
+          </a:xfrm>
+          <a:prstGeom prst="rect">
+            <a:avLst/>
+          </a:prstGeom>
+          <a:noFill/>
+        </p:spPr>
+        <p:txBody>
+          <a:bodyPr wrap="square">
+            <a:spAutoFit/>
+          </a:bodyPr>
+          <a:lstStyle/>
+          <a:p>
+            <a:pPr algn="l"/>
+            <a:r>
+              <a:rPr sz="950" b="1" i="0">
+                <a:solidFill>
+                  <a:srgbClr val="E66C00"/>
+                </a:solidFill>
+              </a:rPr>
+              <a:t>foc_angle_hall.c</a:t>
+            </a:r>
+          </a:p>
+        </p:txBody>
+      </p:sp>
+      <p:sp>
+        <p:nvSpPr>
+          <p:cNvPr id="88" name="TextBox 87"/>
+          <p:cNvSpPr txBox="1"/>
+          <p:nvPr/>
+        </p:nvSpPr>
+        <p:spPr>
+          <a:xfrm>
+            <a:off x="9281160" y="5029200"/>
+            <a:ext cx="2468880" cy="237744"/>
+          </a:xfrm>
+          <a:prstGeom prst="rect">
+            <a:avLst/>
+          </a:prstGeom>
+          <a:noFill/>
+        </p:spPr>
+        <p:txBody>
+          <a:bodyPr wrap="square">
+            <a:spAutoFit/>
+          </a:bodyPr>
+          <a:lstStyle/>
+          <a:p>
+            <a:pPr algn="l"/>
+            <a:r>
+              <a:rPr sz="950" b="0" i="0">
+                <a:solidFill>
+                  <a:srgbClr val="606060"/>
+                </a:solidFill>
+              </a:rPr>
+              <a:t>Hall 각도 (가공 예정)</a:t>
+            </a:r>
+          </a:p>
+        </p:txBody>
+      </p:sp>
+      <p:sp>
+        <p:nvSpPr>
+          <p:cNvPr id="89" name="Rectangle 88"/>
+          <p:cNvSpPr/>
+          <p:nvPr/>
+        </p:nvSpPr>
+        <p:spPr>
+          <a:xfrm>
+            <a:off x="6583680" y="5312664"/>
+            <a:ext cx="5303520" cy="274320"/>
+          </a:xfrm>
+          <a:prstGeom prst="rect">
+            <a:avLst/>
+          </a:prstGeom>
+          <a:solidFill>
+            <a:srgbClr val="FFF0D6"/>
+          </a:solidFill>
+          <a:ln>
+            <a:noFill/>
+          </a:ln>
+        </p:spPr>
+        <p:style>
+          <a:lnRef idx="1">
+            <a:schemeClr val="accent1"/>
+          </a:lnRef>
+          <a:fillRef idx="3">
+            <a:schemeClr val="accent1"/>
+          </a:fillRef>
+          <a:effectRef idx="2">
+            <a:schemeClr val="accent1"/>
+          </a:effectRef>
+          <a:fontRef idx="minor">
+            <a:schemeClr val="lt1"/>
+          </a:fontRef>
+        </p:style>
+        <p:txBody>
+          <a:bodyPr rtlCol="0" anchor="ctr"/>
+          <a:lstStyle/>
+          <a:p>
+            <a:pPr algn="ctr"/>
+          </a:p>
+        </p:txBody>
+      </p:sp>
+      <p:sp>
+        <p:nvSpPr>
+          <p:cNvPr id="90" name="TextBox 89"/>
+          <p:cNvSpPr txBox="1"/>
+          <p:nvPr/>
+        </p:nvSpPr>
+        <p:spPr>
+          <a:xfrm>
+            <a:off x="6675120" y="5330952"/>
+            <a:ext cx="274320" cy="237744"/>
+          </a:xfrm>
+          <a:prstGeom prst="rect">
+            <a:avLst/>
+          </a:prstGeom>
+          <a:noFill/>
+        </p:spPr>
+        <p:txBody>
+          <a:bodyPr wrap="square">
+            <a:spAutoFit/>
+          </a:bodyPr>
+          <a:lstStyle/>
+          <a:p>
+            <a:pPr algn="l"/>
+            <a:r>
+              <a:rPr sz="1000" b="0" i="0">
+                <a:solidFill>
+                  <a:srgbClr val="1A1A1A"/>
+                </a:solidFill>
+              </a:rPr>
+              <a:t>⬜</a:t>
+            </a:r>
+          </a:p>
+        </p:txBody>
+      </p:sp>
+      <p:sp>
+        <p:nvSpPr>
+          <p:cNvPr id="91" name="TextBox 90"/>
+          <p:cNvSpPr txBox="1"/>
+          <p:nvPr/>
+        </p:nvSpPr>
+        <p:spPr>
+          <a:xfrm>
+            <a:off x="6995160" y="5330952"/>
+            <a:ext cx="2194560" cy="237744"/>
+          </a:xfrm>
+          <a:prstGeom prst="rect">
+            <a:avLst/>
+          </a:prstGeom>
+          <a:noFill/>
+        </p:spPr>
+        <p:txBody>
+          <a:bodyPr wrap="square">
+            <a:spAutoFit/>
+          </a:bodyPr>
+          <a:lstStyle/>
+          <a:p>
+            <a:pPr algn="l"/>
+            <a:r>
+              <a:rPr sz="950" b="1" i="0">
+                <a:solidFill>
+                  <a:srgbClr val="E66C00"/>
+                </a:solidFill>
+              </a:rPr>
+              <a:t>foc_angle_smo.c</a:t>
+            </a:r>
+          </a:p>
+        </p:txBody>
+      </p:sp>
+      <p:sp>
+        <p:nvSpPr>
+          <p:cNvPr id="92" name="TextBox 91"/>
+          <p:cNvSpPr txBox="1"/>
+          <p:nvPr/>
+        </p:nvSpPr>
+        <p:spPr>
+          <a:xfrm>
+            <a:off x="9281160" y="5330952"/>
+            <a:ext cx="2468880" cy="237744"/>
+          </a:xfrm>
+          <a:prstGeom prst="rect">
+            <a:avLst/>
+          </a:prstGeom>
+          <a:noFill/>
+        </p:spPr>
+        <p:txBody>
+          <a:bodyPr wrap="square">
+            <a:spAutoFit/>
+          </a:bodyPr>
+          <a:lstStyle/>
+          <a:p>
+            <a:pPr algn="l"/>
+            <a:r>
+              <a:rPr sz="950" b="0" i="0">
+                <a:solidFill>
+                  <a:srgbClr val="606060"/>
+                </a:solidFill>
+              </a:rPr>
+              <a:t>SMO 옵저버 (가공 예정)</a:t>
+            </a:r>
+          </a:p>
+        </p:txBody>
+      </p:sp>
+      <p:sp>
+        <p:nvSpPr>
+          <p:cNvPr id="93" name="Rectangle 92"/>
+          <p:cNvSpPr/>
+          <p:nvPr/>
+        </p:nvSpPr>
+        <p:spPr>
+          <a:xfrm>
+            <a:off x="6583680" y="5614416"/>
+            <a:ext cx="5303520" cy="274320"/>
+          </a:xfrm>
+          <a:prstGeom prst="rect">
+            <a:avLst/>
+          </a:prstGeom>
+          <a:solidFill>
+            <a:srgbClr val="FFF0D6"/>
+          </a:solidFill>
+          <a:ln>
+            <a:noFill/>
+          </a:ln>
+        </p:spPr>
+        <p:style>
+          <a:lnRef idx="1">
+            <a:schemeClr val="accent1"/>
+          </a:lnRef>
+          <a:fillRef idx="3">
+            <a:schemeClr val="accent1"/>
+          </a:fillRef>
+          <a:effectRef idx="2">
+            <a:schemeClr val="accent1"/>
+          </a:effectRef>
+          <a:fontRef idx="minor">
+            <a:schemeClr val="lt1"/>
+          </a:fontRef>
+        </p:style>
+        <p:txBody>
+          <a:bodyPr rtlCol="0" anchor="ctr"/>
+          <a:lstStyle/>
+          <a:p>
+            <a:pPr algn="ctr"/>
+          </a:p>
+        </p:txBody>
+      </p:sp>
+      <p:sp>
+        <p:nvSpPr>
+          <p:cNvPr id="94" name="TextBox 93"/>
+          <p:cNvSpPr txBox="1"/>
+          <p:nvPr/>
+        </p:nvSpPr>
+        <p:spPr>
+          <a:xfrm>
+            <a:off x="6675120" y="5632704"/>
+            <a:ext cx="274320" cy="237744"/>
+          </a:xfrm>
+          <a:prstGeom prst="rect">
+            <a:avLst/>
+          </a:prstGeom>
+          <a:noFill/>
+        </p:spPr>
+        <p:txBody>
+          <a:bodyPr wrap="square">
+            <a:spAutoFit/>
+          </a:bodyPr>
+          <a:lstStyle/>
+          <a:p>
+            <a:pPr algn="l"/>
+            <a:r>
+              <a:rPr sz="1000" b="0" i="0">
+                <a:solidFill>
+                  <a:srgbClr val="1A1A1A"/>
+                </a:solidFill>
+              </a:rPr>
+              <a:t>⬜</a:t>
+            </a:r>
+          </a:p>
+        </p:txBody>
+      </p:sp>
+      <p:sp>
+        <p:nvSpPr>
+          <p:cNvPr id="95" name="TextBox 94"/>
+          <p:cNvSpPr txBox="1"/>
+          <p:nvPr/>
+        </p:nvSpPr>
+        <p:spPr>
+          <a:xfrm>
+            <a:off x="6995160" y="5632704"/>
+            <a:ext cx="2194560" cy="237744"/>
+          </a:xfrm>
+          <a:prstGeom prst="rect">
+            <a:avLst/>
+          </a:prstGeom>
+          <a:noFill/>
+        </p:spPr>
+        <p:txBody>
+          <a:bodyPr wrap="square">
+            <a:spAutoFit/>
+          </a:bodyPr>
+          <a:lstStyle/>
+          <a:p>
+            <a:pPr algn="l"/>
+            <a:r>
+              <a:rPr sz="950" b="1" i="0">
+                <a:solidFill>
+                  <a:srgbClr val="E66C00"/>
+                </a:solidFill>
+              </a:rPr>
+              <a:t>foc_current_sense.c</a:t>
+            </a:r>
+          </a:p>
+        </p:txBody>
+      </p:sp>
+      <p:sp>
+        <p:nvSpPr>
+          <p:cNvPr id="96" name="TextBox 95"/>
+          <p:cNvSpPr txBox="1"/>
+          <p:nvPr/>
+        </p:nvSpPr>
+        <p:spPr>
+          <a:xfrm>
+            <a:off x="9281160" y="5632704"/>
+            <a:ext cx="2468880" cy="237744"/>
+          </a:xfrm>
+          <a:prstGeom prst="rect">
+            <a:avLst/>
+          </a:prstGeom>
+          <a:noFill/>
+        </p:spPr>
+        <p:txBody>
+          <a:bodyPr wrap="square">
+            <a:spAutoFit/>
+          </a:bodyPr>
+          <a:lstStyle/>
+          <a:p>
+            <a:pPr algn="l"/>
+            <a:r>
+              <a:rPr sz="950" b="0" i="0">
+                <a:solidFill>
+                  <a:srgbClr val="606060"/>
+                </a:solidFill>
+              </a:rPr>
+              <a:t>전류감지 (가공 예정)</a:t>
+            </a:r>
+          </a:p>
+        </p:txBody>
+      </p:sp>
+      <p:sp>
+        <p:nvSpPr>
+          <p:cNvPr id="97" name="Rectangle 96"/>
+          <p:cNvSpPr/>
+          <p:nvPr/>
+        </p:nvSpPr>
+        <p:spPr>
+          <a:xfrm>
+            <a:off x="6583680" y="5916168"/>
+            <a:ext cx="5303520" cy="274320"/>
+          </a:xfrm>
+          <a:prstGeom prst="rect">
+            <a:avLst/>
+          </a:prstGeom>
+          <a:solidFill>
+            <a:srgbClr val="FFF0D6"/>
+          </a:solidFill>
+          <a:ln>
+            <a:noFill/>
+          </a:ln>
+        </p:spPr>
+        <p:style>
+          <a:lnRef idx="1">
+            <a:schemeClr val="accent1"/>
+          </a:lnRef>
+          <a:fillRef idx="3">
+            <a:schemeClr val="accent1"/>
+          </a:fillRef>
+          <a:effectRef idx="2">
+            <a:schemeClr val="accent1"/>
+          </a:effectRef>
+          <a:fontRef idx="minor">
+            <a:schemeClr val="lt1"/>
+          </a:fontRef>
+        </p:style>
+        <p:txBody>
+          <a:bodyPr rtlCol="0" anchor="ctr"/>
+          <a:lstStyle/>
+          <a:p>
+            <a:pPr algn="ctr"/>
+          </a:p>
+        </p:txBody>
+      </p:sp>
+      <p:sp>
+        <p:nvSpPr>
           <p:cNvPr id="98" name="TextBox 97"/>
           <p:cNvSpPr txBox="1"/>
           <p:nvPr/>
@@ -10563,7 +10563,7 @@
                   <a:srgbClr val="1A1A1A"/>
                 </a:solidFill>
               </a:rPr>
-              <a:t>🔨</a:t>
+              <a:t>⬜</a:t>
             </a:r>
           </a:p>
         </p:txBody>
@@ -10597,7 +10597,7 @@
                   <a:srgbClr val="E66C00"/>
                 </a:solidFill>
               </a:rPr>
-              <a:t>multi_axis_sync.c</a:t>
+              <a:t>foc_position_pi.c</a:t>
             </a:r>
           </a:p>
         </p:txBody>
@@ -10631,7 +10631,7 @@
                   <a:srgbClr val="606060"/>
                 </a:solidFill>
               </a:rPr>
-              <a:t>2~4축 TIM 동기화 (신규, 멀티모터)</a:t>
+              <a:t>위치 PI (가공 예정)</a:t>
             </a:r>
           </a:p>
         </p:txBody>
@@ -11272,7 +11272,7 @@
                   <a:srgbClr val="606060"/>
                 </a:solidFill>
               </a:rPr>
-              <a:t>핀 검증
+              <a:t>HW 검증
 (추론)</a:t>
             </a:r>
           </a:p>
@@ -11307,7 +11307,7 @@
                   <a:srgbClr val="2E6DB4"/>
                 </a:solidFill>
               </a:rPr>
-              <a:t>Gemma-4-31B-It</a:t>
+              <a:t>Gemma 4 31B Dense</a:t>
             </a:r>
           </a:p>
         </p:txBody>
@@ -11375,7 +11375,7 @@
                   <a:srgbClr val="107C10"/>
                 </a:solidFill>
               </a:rPr>
-              <a:t>~40GB</a:t>
+              <a:t>~20GB</a:t>
             </a:r>
           </a:p>
         </p:txBody>
@@ -11409,7 +11409,7 @@
                   <a:srgbClr val="606060"/>
                 </a:solidFill>
               </a:rPr>
-              <a:t>한국어+영어 최상급, JSON 구조화 출력 우수</a:t>
+              <a:t>논리 추론 정확도 최상급, JSON 구조화 출력 우수</a:t>
             </a:r>
           </a:p>
         </p:txBody>
@@ -11803,7 +11803,7 @@
                   <a:srgbClr val="2E6DB4"/>
                 </a:solidFill>
               </a:rPr>
-              <a:t>Gemma-4-31B-It</a:t>
+              <a:t>Gemma 4 26B MoE</a:t>
             </a:r>
           </a:p>
         </p:txBody>
@@ -11871,7 +11871,7 @@
                   <a:srgbClr val="107C10"/>
                 </a:solidFill>
               </a:rPr>
-              <a:t>~32GB</a:t>
+              <a:t>~22GB</a:t>
             </a:r>
           </a:p>
         </p:txBody>
@@ -11905,7 +11905,7 @@
                   <a:srgbClr val="606060"/>
                 </a:solidFill>
               </a:rPr>
-              <a:t>C 코드 생성 최적화, 한국어 주석, USER CODE 삽입</a:t>
+              <a:t>Active ~4B → 빠른 추론, USER CODE 삽입 최적화</a:t>
             </a:r>
           </a:p>
         </p:txBody>
@@ -12510,7 +12510,7 @@
                   <a:srgbClr val="1A1A1A"/>
                 </a:solidFill>
               </a:rPr>
-              <a:t>Gemma-4-31B Q4</a:t>
+              <a:t>Gemma 4 31B Q4</a:t>
             </a:r>
           </a:p>
         </p:txBody>
@@ -12544,7 +12544,7 @@
                   <a:srgbClr val="1A1A1A"/>
                 </a:solidFill>
               </a:rPr>
-              <a:t>Gemma-4-31B Q8</a:t>
+              <a:t>Gemma 4 26B MoE Q8</a:t>
             </a:r>
           </a:p>
         </p:txBody>
@@ -12578,7 +12578,7 @@
                   <a:srgbClr val="1A1A1A"/>
                 </a:solidFill>
               </a:rPr>
-              <a:t>~72GB</a:t>
+              <a:t>~42GB</a:t>
             </a:r>
           </a:p>
         </p:txBody>
@@ -12612,7 +12612,7 @@
                   <a:srgbClr val="107C10"/>
                 </a:solidFill>
               </a:rPr>
-              <a:t>✓ 여유</a:t>
+              <a:t>✓ 큰 여유</a:t>
             </a:r>
           </a:p>
         </p:txBody>
@@ -12723,7 +12723,7 @@
                   <a:srgbClr val="1A1A1A"/>
                 </a:solidFill>
               </a:rPr>
-              <a:t>Gemma-4-31B Q8</a:t>
+              <a:t>Gemma 4 31B Q8</a:t>
             </a:r>
           </a:p>
         </p:txBody>
@@ -12757,7 +12757,7 @@
                   <a:srgbClr val="1A1A1A"/>
                 </a:solidFill>
               </a:rPr>
-              <a:t>Gemma-4-31B Q8</a:t>
+              <a:t>Gemma 4 26B MoE Q8</a:t>
             </a:r>
           </a:p>
         </p:txBody>
@@ -12791,7 +12791,7 @@
                   <a:srgbClr val="1A1A1A"/>
                 </a:solidFill>
               </a:rPr>
-              <a:t>~104GB</a:t>
+              <a:t>~58GB</a:t>
             </a:r>
           </a:p>
         </p:txBody>
@@ -12825,7 +12825,7 @@
                   <a:srgbClr val="107C10"/>
                 </a:solidFill>
               </a:rPr>
-              <a:t>✓ 가능</a:t>
+              <a:t>✓ 여유</a:t>
             </a:r>
           </a:p>
         </p:txBody>
@@ -12902,7 +12902,7 @@
                   <a:srgbClr val="2E6DB4"/>
                 </a:solidFill>
               </a:rPr>
-              <a:t>빠른 응답</a:t>
+              <a:t>경량</a:t>
             </a:r>
           </a:p>
         </p:txBody>
@@ -12936,7 +12936,7 @@
                   <a:srgbClr val="1A1A1A"/>
                 </a:solidFill>
               </a:rPr>
-              <a:t>Gemma-4-31B Q4</a:t>
+              <a:t>Gemma 4 26B MoE Q4</a:t>
             </a:r>
           </a:p>
         </p:txBody>
@@ -12970,7 +12970,7 @@
                   <a:srgbClr val="1A1A1A"/>
                 </a:solidFill>
               </a:rPr>
-              <a:t>DeepSeek-Coder-V2-Lite</a:t>
+              <a:t>Gemma 4 26B MoE Q4</a:t>
             </a:r>
           </a:p>
         </p:txBody>
@@ -13004,7 +13004,7 @@
                   <a:srgbClr val="1A1A1A"/>
                 </a:solidFill>
               </a:rPr>
-              <a:t>~56GB</a:t>
+              <a:t>~36GB</a:t>
             </a:r>
           </a:p>
         </p:txBody>
@@ -13038,7 +13038,7 @@
                   <a:srgbClr val="107C10"/>
                 </a:solidFill>
               </a:rPr>
-              <a:t>✓ 여유</a:t>
+              <a:t>✓ 큰 여유</a:t>
             </a:r>
           </a:p>
         </p:txBody>
@@ -13149,7 +13149,7 @@
                   <a:srgbClr val="E66C00"/>
                 </a:solidFill>
               </a:rPr>
-              <a:t>Gemma-4-31B QLoRA</a:t>
+              <a:t>Gemma 4 31B Dense QLoRA</a:t>
             </a:r>
           </a:p>
         </p:txBody>
@@ -13183,7 +13183,7 @@
                   <a:srgbClr val="C0392B"/>
                 </a:solidFill>
               </a:rPr>
-              <a:t>~60~80GB</a:t>
+              <a:t>~60~70GB</a:t>
             </a:r>
           </a:p>
         </p:txBody>
@@ -13260,7 +13260,7 @@
                   <a:srgbClr val="E66C00"/>
                 </a:solidFill>
               </a:rPr>
-              <a:t>Gemma-4-31B QLoRA</a:t>
+              <a:t>Gemma 4 26B MoE QLoRA</a:t>
             </a:r>
           </a:p>
         </p:txBody>
@@ -13294,7 +13294,7 @@
                   <a:srgbClr val="C0392B"/>
                 </a:solidFill>
               </a:rPr>
-              <a:t>~30~40GB</a:t>
+              <a:t>~40~50GB</a:t>
             </a:r>
           </a:p>
         </p:txBody>
@@ -19901,7 +19901,7 @@
                   <a:srgbClr val="1A1A1A"/>
                 </a:solidFill>
               </a:rPr>
-              <a:t>4.  [코드 생성 확정] 클릭 → Gemma-4-31B 실행</a:t>
+              <a:t>4.  [코드 생성 확정] 클릭 → Gemma 4 26B MoE 실행</a:t>
             </a:r>
           </a:p>
         </p:txBody>
@@ -20200,7 +20200,7 @@
                   <a:srgbClr val="107C10"/>
                 </a:solidFill>
               </a:rPr>
-              <a:t>foc_clarke.c</a:t>
+              <a:t>bldc_6step_hall.c</a:t>
             </a:r>
           </a:p>
         </p:txBody>
@@ -20234,7 +20234,7 @@
                   <a:srgbClr val="606060"/>
                 </a:solidFill>
               </a:rPr>
-              <a:t>Clarke 변환</a:t>
+              <a:t>6-step Hall + BRK</a:t>
             </a:r>
           </a:p>
         </p:txBody>
@@ -20345,7 +20345,7 @@
                   <a:srgbClr val="107C10"/>
                 </a:solidFill>
               </a:rPr>
-              <a:t>foc_park.c</a:t>
+              <a:t>fdcan_motor_cmd.c</a:t>
             </a:r>
           </a:p>
         </p:txBody>
@@ -20379,7 +20379,7 @@
                   <a:srgbClr val="606060"/>
                 </a:solidFill>
               </a:rPr>
-              <a:t>Park 변환 (CORDIC)</a:t>
+              <a:t>FDCAN 핸들러</a:t>
             </a:r>
           </a:p>
         </p:txBody>
@@ -20456,7 +20456,7 @@
                   <a:srgbClr val="1A1A1A"/>
                 </a:solidFill>
               </a:rPr>
-              <a:t>✅</a:t>
+              <a:t>⬜</a:t>
             </a:r>
           </a:p>
         </p:txBody>
@@ -20490,7 +20490,7 @@
                   <a:srgbClr val="107C10"/>
                 </a:solidFill>
               </a:rPr>
-              <a:t>foc_inv_park.c</a:t>
+              <a:t>foc_clarke.c</a:t>
             </a:r>
           </a:p>
         </p:txBody>
@@ -20524,7 +20524,7 @@
                   <a:srgbClr val="606060"/>
                 </a:solidFill>
               </a:rPr>
-              <a:t>역 Park 변환</a:t>
+              <a:t>Clarke 변환 (가공 예정)</a:t>
             </a:r>
           </a:p>
         </p:txBody>
@@ -20601,7 +20601,7 @@
                   <a:srgbClr val="1A1A1A"/>
                 </a:solidFill>
               </a:rPr>
-              <a:t>✅</a:t>
+              <a:t>⬜</a:t>
             </a:r>
           </a:p>
         </p:txBody>
@@ -20635,7 +20635,7 @@
                   <a:srgbClr val="107C10"/>
                 </a:solidFill>
               </a:rPr>
-              <a:t>foc_svpwm.c</a:t>
+              <a:t>foc_park.c</a:t>
             </a:r>
           </a:p>
         </p:txBody>
@@ -20669,7 +20669,7 @@
                   <a:srgbClr val="606060"/>
                 </a:solidFill>
               </a:rPr>
-              <a:t>SVPWM</a:t>
+              <a:t>Park 변환 (가공 예정)</a:t>
             </a:r>
           </a:p>
         </p:txBody>
@@ -20746,7 +20746,7 @@
                   <a:srgbClr val="1A1A1A"/>
                 </a:solidFill>
               </a:rPr>
-              <a:t>✅</a:t>
+              <a:t>⬜</a:t>
             </a:r>
           </a:p>
         </p:txBody>
@@ -20780,7 +20780,7 @@
                   <a:srgbClr val="107C10"/>
                 </a:solidFill>
               </a:rPr>
-              <a:t>foc_current_pi.c</a:t>
+              <a:t>foc_inv_park.c</a:t>
             </a:r>
           </a:p>
         </p:txBody>
@@ -20814,7 +20814,7 @@
                   <a:srgbClr val="606060"/>
                 </a:solidFill>
               </a:rPr>
-              <a:t>Id/Iq PI 제어기</a:t>
+              <a:t>역 Park (가공 예정)</a:t>
             </a:r>
           </a:p>
         </p:txBody>
@@ -20891,7 +20891,7 @@
                   <a:srgbClr val="1A1A1A"/>
                 </a:solidFill>
               </a:rPr>
-              <a:t>✅</a:t>
+              <a:t>⬜</a:t>
             </a:r>
           </a:p>
         </p:txBody>
@@ -20925,7 +20925,7 @@
                   <a:srgbClr val="107C10"/>
                 </a:solidFill>
               </a:rPr>
-              <a:t>foc_speed_pi.c</a:t>
+              <a:t>foc_svpwm.c</a:t>
             </a:r>
           </a:p>
         </p:txBody>
@@ -20959,7 +20959,7 @@
                   <a:srgbClr val="606060"/>
                 </a:solidFill>
               </a:rPr>
-              <a:t>속도 PI</a:t>
+              <a:t>SVPWM (가공 예정)</a:t>
             </a:r>
           </a:p>
         </p:txBody>
@@ -21036,7 +21036,7 @@
                   <a:srgbClr val="1A1A1A"/>
                 </a:solidFill>
               </a:rPr>
-              <a:t>✅</a:t>
+              <a:t>⬜</a:t>
             </a:r>
           </a:p>
         </p:txBody>
@@ -21070,7 +21070,7 @@
                   <a:srgbClr val="107C10"/>
                 </a:solidFill>
               </a:rPr>
-              <a:t>foc_angle_encoder.c</a:t>
+              <a:t>foc_current_pi.c</a:t>
             </a:r>
           </a:p>
         </p:txBody>
@@ -21104,7 +21104,7 @@
                   <a:srgbClr val="606060"/>
                 </a:solidFill>
               </a:rPr>
-              <a:t>엔코더 각도</a:t>
+              <a:t>PI 제어기 (가공 예정)</a:t>
             </a:r>
           </a:p>
         </p:txBody>
@@ -21181,7 +21181,7 @@
                   <a:srgbClr val="1A1A1A"/>
                 </a:solidFill>
               </a:rPr>
-              <a:t>✅</a:t>
+              <a:t>⬜</a:t>
             </a:r>
           </a:p>
         </p:txBody>
@@ -21215,7 +21215,7 @@
                   <a:srgbClr val="107C10"/>
                 </a:solidFill>
               </a:rPr>
-              <a:t>foc_current_sense.c</a:t>
+              <a:t>foc_angle_encoder.c</a:t>
             </a:r>
           </a:p>
         </p:txBody>
@@ -21249,7 +21249,7 @@
                   <a:srgbClr val="606060"/>
                 </a:solidFill>
               </a:rPr>
-              <a:t>전류 감지</a:t>
+              <a:t>엔코더 (가공 예정)</a:t>
             </a:r>
           </a:p>
         </p:txBody>
@@ -21326,7 +21326,7 @@
                   <a:srgbClr val="1A1A1A"/>
                 </a:solidFill>
               </a:rPr>
-              <a:t>✅</a:t>
+              <a:t>⬜</a:t>
             </a:r>
           </a:p>
         </p:txBody>
@@ -21360,7 +21360,7 @@
                   <a:srgbClr val="107C10"/>
                 </a:solidFill>
               </a:rPr>
-              <a:t>fdcan_motor_cmd.c</a:t>
+              <a:t>foc_current_sense.c</a:t>
             </a:r>
           </a:p>
         </p:txBody>
@@ -21394,7 +21394,7 @@
                   <a:srgbClr val="606060"/>
                 </a:solidFill>
               </a:rPr>
-              <a:t>FDCAN 핸들러</a:t>
+              <a:t>전류 감지 (가공 예정)</a:t>
             </a:r>
           </a:p>
         </p:txBody>
@@ -33170,7 +33170,7 @@
                   <a:srgbClr val="1B3A6B"/>
                 </a:solidFill>
               </a:rPr>
-              <a:t>foc_clarke.c</a:t>
+              <a:t>bldc_6step_hall.c</a:t>
             </a:r>
           </a:p>
         </p:txBody>
@@ -33204,7 +33204,7 @@
                   <a:srgbClr val="718296"/>
                 </a:solidFill>
               </a:rPr>
-              <a:t>Clarke 변환</a:t>
+              <a:t>6-step Hall + BRK</a:t>
             </a:r>
           </a:p>
         </p:txBody>
@@ -33358,7 +33358,7 @@
                   <a:srgbClr val="1B3A6B"/>
                 </a:solidFill>
               </a:rPr>
-              <a:t>foc_park.c</a:t>
+              <a:t>fdcan_motor_cmd.c</a:t>
             </a:r>
           </a:p>
         </p:txBody>
@@ -33392,7 +33392,7 @@
                   <a:srgbClr val="718296"/>
                 </a:solidFill>
               </a:rPr>
-              <a:t>Park 변환 (CORDIC)</a:t>
+              <a:t>FDCAN 핸들러</a:t>
             </a:r>
           </a:p>
         </p:txBody>
@@ -33407,6 +33407,758 @@
           <a:xfrm>
             <a:off x="457200" y="5394960"/>
             <a:ext cx="201168" cy="201168"/>
+          </a:xfrm>
+          <a:prstGeom prst="rect">
+            <a:avLst/>
+          </a:prstGeom>
+          <a:solidFill>
+            <a:srgbClr val="FFFFFF"/>
+          </a:solidFill>
+          <a:ln>
+            <a:noFill/>
+          </a:ln>
+        </p:spPr>
+        <p:style>
+          <a:lnRef idx="1">
+            <a:schemeClr val="accent1"/>
+          </a:lnRef>
+          <a:fillRef idx="3">
+            <a:schemeClr val="accent1"/>
+          </a:fillRef>
+          <a:effectRef idx="2">
+            <a:schemeClr val="accent1"/>
+          </a:effectRef>
+          <a:fontRef idx="minor">
+            <a:schemeClr val="lt1"/>
+          </a:fontRef>
+        </p:style>
+        <p:txBody>
+          <a:bodyPr rtlCol="0" anchor="ctr"/>
+          <a:lstStyle/>
+          <a:p>
+            <a:pPr algn="ctr"/>
+          </a:p>
+        </p:txBody>
+      </p:sp>
+      <p:sp>
+        <p:nvSpPr>
+          <p:cNvPr id="54" name="Rectangle 53"/>
+          <p:cNvSpPr/>
+          <p:nvPr/>
+        </p:nvSpPr>
+        <p:spPr>
+          <a:xfrm>
+            <a:off x="457200" y="5394960"/>
+            <a:ext cx="201168" cy="201168"/>
+          </a:xfrm>
+          <a:prstGeom prst="rect">
+            <a:avLst/>
+          </a:prstGeom>
+          <a:noFill/>
+          <a:ln w="12700">
+            <a:solidFill>
+              <a:srgbClr val="107C10"/>
+            </a:solidFill>
+          </a:ln>
+        </p:spPr>
+        <p:style>
+          <a:lnRef idx="1">
+            <a:schemeClr val="accent1"/>
+          </a:lnRef>
+          <a:fillRef idx="3">
+            <a:schemeClr val="accent1"/>
+          </a:fillRef>
+          <a:effectRef idx="2">
+            <a:schemeClr val="accent1"/>
+          </a:effectRef>
+          <a:fontRef idx="minor">
+            <a:schemeClr val="lt1"/>
+          </a:fontRef>
+        </p:style>
+        <p:txBody>
+          <a:bodyPr rtlCol="0" anchor="ctr"/>
+          <a:lstStyle/>
+          <a:p>
+            <a:pPr algn="ctr"/>
+          </a:p>
+        </p:txBody>
+      </p:sp>
+      <p:sp>
+        <p:nvSpPr>
+          <p:cNvPr id="55" name="TextBox 54"/>
+          <p:cNvSpPr txBox="1"/>
+          <p:nvPr/>
+        </p:nvSpPr>
+        <p:spPr>
+          <a:xfrm>
+            <a:off x="457200" y="5394960"/>
+            <a:ext cx="201168" cy="201168"/>
+          </a:xfrm>
+          <a:prstGeom prst="rect">
+            <a:avLst/>
+          </a:prstGeom>
+          <a:noFill/>
+        </p:spPr>
+        <p:txBody>
+          <a:bodyPr wrap="square">
+            <a:spAutoFit/>
+          </a:bodyPr>
+          <a:lstStyle/>
+          <a:p>
+            <a:pPr algn="ctr"/>
+            <a:r>
+              <a:rPr sz="800" b="1" i="0">
+                <a:solidFill>
+                  <a:srgbClr val="FFFFFF"/>
+                </a:solidFill>
+              </a:rPr>
+              <a:t> </a:t>
+            </a:r>
+          </a:p>
+        </p:txBody>
+      </p:sp>
+      <p:sp>
+        <p:nvSpPr>
+          <p:cNvPr id="56" name="TextBox 55"/>
+          <p:cNvSpPr txBox="1"/>
+          <p:nvPr/>
+        </p:nvSpPr>
+        <p:spPr>
+          <a:xfrm>
+            <a:off x="731520" y="5413248"/>
+            <a:ext cx="2103120" cy="182880"/>
+          </a:xfrm>
+          <a:prstGeom prst="rect">
+            <a:avLst/>
+          </a:prstGeom>
+          <a:noFill/>
+        </p:spPr>
+        <p:txBody>
+          <a:bodyPr wrap="square">
+            <a:spAutoFit/>
+          </a:bodyPr>
+          <a:lstStyle/>
+          <a:p>
+            <a:pPr algn="l"/>
+            <a:r>
+              <a:rPr sz="900" b="1" i="0">
+                <a:solidFill>
+                  <a:srgbClr val="1B3A6B"/>
+                </a:solidFill>
+              </a:rPr>
+              <a:t>foc_clarke.c</a:t>
+            </a:r>
+          </a:p>
+        </p:txBody>
+      </p:sp>
+      <p:sp>
+        <p:nvSpPr>
+          <p:cNvPr id="57" name="TextBox 56"/>
+          <p:cNvSpPr txBox="1"/>
+          <p:nvPr/>
+        </p:nvSpPr>
+        <p:spPr>
+          <a:xfrm>
+            <a:off x="2926080" y="5413248"/>
+            <a:ext cx="2286000" cy="182880"/>
+          </a:xfrm>
+          <a:prstGeom prst="rect">
+            <a:avLst/>
+          </a:prstGeom>
+          <a:noFill/>
+        </p:spPr>
+        <p:txBody>
+          <a:bodyPr wrap="square">
+            <a:spAutoFit/>
+          </a:bodyPr>
+          <a:lstStyle/>
+          <a:p>
+            <a:pPr algn="l"/>
+            <a:r>
+              <a:rPr sz="900" b="0" i="0">
+                <a:solidFill>
+                  <a:srgbClr val="718296"/>
+                </a:solidFill>
+              </a:rPr>
+              <a:t>Clarke (오픈소스 가공 예정)</a:t>
+            </a:r>
+          </a:p>
+        </p:txBody>
+      </p:sp>
+      <p:sp>
+        <p:nvSpPr>
+          <p:cNvPr id="58" name="Rectangle 57"/>
+          <p:cNvSpPr/>
+          <p:nvPr/>
+        </p:nvSpPr>
+        <p:spPr>
+          <a:xfrm>
+            <a:off x="457200" y="5632704"/>
+            <a:ext cx="201168" cy="201168"/>
+          </a:xfrm>
+          <a:prstGeom prst="rect">
+            <a:avLst/>
+          </a:prstGeom>
+          <a:solidFill>
+            <a:srgbClr val="FFFFFF"/>
+          </a:solidFill>
+          <a:ln>
+            <a:noFill/>
+          </a:ln>
+        </p:spPr>
+        <p:style>
+          <a:lnRef idx="1">
+            <a:schemeClr val="accent1"/>
+          </a:lnRef>
+          <a:fillRef idx="3">
+            <a:schemeClr val="accent1"/>
+          </a:fillRef>
+          <a:effectRef idx="2">
+            <a:schemeClr val="accent1"/>
+          </a:effectRef>
+          <a:fontRef idx="minor">
+            <a:schemeClr val="lt1"/>
+          </a:fontRef>
+        </p:style>
+        <p:txBody>
+          <a:bodyPr rtlCol="0" anchor="ctr"/>
+          <a:lstStyle/>
+          <a:p>
+            <a:pPr algn="ctr"/>
+          </a:p>
+        </p:txBody>
+      </p:sp>
+      <p:sp>
+        <p:nvSpPr>
+          <p:cNvPr id="59" name="Rectangle 58"/>
+          <p:cNvSpPr/>
+          <p:nvPr/>
+        </p:nvSpPr>
+        <p:spPr>
+          <a:xfrm>
+            <a:off x="457200" y="5632704"/>
+            <a:ext cx="201168" cy="201168"/>
+          </a:xfrm>
+          <a:prstGeom prst="rect">
+            <a:avLst/>
+          </a:prstGeom>
+          <a:noFill/>
+          <a:ln w="12700">
+            <a:solidFill>
+              <a:srgbClr val="107C10"/>
+            </a:solidFill>
+          </a:ln>
+        </p:spPr>
+        <p:style>
+          <a:lnRef idx="1">
+            <a:schemeClr val="accent1"/>
+          </a:lnRef>
+          <a:fillRef idx="3">
+            <a:schemeClr val="accent1"/>
+          </a:fillRef>
+          <a:effectRef idx="2">
+            <a:schemeClr val="accent1"/>
+          </a:effectRef>
+          <a:fontRef idx="minor">
+            <a:schemeClr val="lt1"/>
+          </a:fontRef>
+        </p:style>
+        <p:txBody>
+          <a:bodyPr rtlCol="0" anchor="ctr"/>
+          <a:lstStyle/>
+          <a:p>
+            <a:pPr algn="ctr"/>
+          </a:p>
+        </p:txBody>
+      </p:sp>
+      <p:sp>
+        <p:nvSpPr>
+          <p:cNvPr id="60" name="TextBox 59"/>
+          <p:cNvSpPr txBox="1"/>
+          <p:nvPr/>
+        </p:nvSpPr>
+        <p:spPr>
+          <a:xfrm>
+            <a:off x="457200" y="5632704"/>
+            <a:ext cx="201168" cy="201168"/>
+          </a:xfrm>
+          <a:prstGeom prst="rect">
+            <a:avLst/>
+          </a:prstGeom>
+          <a:noFill/>
+        </p:spPr>
+        <p:txBody>
+          <a:bodyPr wrap="square">
+            <a:spAutoFit/>
+          </a:bodyPr>
+          <a:lstStyle/>
+          <a:p>
+            <a:pPr algn="ctr"/>
+            <a:r>
+              <a:rPr sz="800" b="1" i="0">
+                <a:solidFill>
+                  <a:srgbClr val="FFFFFF"/>
+                </a:solidFill>
+              </a:rPr>
+              <a:t> </a:t>
+            </a:r>
+          </a:p>
+        </p:txBody>
+      </p:sp>
+      <p:sp>
+        <p:nvSpPr>
+          <p:cNvPr id="61" name="TextBox 60"/>
+          <p:cNvSpPr txBox="1"/>
+          <p:nvPr/>
+        </p:nvSpPr>
+        <p:spPr>
+          <a:xfrm>
+            <a:off x="731520" y="5650992"/>
+            <a:ext cx="2103120" cy="182880"/>
+          </a:xfrm>
+          <a:prstGeom prst="rect">
+            <a:avLst/>
+          </a:prstGeom>
+          <a:noFill/>
+        </p:spPr>
+        <p:txBody>
+          <a:bodyPr wrap="square">
+            <a:spAutoFit/>
+          </a:bodyPr>
+          <a:lstStyle/>
+          <a:p>
+            <a:pPr algn="l"/>
+            <a:r>
+              <a:rPr sz="900" b="1" i="0">
+                <a:solidFill>
+                  <a:srgbClr val="1B3A6B"/>
+                </a:solidFill>
+              </a:rPr>
+              <a:t>foc_park.c</a:t>
+            </a:r>
+          </a:p>
+        </p:txBody>
+      </p:sp>
+      <p:sp>
+        <p:nvSpPr>
+          <p:cNvPr id="62" name="TextBox 61"/>
+          <p:cNvSpPr txBox="1"/>
+          <p:nvPr/>
+        </p:nvSpPr>
+        <p:spPr>
+          <a:xfrm>
+            <a:off x="2926080" y="5650992"/>
+            <a:ext cx="2286000" cy="182880"/>
+          </a:xfrm>
+          <a:prstGeom prst="rect">
+            <a:avLst/>
+          </a:prstGeom>
+          <a:noFill/>
+        </p:spPr>
+        <p:txBody>
+          <a:bodyPr wrap="square">
+            <a:spAutoFit/>
+          </a:bodyPr>
+          <a:lstStyle/>
+          <a:p>
+            <a:pPr algn="l"/>
+            <a:r>
+              <a:rPr sz="900" b="0" i="0">
+                <a:solidFill>
+                  <a:srgbClr val="718296"/>
+                </a:solidFill>
+              </a:rPr>
+              <a:t>Park (가공 예정)</a:t>
+            </a:r>
+          </a:p>
+        </p:txBody>
+      </p:sp>
+      <p:sp>
+        <p:nvSpPr>
+          <p:cNvPr id="63" name="Rectangle 62"/>
+          <p:cNvSpPr/>
+          <p:nvPr/>
+        </p:nvSpPr>
+        <p:spPr>
+          <a:xfrm>
+            <a:off x="457200" y="5870448"/>
+            <a:ext cx="201168" cy="201168"/>
+          </a:xfrm>
+          <a:prstGeom prst="rect">
+            <a:avLst/>
+          </a:prstGeom>
+          <a:solidFill>
+            <a:srgbClr val="FFFFFF"/>
+          </a:solidFill>
+          <a:ln>
+            <a:noFill/>
+          </a:ln>
+        </p:spPr>
+        <p:style>
+          <a:lnRef idx="1">
+            <a:schemeClr val="accent1"/>
+          </a:lnRef>
+          <a:fillRef idx="3">
+            <a:schemeClr val="accent1"/>
+          </a:fillRef>
+          <a:effectRef idx="2">
+            <a:schemeClr val="accent1"/>
+          </a:effectRef>
+          <a:fontRef idx="minor">
+            <a:schemeClr val="lt1"/>
+          </a:fontRef>
+        </p:style>
+        <p:txBody>
+          <a:bodyPr rtlCol="0" anchor="ctr"/>
+          <a:lstStyle/>
+          <a:p>
+            <a:pPr algn="ctr"/>
+          </a:p>
+        </p:txBody>
+      </p:sp>
+      <p:sp>
+        <p:nvSpPr>
+          <p:cNvPr id="64" name="Rectangle 63"/>
+          <p:cNvSpPr/>
+          <p:nvPr/>
+        </p:nvSpPr>
+        <p:spPr>
+          <a:xfrm>
+            <a:off x="457200" y="5870448"/>
+            <a:ext cx="201168" cy="201168"/>
+          </a:xfrm>
+          <a:prstGeom prst="rect">
+            <a:avLst/>
+          </a:prstGeom>
+          <a:noFill/>
+          <a:ln w="12700">
+            <a:solidFill>
+              <a:srgbClr val="107C10"/>
+            </a:solidFill>
+          </a:ln>
+        </p:spPr>
+        <p:style>
+          <a:lnRef idx="1">
+            <a:schemeClr val="accent1"/>
+          </a:lnRef>
+          <a:fillRef idx="3">
+            <a:schemeClr val="accent1"/>
+          </a:fillRef>
+          <a:effectRef idx="2">
+            <a:schemeClr val="accent1"/>
+          </a:effectRef>
+          <a:fontRef idx="minor">
+            <a:schemeClr val="lt1"/>
+          </a:fontRef>
+        </p:style>
+        <p:txBody>
+          <a:bodyPr rtlCol="0" anchor="ctr"/>
+          <a:lstStyle/>
+          <a:p>
+            <a:pPr algn="ctr"/>
+          </a:p>
+        </p:txBody>
+      </p:sp>
+      <p:sp>
+        <p:nvSpPr>
+          <p:cNvPr id="65" name="TextBox 64"/>
+          <p:cNvSpPr txBox="1"/>
+          <p:nvPr/>
+        </p:nvSpPr>
+        <p:spPr>
+          <a:xfrm>
+            <a:off x="457200" y="5870448"/>
+            <a:ext cx="201168" cy="201168"/>
+          </a:xfrm>
+          <a:prstGeom prst="rect">
+            <a:avLst/>
+          </a:prstGeom>
+          <a:noFill/>
+        </p:spPr>
+        <p:txBody>
+          <a:bodyPr wrap="square">
+            <a:spAutoFit/>
+          </a:bodyPr>
+          <a:lstStyle/>
+          <a:p>
+            <a:pPr algn="ctr"/>
+            <a:r>
+              <a:rPr sz="800" b="1" i="0">
+                <a:solidFill>
+                  <a:srgbClr val="FFFFFF"/>
+                </a:solidFill>
+              </a:rPr>
+              <a:t> </a:t>
+            </a:r>
+          </a:p>
+        </p:txBody>
+      </p:sp>
+      <p:sp>
+        <p:nvSpPr>
+          <p:cNvPr id="66" name="TextBox 65"/>
+          <p:cNvSpPr txBox="1"/>
+          <p:nvPr/>
+        </p:nvSpPr>
+        <p:spPr>
+          <a:xfrm>
+            <a:off x="731520" y="5888736"/>
+            <a:ext cx="2103120" cy="182880"/>
+          </a:xfrm>
+          <a:prstGeom prst="rect">
+            <a:avLst/>
+          </a:prstGeom>
+          <a:noFill/>
+        </p:spPr>
+        <p:txBody>
+          <a:bodyPr wrap="square">
+            <a:spAutoFit/>
+          </a:bodyPr>
+          <a:lstStyle/>
+          <a:p>
+            <a:pPr algn="l"/>
+            <a:r>
+              <a:rPr sz="900" b="1" i="0">
+                <a:solidFill>
+                  <a:srgbClr val="1B3A6B"/>
+                </a:solidFill>
+              </a:rPr>
+              <a:t>foc_svpwm.c</a:t>
+            </a:r>
+          </a:p>
+        </p:txBody>
+      </p:sp>
+      <p:sp>
+        <p:nvSpPr>
+          <p:cNvPr id="67" name="TextBox 66"/>
+          <p:cNvSpPr txBox="1"/>
+          <p:nvPr/>
+        </p:nvSpPr>
+        <p:spPr>
+          <a:xfrm>
+            <a:off x="2926080" y="5888736"/>
+            <a:ext cx="2286000" cy="182880"/>
+          </a:xfrm>
+          <a:prstGeom prst="rect">
+            <a:avLst/>
+          </a:prstGeom>
+          <a:noFill/>
+        </p:spPr>
+        <p:txBody>
+          <a:bodyPr wrap="square">
+            <a:spAutoFit/>
+          </a:bodyPr>
+          <a:lstStyle/>
+          <a:p>
+            <a:pPr algn="l"/>
+            <a:r>
+              <a:rPr sz="900" b="0" i="0">
+                <a:solidFill>
+                  <a:srgbClr val="718296"/>
+                </a:solidFill>
+              </a:rPr>
+              <a:t>SVPWM (가공 예정)</a:t>
+            </a:r>
+          </a:p>
+        </p:txBody>
+      </p:sp>
+      <p:sp>
+        <p:nvSpPr>
+          <p:cNvPr id="68" name="Rectangle 67"/>
+          <p:cNvSpPr/>
+          <p:nvPr/>
+        </p:nvSpPr>
+        <p:spPr>
+          <a:xfrm>
+            <a:off x="457200" y="6108192"/>
+            <a:ext cx="201168" cy="201168"/>
+          </a:xfrm>
+          <a:prstGeom prst="rect">
+            <a:avLst/>
+          </a:prstGeom>
+          <a:solidFill>
+            <a:srgbClr val="FFFFFF"/>
+          </a:solidFill>
+          <a:ln>
+            <a:noFill/>
+          </a:ln>
+        </p:spPr>
+        <p:style>
+          <a:lnRef idx="1">
+            <a:schemeClr val="accent1"/>
+          </a:lnRef>
+          <a:fillRef idx="3">
+            <a:schemeClr val="accent1"/>
+          </a:fillRef>
+          <a:effectRef idx="2">
+            <a:schemeClr val="accent1"/>
+          </a:effectRef>
+          <a:fontRef idx="minor">
+            <a:schemeClr val="lt1"/>
+          </a:fontRef>
+        </p:style>
+        <p:txBody>
+          <a:bodyPr rtlCol="0" anchor="ctr"/>
+          <a:lstStyle/>
+          <a:p>
+            <a:pPr algn="ctr"/>
+          </a:p>
+        </p:txBody>
+      </p:sp>
+      <p:sp>
+        <p:nvSpPr>
+          <p:cNvPr id="69" name="Rectangle 68"/>
+          <p:cNvSpPr/>
+          <p:nvPr/>
+        </p:nvSpPr>
+        <p:spPr>
+          <a:xfrm>
+            <a:off x="457200" y="6108192"/>
+            <a:ext cx="201168" cy="201168"/>
+          </a:xfrm>
+          <a:prstGeom prst="rect">
+            <a:avLst/>
+          </a:prstGeom>
+          <a:noFill/>
+          <a:ln w="12700">
+            <a:solidFill>
+              <a:srgbClr val="107C10"/>
+            </a:solidFill>
+          </a:ln>
+        </p:spPr>
+        <p:style>
+          <a:lnRef idx="1">
+            <a:schemeClr val="accent1"/>
+          </a:lnRef>
+          <a:fillRef idx="3">
+            <a:schemeClr val="accent1"/>
+          </a:fillRef>
+          <a:effectRef idx="2">
+            <a:schemeClr val="accent1"/>
+          </a:effectRef>
+          <a:fontRef idx="minor">
+            <a:schemeClr val="lt1"/>
+          </a:fontRef>
+        </p:style>
+        <p:txBody>
+          <a:bodyPr rtlCol="0" anchor="ctr"/>
+          <a:lstStyle/>
+          <a:p>
+            <a:pPr algn="ctr"/>
+          </a:p>
+        </p:txBody>
+      </p:sp>
+      <p:sp>
+        <p:nvSpPr>
+          <p:cNvPr id="70" name="TextBox 69"/>
+          <p:cNvSpPr txBox="1"/>
+          <p:nvPr/>
+        </p:nvSpPr>
+        <p:spPr>
+          <a:xfrm>
+            <a:off x="457200" y="6108192"/>
+            <a:ext cx="201168" cy="201168"/>
+          </a:xfrm>
+          <a:prstGeom prst="rect">
+            <a:avLst/>
+          </a:prstGeom>
+          <a:noFill/>
+        </p:spPr>
+        <p:txBody>
+          <a:bodyPr wrap="square">
+            <a:spAutoFit/>
+          </a:bodyPr>
+          <a:lstStyle/>
+          <a:p>
+            <a:pPr algn="ctr"/>
+            <a:r>
+              <a:rPr sz="800" b="1" i="0">
+                <a:solidFill>
+                  <a:srgbClr val="FFFFFF"/>
+                </a:solidFill>
+              </a:rPr>
+              <a:t> </a:t>
+            </a:r>
+          </a:p>
+        </p:txBody>
+      </p:sp>
+      <p:sp>
+        <p:nvSpPr>
+          <p:cNvPr id="71" name="TextBox 70"/>
+          <p:cNvSpPr txBox="1"/>
+          <p:nvPr/>
+        </p:nvSpPr>
+        <p:spPr>
+          <a:xfrm>
+            <a:off x="731520" y="6126479"/>
+            <a:ext cx="2103120" cy="182880"/>
+          </a:xfrm>
+          <a:prstGeom prst="rect">
+            <a:avLst/>
+          </a:prstGeom>
+          <a:noFill/>
+        </p:spPr>
+        <p:txBody>
+          <a:bodyPr wrap="square">
+            <a:spAutoFit/>
+          </a:bodyPr>
+          <a:lstStyle/>
+          <a:p>
+            <a:pPr algn="l"/>
+            <a:r>
+              <a:rPr sz="900" b="1" i="0">
+                <a:solidFill>
+                  <a:srgbClr val="1B3A6B"/>
+                </a:solidFill>
+              </a:rPr>
+              <a:t>foc_current_pi.c</a:t>
+            </a:r>
+          </a:p>
+        </p:txBody>
+      </p:sp>
+      <p:sp>
+        <p:nvSpPr>
+          <p:cNvPr id="72" name="TextBox 71"/>
+          <p:cNvSpPr txBox="1"/>
+          <p:nvPr/>
+        </p:nvSpPr>
+        <p:spPr>
+          <a:xfrm>
+            <a:off x="2926080" y="6126479"/>
+            <a:ext cx="2286000" cy="182880"/>
+          </a:xfrm>
+          <a:prstGeom prst="rect">
+            <a:avLst/>
+          </a:prstGeom>
+          <a:noFill/>
+        </p:spPr>
+        <p:txBody>
+          <a:bodyPr wrap="square">
+            <a:spAutoFit/>
+          </a:bodyPr>
+          <a:lstStyle/>
+          <a:p>
+            <a:pPr algn="l"/>
+            <a:r>
+              <a:rPr sz="900" b="0" i="0">
+                <a:solidFill>
+                  <a:srgbClr val="718296"/>
+                </a:solidFill>
+              </a:rPr>
+              <a:t>PI 제어 (가공 예정)</a:t>
+            </a:r>
+          </a:p>
+        </p:txBody>
+      </p:sp>
+      <p:sp>
+        <p:nvSpPr>
+          <p:cNvPr id="73" name="Rectangle 72"/>
+          <p:cNvSpPr/>
+          <p:nvPr/>
+        </p:nvSpPr>
+        <p:spPr>
+          <a:xfrm>
+            <a:off x="365760" y="6035040"/>
+            <a:ext cx="5029200" cy="292608"/>
           </a:xfrm>
           <a:prstGeom prst="rect">
             <a:avLst/>
@@ -33442,758 +34194,6 @@
       </p:sp>
       <p:sp>
         <p:nvSpPr>
-          <p:cNvPr id="54" name="Rectangle 53"/>
-          <p:cNvSpPr/>
-          <p:nvPr/>
-        </p:nvSpPr>
-        <p:spPr>
-          <a:xfrm>
-            <a:off x="457200" y="5394960"/>
-            <a:ext cx="201168" cy="201168"/>
-          </a:xfrm>
-          <a:prstGeom prst="rect">
-            <a:avLst/>
-          </a:prstGeom>
-          <a:noFill/>
-          <a:ln w="12700">
-            <a:solidFill>
-              <a:srgbClr val="107C10"/>
-            </a:solidFill>
-          </a:ln>
-        </p:spPr>
-        <p:style>
-          <a:lnRef idx="1">
-            <a:schemeClr val="accent1"/>
-          </a:lnRef>
-          <a:fillRef idx="3">
-            <a:schemeClr val="accent1"/>
-          </a:fillRef>
-          <a:effectRef idx="2">
-            <a:schemeClr val="accent1"/>
-          </a:effectRef>
-          <a:fontRef idx="minor">
-            <a:schemeClr val="lt1"/>
-          </a:fontRef>
-        </p:style>
-        <p:txBody>
-          <a:bodyPr rtlCol="0" anchor="ctr"/>
-          <a:lstStyle/>
-          <a:p>
-            <a:pPr algn="ctr"/>
-          </a:p>
-        </p:txBody>
-      </p:sp>
-      <p:sp>
-        <p:nvSpPr>
-          <p:cNvPr id="55" name="TextBox 54"/>
-          <p:cNvSpPr txBox="1"/>
-          <p:nvPr/>
-        </p:nvSpPr>
-        <p:spPr>
-          <a:xfrm>
-            <a:off x="457200" y="5394960"/>
-            <a:ext cx="201168" cy="201168"/>
-          </a:xfrm>
-          <a:prstGeom prst="rect">
-            <a:avLst/>
-          </a:prstGeom>
-          <a:noFill/>
-        </p:spPr>
-        <p:txBody>
-          <a:bodyPr wrap="square">
-            <a:spAutoFit/>
-          </a:bodyPr>
-          <a:lstStyle/>
-          <a:p>
-            <a:pPr algn="ctr"/>
-            <a:r>
-              <a:rPr sz="800" b="1" i="0">
-                <a:solidFill>
-                  <a:srgbClr val="FFFFFF"/>
-                </a:solidFill>
-              </a:rPr>
-              <a:t>v</a:t>
-            </a:r>
-          </a:p>
-        </p:txBody>
-      </p:sp>
-      <p:sp>
-        <p:nvSpPr>
-          <p:cNvPr id="56" name="TextBox 55"/>
-          <p:cNvSpPr txBox="1"/>
-          <p:nvPr/>
-        </p:nvSpPr>
-        <p:spPr>
-          <a:xfrm>
-            <a:off x="731520" y="5413248"/>
-            <a:ext cx="2103120" cy="182880"/>
-          </a:xfrm>
-          <a:prstGeom prst="rect">
-            <a:avLst/>
-          </a:prstGeom>
-          <a:noFill/>
-        </p:spPr>
-        <p:txBody>
-          <a:bodyPr wrap="square">
-            <a:spAutoFit/>
-          </a:bodyPr>
-          <a:lstStyle/>
-          <a:p>
-            <a:pPr algn="l"/>
-            <a:r>
-              <a:rPr sz="900" b="1" i="0">
-                <a:solidFill>
-                  <a:srgbClr val="1B3A6B"/>
-                </a:solidFill>
-              </a:rPr>
-              <a:t>foc_inv_park.c</a:t>
-            </a:r>
-          </a:p>
-        </p:txBody>
-      </p:sp>
-      <p:sp>
-        <p:nvSpPr>
-          <p:cNvPr id="57" name="TextBox 56"/>
-          <p:cNvSpPr txBox="1"/>
-          <p:nvPr/>
-        </p:nvSpPr>
-        <p:spPr>
-          <a:xfrm>
-            <a:off x="2926080" y="5413248"/>
-            <a:ext cx="2286000" cy="182880"/>
-          </a:xfrm>
-          <a:prstGeom prst="rect">
-            <a:avLst/>
-          </a:prstGeom>
-          <a:noFill/>
-        </p:spPr>
-        <p:txBody>
-          <a:bodyPr wrap="square">
-            <a:spAutoFit/>
-          </a:bodyPr>
-          <a:lstStyle/>
-          <a:p>
-            <a:pPr algn="l"/>
-            <a:r>
-              <a:rPr sz="900" b="0" i="0">
-                <a:solidFill>
-                  <a:srgbClr val="718296"/>
-                </a:solidFill>
-              </a:rPr>
-              <a:t>역 Park 변환</a:t>
-            </a:r>
-          </a:p>
-        </p:txBody>
-      </p:sp>
-      <p:sp>
-        <p:nvSpPr>
-          <p:cNvPr id="58" name="Rectangle 57"/>
-          <p:cNvSpPr/>
-          <p:nvPr/>
-        </p:nvSpPr>
-        <p:spPr>
-          <a:xfrm>
-            <a:off x="457200" y="5632704"/>
-            <a:ext cx="201168" cy="201168"/>
-          </a:xfrm>
-          <a:prstGeom prst="rect">
-            <a:avLst/>
-          </a:prstGeom>
-          <a:solidFill>
-            <a:srgbClr val="107C10"/>
-          </a:solidFill>
-          <a:ln>
-            <a:noFill/>
-          </a:ln>
-        </p:spPr>
-        <p:style>
-          <a:lnRef idx="1">
-            <a:schemeClr val="accent1"/>
-          </a:lnRef>
-          <a:fillRef idx="3">
-            <a:schemeClr val="accent1"/>
-          </a:fillRef>
-          <a:effectRef idx="2">
-            <a:schemeClr val="accent1"/>
-          </a:effectRef>
-          <a:fontRef idx="minor">
-            <a:schemeClr val="lt1"/>
-          </a:fontRef>
-        </p:style>
-        <p:txBody>
-          <a:bodyPr rtlCol="0" anchor="ctr"/>
-          <a:lstStyle/>
-          <a:p>
-            <a:pPr algn="ctr"/>
-          </a:p>
-        </p:txBody>
-      </p:sp>
-      <p:sp>
-        <p:nvSpPr>
-          <p:cNvPr id="59" name="Rectangle 58"/>
-          <p:cNvSpPr/>
-          <p:nvPr/>
-        </p:nvSpPr>
-        <p:spPr>
-          <a:xfrm>
-            <a:off x="457200" y="5632704"/>
-            <a:ext cx="201168" cy="201168"/>
-          </a:xfrm>
-          <a:prstGeom prst="rect">
-            <a:avLst/>
-          </a:prstGeom>
-          <a:noFill/>
-          <a:ln w="12700">
-            <a:solidFill>
-              <a:srgbClr val="107C10"/>
-            </a:solidFill>
-          </a:ln>
-        </p:spPr>
-        <p:style>
-          <a:lnRef idx="1">
-            <a:schemeClr val="accent1"/>
-          </a:lnRef>
-          <a:fillRef idx="3">
-            <a:schemeClr val="accent1"/>
-          </a:fillRef>
-          <a:effectRef idx="2">
-            <a:schemeClr val="accent1"/>
-          </a:effectRef>
-          <a:fontRef idx="minor">
-            <a:schemeClr val="lt1"/>
-          </a:fontRef>
-        </p:style>
-        <p:txBody>
-          <a:bodyPr rtlCol="0" anchor="ctr"/>
-          <a:lstStyle/>
-          <a:p>
-            <a:pPr algn="ctr"/>
-          </a:p>
-        </p:txBody>
-      </p:sp>
-      <p:sp>
-        <p:nvSpPr>
-          <p:cNvPr id="60" name="TextBox 59"/>
-          <p:cNvSpPr txBox="1"/>
-          <p:nvPr/>
-        </p:nvSpPr>
-        <p:spPr>
-          <a:xfrm>
-            <a:off x="457200" y="5632704"/>
-            <a:ext cx="201168" cy="201168"/>
-          </a:xfrm>
-          <a:prstGeom prst="rect">
-            <a:avLst/>
-          </a:prstGeom>
-          <a:noFill/>
-        </p:spPr>
-        <p:txBody>
-          <a:bodyPr wrap="square">
-            <a:spAutoFit/>
-          </a:bodyPr>
-          <a:lstStyle/>
-          <a:p>
-            <a:pPr algn="ctr"/>
-            <a:r>
-              <a:rPr sz="800" b="1" i="0">
-                <a:solidFill>
-                  <a:srgbClr val="FFFFFF"/>
-                </a:solidFill>
-              </a:rPr>
-              <a:t>v</a:t>
-            </a:r>
-          </a:p>
-        </p:txBody>
-      </p:sp>
-      <p:sp>
-        <p:nvSpPr>
-          <p:cNvPr id="61" name="TextBox 60"/>
-          <p:cNvSpPr txBox="1"/>
-          <p:nvPr/>
-        </p:nvSpPr>
-        <p:spPr>
-          <a:xfrm>
-            <a:off x="731520" y="5650992"/>
-            <a:ext cx="2103120" cy="182880"/>
-          </a:xfrm>
-          <a:prstGeom prst="rect">
-            <a:avLst/>
-          </a:prstGeom>
-          <a:noFill/>
-        </p:spPr>
-        <p:txBody>
-          <a:bodyPr wrap="square">
-            <a:spAutoFit/>
-          </a:bodyPr>
-          <a:lstStyle/>
-          <a:p>
-            <a:pPr algn="l"/>
-            <a:r>
-              <a:rPr sz="900" b="1" i="0">
-                <a:solidFill>
-                  <a:srgbClr val="1B3A6B"/>
-                </a:solidFill>
-              </a:rPr>
-              <a:t>foc_svpwm.c</a:t>
-            </a:r>
-          </a:p>
-        </p:txBody>
-      </p:sp>
-      <p:sp>
-        <p:nvSpPr>
-          <p:cNvPr id="62" name="TextBox 61"/>
-          <p:cNvSpPr txBox="1"/>
-          <p:nvPr/>
-        </p:nvSpPr>
-        <p:spPr>
-          <a:xfrm>
-            <a:off x="2926080" y="5650992"/>
-            <a:ext cx="2286000" cy="182880"/>
-          </a:xfrm>
-          <a:prstGeom prst="rect">
-            <a:avLst/>
-          </a:prstGeom>
-          <a:noFill/>
-        </p:spPr>
-        <p:txBody>
-          <a:bodyPr wrap="square">
-            <a:spAutoFit/>
-          </a:bodyPr>
-          <a:lstStyle/>
-          <a:p>
-            <a:pPr algn="l"/>
-            <a:r>
-              <a:rPr sz="900" b="0" i="0">
-                <a:solidFill>
-                  <a:srgbClr val="718296"/>
-                </a:solidFill>
-              </a:rPr>
-              <a:t>SVPWM</a:t>
-            </a:r>
-          </a:p>
-        </p:txBody>
-      </p:sp>
-      <p:sp>
-        <p:nvSpPr>
-          <p:cNvPr id="63" name="Rectangle 62"/>
-          <p:cNvSpPr/>
-          <p:nvPr/>
-        </p:nvSpPr>
-        <p:spPr>
-          <a:xfrm>
-            <a:off x="457200" y="5870448"/>
-            <a:ext cx="201168" cy="201168"/>
-          </a:xfrm>
-          <a:prstGeom prst="rect">
-            <a:avLst/>
-          </a:prstGeom>
-          <a:solidFill>
-            <a:srgbClr val="107C10"/>
-          </a:solidFill>
-          <a:ln>
-            <a:noFill/>
-          </a:ln>
-        </p:spPr>
-        <p:style>
-          <a:lnRef idx="1">
-            <a:schemeClr val="accent1"/>
-          </a:lnRef>
-          <a:fillRef idx="3">
-            <a:schemeClr val="accent1"/>
-          </a:fillRef>
-          <a:effectRef idx="2">
-            <a:schemeClr val="accent1"/>
-          </a:effectRef>
-          <a:fontRef idx="minor">
-            <a:schemeClr val="lt1"/>
-          </a:fontRef>
-        </p:style>
-        <p:txBody>
-          <a:bodyPr rtlCol="0" anchor="ctr"/>
-          <a:lstStyle/>
-          <a:p>
-            <a:pPr algn="ctr"/>
-          </a:p>
-        </p:txBody>
-      </p:sp>
-      <p:sp>
-        <p:nvSpPr>
-          <p:cNvPr id="64" name="Rectangle 63"/>
-          <p:cNvSpPr/>
-          <p:nvPr/>
-        </p:nvSpPr>
-        <p:spPr>
-          <a:xfrm>
-            <a:off x="457200" y="5870448"/>
-            <a:ext cx="201168" cy="201168"/>
-          </a:xfrm>
-          <a:prstGeom prst="rect">
-            <a:avLst/>
-          </a:prstGeom>
-          <a:noFill/>
-          <a:ln w="12700">
-            <a:solidFill>
-              <a:srgbClr val="107C10"/>
-            </a:solidFill>
-          </a:ln>
-        </p:spPr>
-        <p:style>
-          <a:lnRef idx="1">
-            <a:schemeClr val="accent1"/>
-          </a:lnRef>
-          <a:fillRef idx="3">
-            <a:schemeClr val="accent1"/>
-          </a:fillRef>
-          <a:effectRef idx="2">
-            <a:schemeClr val="accent1"/>
-          </a:effectRef>
-          <a:fontRef idx="minor">
-            <a:schemeClr val="lt1"/>
-          </a:fontRef>
-        </p:style>
-        <p:txBody>
-          <a:bodyPr rtlCol="0" anchor="ctr"/>
-          <a:lstStyle/>
-          <a:p>
-            <a:pPr algn="ctr"/>
-          </a:p>
-        </p:txBody>
-      </p:sp>
-      <p:sp>
-        <p:nvSpPr>
-          <p:cNvPr id="65" name="TextBox 64"/>
-          <p:cNvSpPr txBox="1"/>
-          <p:nvPr/>
-        </p:nvSpPr>
-        <p:spPr>
-          <a:xfrm>
-            <a:off x="457200" y="5870448"/>
-            <a:ext cx="201168" cy="201168"/>
-          </a:xfrm>
-          <a:prstGeom prst="rect">
-            <a:avLst/>
-          </a:prstGeom>
-          <a:noFill/>
-        </p:spPr>
-        <p:txBody>
-          <a:bodyPr wrap="square">
-            <a:spAutoFit/>
-          </a:bodyPr>
-          <a:lstStyle/>
-          <a:p>
-            <a:pPr algn="ctr"/>
-            <a:r>
-              <a:rPr sz="800" b="1" i="0">
-                <a:solidFill>
-                  <a:srgbClr val="FFFFFF"/>
-                </a:solidFill>
-              </a:rPr>
-              <a:t>v</a:t>
-            </a:r>
-          </a:p>
-        </p:txBody>
-      </p:sp>
-      <p:sp>
-        <p:nvSpPr>
-          <p:cNvPr id="66" name="TextBox 65"/>
-          <p:cNvSpPr txBox="1"/>
-          <p:nvPr/>
-        </p:nvSpPr>
-        <p:spPr>
-          <a:xfrm>
-            <a:off x="731520" y="5888736"/>
-            <a:ext cx="2103120" cy="182880"/>
-          </a:xfrm>
-          <a:prstGeom prst="rect">
-            <a:avLst/>
-          </a:prstGeom>
-          <a:noFill/>
-        </p:spPr>
-        <p:txBody>
-          <a:bodyPr wrap="square">
-            <a:spAutoFit/>
-          </a:bodyPr>
-          <a:lstStyle/>
-          <a:p>
-            <a:pPr algn="l"/>
-            <a:r>
-              <a:rPr sz="900" b="1" i="0">
-                <a:solidFill>
-                  <a:srgbClr val="1B3A6B"/>
-                </a:solidFill>
-              </a:rPr>
-              <a:t>foc_current_pi.c</a:t>
-            </a:r>
-          </a:p>
-        </p:txBody>
-      </p:sp>
-      <p:sp>
-        <p:nvSpPr>
-          <p:cNvPr id="67" name="TextBox 66"/>
-          <p:cNvSpPr txBox="1"/>
-          <p:nvPr/>
-        </p:nvSpPr>
-        <p:spPr>
-          <a:xfrm>
-            <a:off x="2926080" y="5888736"/>
-            <a:ext cx="2286000" cy="182880"/>
-          </a:xfrm>
-          <a:prstGeom prst="rect">
-            <a:avLst/>
-          </a:prstGeom>
-          <a:noFill/>
-        </p:spPr>
-        <p:txBody>
-          <a:bodyPr wrap="square">
-            <a:spAutoFit/>
-          </a:bodyPr>
-          <a:lstStyle/>
-          <a:p>
-            <a:pPr algn="l"/>
-            <a:r>
-              <a:rPr sz="900" b="0" i="0">
-                <a:solidFill>
-                  <a:srgbClr val="718296"/>
-                </a:solidFill>
-              </a:rPr>
-              <a:t>Id/Iq PI 제어</a:t>
-            </a:r>
-          </a:p>
-        </p:txBody>
-      </p:sp>
-      <p:sp>
-        <p:nvSpPr>
-          <p:cNvPr id="68" name="Rectangle 67"/>
-          <p:cNvSpPr/>
-          <p:nvPr/>
-        </p:nvSpPr>
-        <p:spPr>
-          <a:xfrm>
-            <a:off x="457200" y="6108192"/>
-            <a:ext cx="201168" cy="201168"/>
-          </a:xfrm>
-          <a:prstGeom prst="rect">
-            <a:avLst/>
-          </a:prstGeom>
-          <a:solidFill>
-            <a:srgbClr val="107C10"/>
-          </a:solidFill>
-          <a:ln>
-            <a:noFill/>
-          </a:ln>
-        </p:spPr>
-        <p:style>
-          <a:lnRef idx="1">
-            <a:schemeClr val="accent1"/>
-          </a:lnRef>
-          <a:fillRef idx="3">
-            <a:schemeClr val="accent1"/>
-          </a:fillRef>
-          <a:effectRef idx="2">
-            <a:schemeClr val="accent1"/>
-          </a:effectRef>
-          <a:fontRef idx="minor">
-            <a:schemeClr val="lt1"/>
-          </a:fontRef>
-        </p:style>
-        <p:txBody>
-          <a:bodyPr rtlCol="0" anchor="ctr"/>
-          <a:lstStyle/>
-          <a:p>
-            <a:pPr algn="ctr"/>
-          </a:p>
-        </p:txBody>
-      </p:sp>
-      <p:sp>
-        <p:nvSpPr>
-          <p:cNvPr id="69" name="Rectangle 68"/>
-          <p:cNvSpPr/>
-          <p:nvPr/>
-        </p:nvSpPr>
-        <p:spPr>
-          <a:xfrm>
-            <a:off x="457200" y="6108192"/>
-            <a:ext cx="201168" cy="201168"/>
-          </a:xfrm>
-          <a:prstGeom prst="rect">
-            <a:avLst/>
-          </a:prstGeom>
-          <a:noFill/>
-          <a:ln w="12700">
-            <a:solidFill>
-              <a:srgbClr val="107C10"/>
-            </a:solidFill>
-          </a:ln>
-        </p:spPr>
-        <p:style>
-          <a:lnRef idx="1">
-            <a:schemeClr val="accent1"/>
-          </a:lnRef>
-          <a:fillRef idx="3">
-            <a:schemeClr val="accent1"/>
-          </a:fillRef>
-          <a:effectRef idx="2">
-            <a:schemeClr val="accent1"/>
-          </a:effectRef>
-          <a:fontRef idx="minor">
-            <a:schemeClr val="lt1"/>
-          </a:fontRef>
-        </p:style>
-        <p:txBody>
-          <a:bodyPr rtlCol="0" anchor="ctr"/>
-          <a:lstStyle/>
-          <a:p>
-            <a:pPr algn="ctr"/>
-          </a:p>
-        </p:txBody>
-      </p:sp>
-      <p:sp>
-        <p:nvSpPr>
-          <p:cNvPr id="70" name="TextBox 69"/>
-          <p:cNvSpPr txBox="1"/>
-          <p:nvPr/>
-        </p:nvSpPr>
-        <p:spPr>
-          <a:xfrm>
-            <a:off x="457200" y="6108192"/>
-            <a:ext cx="201168" cy="201168"/>
-          </a:xfrm>
-          <a:prstGeom prst="rect">
-            <a:avLst/>
-          </a:prstGeom>
-          <a:noFill/>
-        </p:spPr>
-        <p:txBody>
-          <a:bodyPr wrap="square">
-            <a:spAutoFit/>
-          </a:bodyPr>
-          <a:lstStyle/>
-          <a:p>
-            <a:pPr algn="ctr"/>
-            <a:r>
-              <a:rPr sz="800" b="1" i="0">
-                <a:solidFill>
-                  <a:srgbClr val="FFFFFF"/>
-                </a:solidFill>
-              </a:rPr>
-              <a:t>v</a:t>
-            </a:r>
-          </a:p>
-        </p:txBody>
-      </p:sp>
-      <p:sp>
-        <p:nvSpPr>
-          <p:cNvPr id="71" name="TextBox 70"/>
-          <p:cNvSpPr txBox="1"/>
-          <p:nvPr/>
-        </p:nvSpPr>
-        <p:spPr>
-          <a:xfrm>
-            <a:off x="731520" y="6126479"/>
-            <a:ext cx="2103120" cy="182880"/>
-          </a:xfrm>
-          <a:prstGeom prst="rect">
-            <a:avLst/>
-          </a:prstGeom>
-          <a:noFill/>
-        </p:spPr>
-        <p:txBody>
-          <a:bodyPr wrap="square">
-            <a:spAutoFit/>
-          </a:bodyPr>
-          <a:lstStyle/>
-          <a:p>
-            <a:pPr algn="l"/>
-            <a:r>
-              <a:rPr sz="900" b="1" i="0">
-                <a:solidFill>
-                  <a:srgbClr val="1B3A6B"/>
-                </a:solidFill>
-              </a:rPr>
-              <a:t>fdcan_motor_cmd.c</a:t>
-            </a:r>
-          </a:p>
-        </p:txBody>
-      </p:sp>
-      <p:sp>
-        <p:nvSpPr>
-          <p:cNvPr id="72" name="TextBox 71"/>
-          <p:cNvSpPr txBox="1"/>
-          <p:nvPr/>
-        </p:nvSpPr>
-        <p:spPr>
-          <a:xfrm>
-            <a:off x="2926080" y="6126479"/>
-            <a:ext cx="2286000" cy="182880"/>
-          </a:xfrm>
-          <a:prstGeom prst="rect">
-            <a:avLst/>
-          </a:prstGeom>
-          <a:noFill/>
-        </p:spPr>
-        <p:txBody>
-          <a:bodyPr wrap="square">
-            <a:spAutoFit/>
-          </a:bodyPr>
-          <a:lstStyle/>
-          <a:p>
-            <a:pPr algn="l"/>
-            <a:r>
-              <a:rPr sz="900" b="0" i="0">
-                <a:solidFill>
-                  <a:srgbClr val="718296"/>
-                </a:solidFill>
-              </a:rPr>
-              <a:t>FDCAN 핸들러</a:t>
-            </a:r>
-          </a:p>
-        </p:txBody>
-      </p:sp>
-      <p:sp>
-        <p:nvSpPr>
-          <p:cNvPr id="73" name="Rectangle 72"/>
-          <p:cNvSpPr/>
-          <p:nvPr/>
-        </p:nvSpPr>
-        <p:spPr>
-          <a:xfrm>
-            <a:off x="365760" y="6035040"/>
-            <a:ext cx="5029200" cy="292608"/>
-          </a:xfrm>
-          <a:prstGeom prst="rect">
-            <a:avLst/>
-          </a:prstGeom>
-          <a:solidFill>
-            <a:srgbClr val="107C10"/>
-          </a:solidFill>
-          <a:ln>
-            <a:noFill/>
-          </a:ln>
-        </p:spPr>
-        <p:style>
-          <a:lnRef idx="1">
-            <a:schemeClr val="accent1"/>
-          </a:lnRef>
-          <a:fillRef idx="3">
-            <a:schemeClr val="accent1"/>
-          </a:fillRef>
-          <a:effectRef idx="2">
-            <a:schemeClr val="accent1"/>
-          </a:effectRef>
-          <a:fontRef idx="minor">
-            <a:schemeClr val="lt1"/>
-          </a:fontRef>
-        </p:style>
-        <p:txBody>
-          <a:bodyPr rtlCol="0" anchor="ctr"/>
-          <a:lstStyle/>
-          <a:p>
-            <a:pPr algn="ctr"/>
-          </a:p>
-        </p:txBody>
-      </p:sp>
-      <p:sp>
-        <p:nvSpPr>
           <p:cNvPr id="74" name="TextBox 73"/>
           <p:cNvSpPr txBox="1"/>
           <p:nvPr/>
@@ -34221,7 +34221,7 @@
                   <a:srgbClr val="FFFFFF"/>
                 </a:solidFill>
               </a:rPr>
-              <a:t>코드 생성 확정  (Gemma-4-31B 실행)</a:t>
+              <a:t>코드 생성 확정  (Gemma 4 26B MoE 실행)</a:t>
             </a:r>
           </a:p>
         </p:txBody>
@@ -40737,7 +40737,7 @@
                   <a:srgbClr val="1A1A1A"/>
                 </a:solidFill>
               </a:rPr>
-              <a:t>• foc_clarke / foc_park / foc_inv_park</a:t>
+              <a:t>• ✅ bldc_6step_hall / dc_motor_pid (완성)</a:t>
             </a:r>
           </a:p>
         </p:txBody>
@@ -40771,7 +40771,7 @@
                   <a:srgbClr val="1A1A1A"/>
                 </a:solidFill>
               </a:rPr>
-              <a:t>• foc_svpwm / foc_current_pi (FMAC 옵션)</a:t>
+              <a:t>• ✅ fdcan_motor_cmd / multi_axis_sync (완성)</a:t>
             </a:r>
           </a:p>
         </p:txBody>
@@ -40805,7 +40805,7 @@
                   <a:srgbClr val="1A1A1A"/>
                 </a:solidFill>
               </a:rPr>
-              <a:t>• foc_speed_pi / foc_position_pi</a:t>
+              <a:t>• ⬜ foc_clarke / foc_park / foc_svpwm (오픈소스 가공 예정)</a:t>
             </a:r>
           </a:p>
         </p:txBody>
@@ -40839,7 +40839,7 @@
                   <a:srgbClr val="1A1A1A"/>
                 </a:solidFill>
               </a:rPr>
-              <a:t>• foc_angle_encoder / hall / smo</a:t>
+              <a:t>• ⬜ foc_current_pi / foc_angle_encoder (가공 예정)</a:t>
             </a:r>
           </a:p>
         </p:txBody>
@@ -40873,7 +40873,7 @@
                   <a:srgbClr val="1A1A1A"/>
                 </a:solidFill>
               </a:rPr>
-              <a:t>• foc_current_sense / bldc_6step / fdcan_motor_cmd</a:t>
+              <a:t>• ⬜ foc_current_sense (flatmcu 참조)</a:t>
             </a:r>
           </a:p>
         </p:txBody>
@@ -40907,7 +40907,7 @@
                   <a:srgbClr val="1A1A1A"/>
                 </a:solidFill>
               </a:rPr>
-              <a:t>• dc_motor_pid / multi_axis_sync (멀티모터)</a:t>
+              <a:t>• 소스: Arduino-FOC, MESC, VESC, moteus, ODrive</a:t>
             </a:r>
           </a:p>
         </p:txBody>
@@ -40941,7 +40941,7 @@
                   <a:srgbClr val="1A1A1A"/>
                 </a:solidFill>
               </a:rPr>
-              <a:t>• → .c + .h 쌍, 총 15개 모듈 (30개 파일)</a:t>
+              <a:t>• → 향후 사내 코드 확보 시 교체 예정</a:t>
             </a:r>
           </a:p>
         </p:txBody>
@@ -47623,7 +47623,7 @@
                   <a:srgbClr val="107C10"/>
                 </a:solidFill>
               </a:rPr>
-              <a:t>핀 검증 Agent</a:t>
+              <a:t>HW 설계 검증 Agent</a:t>
             </a:r>
           </a:p>
         </p:txBody>
@@ -47657,7 +47657,7 @@
                   <a:srgbClr val="606060"/>
                 </a:solidFill>
               </a:rPr>
-              <a:t>LLM이 AF 스펙 자동 검증 → 오류 리포트</a:t>
+              <a:t>3계층 검증 (인프라/모터논리/페리페럴) → 리포트</a:t>
             </a:r>
           </a:p>
         </p:txBody>
@@ -47845,7 +47845,7 @@
                   <a:srgbClr val="606060"/>
                 </a:solidFill>
               </a:rPr>
-              <a:t>.ioc 자동 생성 → CubeMX CLI → HAL 코드</a:t>
+              <a:t>.ioc 수정 → CubeMX CLI → 스니펫 주입 → ZIP</a:t>
             </a:r>
           </a:p>
         </p:txBody>
@@ -48033,7 +48033,7 @@
                   <a:srgbClr val="606060"/>
                 </a:solidFill>
               </a:rPr>
-              <a:t>기존 FOC 코드를 USER CODE 영역에 자동 삽입</a:t>
+              <a:t>오픈소스 FOC 코드를 USER CODE 영역에 자동 삽입</a:t>
             </a:r>
           </a:p>
         </p:txBody>
@@ -48705,7 +48705,7 @@
                   <a:srgbClr val="FFFFFF"/>
                 </a:solidFill>
               </a:rPr>
-              <a:t>베이스: Gemma-4-31B-It  |  목적: 검증 리포트 포맷 통일</a:t>
+              <a:t>베이스: Gemma 4 31B Dense  |  목적: 3계층 검증 리포트 포맷 통일</a:t>
             </a:r>
           </a:p>
         </p:txBody>
@@ -50849,7 +50849,7 @@
               <a:t>from unsloth import FastLanguageModel
 from trl import SFTTrainer, SFTConfig
 model, tokenizer = FastLanguageModel.from_pretrained(
-    model_name = "/workspace/models/base/Gemma-4-31B",
+    model_name = "/workspace/models/base/gemma-4-31b-it",
     max_seq_length = 4096,
     load_in_4bit   = True,
 )
@@ -51124,7 +51124,7 @@
                   <a:srgbClr val="FFFFFF"/>
                 </a:solidFill>
               </a:rPr>
-              <a:t>베이스: Gemma-4-31B-It  |  목적: USER CODE 통합 코드 생성</a:t>
+              <a:t>베이스: Gemma 4 26B MoE  |  목적: USER CODE 통합 코드 생성</a:t>
             </a:r>
           </a:p>
         </p:txBody>
@@ -52398,7 +52398,7 @@
               <a:t># 1. 어댑터 + 베이스 모델 병합 후 GGUF 변환
 from unsloth import FastLanguageModel
 model, tokenizer = FastLanguageModel.from_pretrained(
-    "/workspace/models/base/Gemma-4-31B",
+    "/workspace/models/base/gemma-4-26b-it",
     load_in_4bit=True
 )
 model.load_adapter(
@@ -57358,7 +57358,7 @@
                 </a:solidFill>
               </a:rPr>
               <a:t>[브라우저]  →  Nginx :80/443  →  React :3000  +  FastAPI :8000
-FastAPI  →  Ollama :11434 (Gemma-4-31B · Gemma-4-31B)
+FastAPI  →  Ollama :11434 (Gemma 4 31B · Gemma 4 26B MoE)
          →  Qdrant :6333 (벡터 DB)  →  CubeMX CLI (subprocess)
 모두 Docker Compose 단일 명령으로 기동:  docker compose up -d</a:t>
             </a:r>
@@ -61812,7 +61812,7 @@
                   <a:srgbClr val="FFFFFF"/>
                 </a:solidFill>
               </a:rPr>
-              <a:t>핀 검증 Agent</a:t>
+              <a:t>HW 설계 검증 Agent</a:t>
             </a:r>
           </a:p>
         </p:txBody>
@@ -61924,7 +61924,7 @@
                 </a:solidFill>
               </a:rPr>
               <a:t>• 회로도 입력
-(CSV/KiCad/PDF)</a:t>
+(CSV + 자연어)</a:t>
             </a:r>
           </a:p>
         </p:txBody>
@@ -61992,7 +61992,7 @@
                   <a:srgbClr val="1A1A1A"/>
                 </a:solidFill>
               </a:rPr>
-              <a:t>• 규칙 엔진</a:t>
+              <a:t>• 3계층 규칙 엔진</a:t>
             </a:r>
           </a:p>
         </p:txBody>
@@ -62103,8 +62103,8 @@
                   <a:srgbClr val="FFFFFF"/>
                 </a:solidFill>
               </a:rPr>
-              <a:t>모델 : Gemma-4-31B
-(~40GB)</a:t>
+              <a:t>모델 : Gemma 4 31B Dense
+(~20GB)</a:t>
             </a:r>
           </a:p>
         </p:txBody>
@@ -62995,8 +62995,8 @@
                   <a:srgbClr val="FFFFFF"/>
                 </a:solidFill>
               </a:rPr>
-              <a:t>모델 : Gemma-4-31B
-(~32GB)</a:t>
+              <a:t>모델 : Gemma 4 26B MoE
+(~22GB)</a:t>
             </a:r>
           </a:p>
         </p:txBody>
@@ -63595,7 +63595,7 @@
                   <a:srgbClr val="1A1A1A"/>
                 </a:solidFill>
               </a:rPr>
-              <a:t>Step 2는 LLM 없이 동작.  Step 1 · 3 모델 합산 ~72GB → DGX Spark 128GB 내 동시 상주 가능</a:t>
+              <a:t>Step 2는 LLM 없이 동작.  Step 1 · 3 모델 합산 ~42GB → DGX Spark 128GB 내 동시 상주 가능 (큰 여유)</a:t>
             </a:r>
           </a:p>
         </p:txBody>
@@ -64356,7 +64356,7 @@
                   <a:srgbClr val="1A1A1A"/>
                 </a:solidFill>
               </a:rPr>
-              <a:t>Gemma-4-31B-It (Q4_K_M, ~40GB)</a:t>
+              <a:t>Gemma 4 31B Dense (Q4_K_M, ~20GB)</a:t>
             </a:r>
           </a:p>
         </p:txBody>
@@ -64424,7 +64424,7 @@
                   <a:srgbClr val="1A1A1A"/>
                 </a:solidFill>
               </a:rPr>
-              <a:t>Gemma-4-31B-It (Q8, ~32GB)</a:t>
+              <a:t>Gemma 4 26B MoE (Q8, ~22GB, Active ~4B)</a:t>
             </a:r>
           </a:p>
         </p:txBody>
@@ -64560,7 +64560,7 @@
                   <a:srgbClr val="1A1A1A"/>
                 </a:solidFill>
               </a:rPr>
-              <a:t>~72GB 합산 → 128GB 내 여유 ✓</a:t>
+              <a:t>~42GB 합산 → 128GB 내 큰 여유 ✓</a:t>
             </a:r>
           </a:p>
         </p:txBody>
@@ -66166,7 +66166,7 @@
                   <a:srgbClr val="1A1A1A"/>
                 </a:solidFill>
               </a:rPr>
-              <a:t>• 기존 FOC 코드 태깅</a:t>
+              <a:t>• 오픈소스 FOC 코드 가공</a:t>
             </a:r>
           </a:p>
         </p:txBody>
@@ -66321,7 +66321,7 @@
                 </a:solidFill>
               </a:rPr>
               <a:t>Step 1
-핀 검증 Agent</a:t>
+HW 검증 Agent</a:t>
             </a:r>
           </a:p>
         </p:txBody>
@@ -66475,7 +66475,7 @@
                   <a:srgbClr val="1A1A1A"/>
                 </a:solidFill>
               </a:rPr>
-              <a:t>• 규칙 엔진 구현</a:t>
+              <a:t>• 3계층 규칙 엔진</a:t>
             </a:r>
           </a:p>
         </p:txBody>
@@ -66543,7 +66543,7 @@
                   <a:srgbClr val="1A1A1A"/>
                 </a:solidFill>
               </a:rPr>
-              <a:t>• Gemma-4-31B 연결</a:t>
+              <a:t>• Gemma 4 31B 연결</a:t>
             </a:r>
           </a:p>
         </p:txBody>
@@ -66852,7 +66852,7 @@
                   <a:srgbClr val="1A1A1A"/>
                 </a:solidFill>
               </a:rPr>
-              <a:t>• .ioc 생성기</a:t>
+              <a:t>• .ioc 템플릿 수정</a:t>
             </a:r>
           </a:p>
         </p:txBody>
@@ -66920,7 +66920,7 @@
                   <a:srgbClr val="1A1A1A"/>
                 </a:solidFill>
               </a:rPr>
-              <a:t>• 출력 검증</a:t>
+              <a:t>• 스니펫 주입</a:t>
             </a:r>
           </a:p>
         </p:txBody>
@@ -67263,7 +67263,7 @@
                   <a:srgbClr val="1A1A1A"/>
                 </a:solidFill>
               </a:rPr>
-              <a:t>• Gemma-4-31B</a:t>
+              <a:t>• Gemma 4 26B MoE</a:t>
             </a:r>
           </a:p>
         </p:txBody>
@@ -68281,7 +68281,7 @@
                   <a:srgbClr val="2E6DB4"/>
                 </a:solidFill>
               </a:rPr>
-              <a:t>① CubeMX XML → 핀 AF JSON DB</a:t>
+              <a:t>① ST 공식 문서 수집 (✅ 14건 완료)</a:t>
             </a:r>
           </a:p>
         </p:txBody>
@@ -68295,27 +68295,27 @@
         <p:spPr>
           <a:xfrm>
             <a:off x="365760" y="2084831"/>
-            <a:ext cx="5486400" cy="365760"/>
-          </a:xfrm>
-          <a:prstGeom prst="rect">
-            <a:avLst/>
-          </a:prstGeom>
-          <a:noFill/>
-        </p:spPr>
-        <p:txBody>
-          <a:bodyPr wrap="square">
-            <a:spAutoFit/>
-          </a:bodyPr>
-          <a:lstStyle/>
-          <a:p>
-            <a:pPr algn="l"/>
-            <a:r>
-              <a:rPr sz="1250" b="0" i="0">
+            <a:ext cx="5486400" cy="329184"/>
+          </a:xfrm>
+          <a:prstGeom prst="rect">
+            <a:avLst/>
+          </a:prstGeom>
+          <a:noFill/>
+        </p:spPr>
+        <p:txBody>
+          <a:bodyPr wrap="square">
+            <a:spAutoFit/>
+          </a:bodyPr>
+          <a:lstStyle/>
+          <a:p>
+            <a:pPr algn="l"/>
+            <a:r>
+              <a:rPr sz="1200" b="0" i="0">
                 <a:solidFill>
                   <a:srgbClr val="1A1A1A"/>
                 </a:solidFill>
               </a:rPr>
-              <a:t>    📌 STM32CubeMX\db\mcu\STM32G474RETx.xml 파싱</a:t>
+              <a:t>    📌 rm0440 레퍼런스 매뉴얼 (39MB)</a:t>
             </a:r>
           </a:p>
         </p:txBody>
@@ -68328,28 +68328,28 @@
         </p:nvSpPr>
         <p:spPr>
           <a:xfrm>
-            <a:off x="365760" y="2468879"/>
-            <a:ext cx="5486400" cy="365760"/>
-          </a:xfrm>
-          <a:prstGeom prst="rect">
-            <a:avLst/>
-          </a:prstGeom>
-          <a:noFill/>
-        </p:spPr>
-        <p:txBody>
-          <a:bodyPr wrap="square">
-            <a:spAutoFit/>
-          </a:bodyPr>
-          <a:lstStyle/>
-          <a:p>
-            <a:pPr algn="l"/>
-            <a:r>
-              <a:rPr sz="1250" b="0" i="0">
+            <a:off x="365760" y="2432303"/>
+            <a:ext cx="5486400" cy="329184"/>
+          </a:xfrm>
+          <a:prstGeom prst="rect">
+            <a:avLst/>
+          </a:prstGeom>
+          <a:noFill/>
+        </p:spPr>
+        <p:txBody>
+          <a:bodyPr wrap="square">
+            <a:spAutoFit/>
+          </a:bodyPr>
+          <a:lstStyle/>
+          <a:p>
+            <a:pPr algn="l"/>
+            <a:r>
+              <a:rPr sz="1200" b="0" i="0">
                 <a:solidFill>
                   <a:srgbClr val="1A1A1A"/>
                 </a:solidFill>
               </a:rPr>
-              <a:t>    ▸ 모든 핀 → Alternate Function 목록 추출</a:t>
+              <a:t>    ▸ stm32g474re 데이터시트 + AN5306 OPAMP + AN5346 ADC</a:t>
             </a:r>
           </a:p>
         </p:txBody>
@@ -68362,28 +68362,28 @@
         </p:nvSpPr>
         <p:spPr>
           <a:xfrm>
-            <a:off x="365760" y="2852927"/>
-            <a:ext cx="5486400" cy="365760"/>
-          </a:xfrm>
-          <a:prstGeom prst="rect">
-            <a:avLst/>
-          </a:prstGeom>
-          <a:noFill/>
-        </p:spPr>
-        <p:txBody>
-          <a:bodyPr wrap="square">
-            <a:spAutoFit/>
-          </a:bodyPr>
-          <a:lstStyle/>
-          <a:p>
-            <a:pPr algn="l"/>
-            <a:r>
-              <a:rPr sz="1250" b="0" i="0">
+            <a:off x="365760" y="2779776"/>
+            <a:ext cx="5486400" cy="329184"/>
+          </a:xfrm>
+          <a:prstGeom prst="rect">
+            <a:avLst/>
+          </a:prstGeom>
+          <a:noFill/>
+        </p:spPr>
+        <p:txBody>
+          <a:bodyPr wrap="square">
+            <a:spAutoFit/>
+          </a:bodyPr>
+          <a:lstStyle/>
+          <a:p>
+            <a:pPr algn="l"/>
+            <a:r>
+              <a:rPr sz="1200" b="0" i="0">
                 <a:solidFill>
                   <a:srgbClr val="1A1A1A"/>
                 </a:solidFill>
               </a:rPr>
-              <a:t>    ▸ 결과: {"PA8": ["TIM1_CH1", "I2C2_SCL", ...]} 형태 JSON</a:t>
+              <a:t>    ▸ AN5348 FDCAN + AN3070 RS-485 + AN5031 HW가이드</a:t>
             </a:r>
           </a:p>
         </p:txBody>
@@ -68396,28 +68396,28 @@
         </p:nvSpPr>
         <p:spPr>
           <a:xfrm>
-            <a:off x="365760" y="3236976"/>
-            <a:ext cx="5486400" cy="365760"/>
-          </a:xfrm>
-          <a:prstGeom prst="rect">
-            <a:avLst/>
-          </a:prstGeom>
-          <a:noFill/>
-        </p:spPr>
-        <p:txBody>
-          <a:bodyPr wrap="square">
-            <a:spAutoFit/>
-          </a:bodyPr>
-          <a:lstStyle/>
-          <a:p>
-            <a:pPr algn="l"/>
-            <a:r>
-              <a:rPr sz="1250" b="0" i="0">
+            <a:off x="365760" y="3127248"/>
+            <a:ext cx="5486400" cy="329184"/>
+          </a:xfrm>
+          <a:prstGeom prst="rect">
+            <a:avLst/>
+          </a:prstGeom>
+          <a:noFill/>
+        </p:spPr>
+        <p:txBody>
+          <a:bodyPr wrap="square">
+            <a:spAutoFit/>
+          </a:bodyPr>
+          <a:lstStyle/>
+          <a:p>
+            <a:pPr algn="l"/>
+            <a:r>
+              <a:rPr sz="1200" b="0" i="0">
                 <a:solidFill>
                   <a:srgbClr val="1A1A1A"/>
                 </a:solidFill>
               </a:rPr>
-              <a:t>    ▸ G4 전체 계열 커버 (G431 / G471 / G474 / G491 등)</a:t>
+              <a:t>    ▸ EVSPIN32G4-DUAL 회로도/매뉴얼/BOM/제조데이터</a:t>
             </a:r>
           </a:p>
         </p:txBody>
@@ -68430,7 +68430,41 @@
         </p:nvSpPr>
         <p:spPr>
           <a:xfrm>
-            <a:off x="365760" y="3749039"/>
+            <a:off x="365760" y="3474720"/>
+            <a:ext cx="5486400" cy="329184"/>
+          </a:xfrm>
+          <a:prstGeom prst="rect">
+            <a:avLst/>
+          </a:prstGeom>
+          <a:noFill/>
+        </p:spPr>
+        <p:txBody>
+          <a:bodyPr wrap="square">
+            <a:spAutoFit/>
+          </a:bodyPr>
+          <a:lstStyle/>
+          <a:p>
+            <a:pPr algn="l"/>
+            <a:r>
+              <a:rPr sz="1200" b="0" i="0">
+                <a:solidFill>
+                  <a:srgbClr val="1A1A1A"/>
+                </a:solidFill>
+              </a:rPr>
+              <a:t>    ▸ um3027/um3016 MCSDK Workbench/Profiler</a:t>
+            </a:r>
+          </a:p>
+        </p:txBody>
+      </p:sp>
+      <p:sp>
+        <p:nvSpPr>
+          <p:cNvPr id="17" name="TextBox 16"/>
+          <p:cNvSpPr txBox="1"/>
+          <p:nvPr/>
+        </p:nvSpPr>
+        <p:spPr>
+          <a:xfrm>
+            <a:off x="365760" y="3886200"/>
             <a:ext cx="5486400" cy="347472"/>
           </a:xfrm>
           <a:prstGeom prst="rect">
@@ -68451,20 +68485,20 @@
                   <a:srgbClr val="2E6DB4"/>
                 </a:solidFill>
               </a:rPr>
-              <a:t>② 기존 보유 코드 → Golden Module 등록</a:t>
-            </a:r>
-          </a:p>
-        </p:txBody>
-      </p:sp>
-      <p:sp>
-        <p:nvSpPr>
-          <p:cNvPr id="17" name="TextBox 16"/>
-          <p:cNvSpPr txBox="1"/>
-          <p:nvPr/>
-        </p:nvSpPr>
-        <p:spPr>
-          <a:xfrm>
-            <a:off x="365760" y="4133087"/>
+              <a:t>② 오픈소스 프로젝트 (8개 등록)</a:t>
+            </a:r>
+          </a:p>
+        </p:txBody>
+      </p:sp>
+      <p:sp>
+        <p:nvSpPr>
+          <p:cNvPr id="18" name="TextBox 17"/>
+          <p:cNvSpPr txBox="1"/>
+          <p:nvPr/>
+        </p:nvSpPr>
+        <p:spPr>
+          <a:xfrm>
+            <a:off x="365760" y="4279392"/>
             <a:ext cx="5486400" cy="329184"/>
           </a:xfrm>
           <a:prstGeom prst="rect">
@@ -68485,20 +68519,20 @@
                   <a:srgbClr val="107C10"/>
                 </a:solidFill>
               </a:rPr>
-              <a:t>    ✅ foc_clarke / foc_park / foc_inv_park</a:t>
-            </a:r>
-          </a:p>
-        </p:txBody>
-      </p:sp>
-      <p:sp>
-        <p:nvSpPr>
-          <p:cNvPr id="18" name="TextBox 17"/>
-          <p:cNvSpPr txBox="1"/>
-          <p:nvPr/>
-        </p:nvSpPr>
-        <p:spPr>
-          <a:xfrm>
-            <a:off x="365760" y="4480559"/>
+              <a:t>    ✅ flatmcu (73파일) — KiCad 회로도</a:t>
+            </a:r>
+          </a:p>
+        </p:txBody>
+      </p:sp>
+      <p:sp>
+        <p:nvSpPr>
+          <p:cNvPr id="19" name="TextBox 18"/>
+          <p:cNvSpPr txBox="1"/>
+          <p:nvPr/>
+        </p:nvSpPr>
+        <p:spPr>
+          <a:xfrm>
+            <a:off x="365760" y="4626864"/>
             <a:ext cx="5486400" cy="329184"/>
           </a:xfrm>
           <a:prstGeom prst="rect">
@@ -68519,20 +68553,20 @@
                   <a:srgbClr val="107C10"/>
                 </a:solidFill>
               </a:rPr>
-              <a:t>    ✅ foc_svpwm / foc_current_pi (FMAC 옵션)</a:t>
-            </a:r>
-          </a:p>
-        </p:txBody>
-      </p:sp>
-      <p:sp>
-        <p:nvSpPr>
-          <p:cNvPr id="19" name="TextBox 18"/>
-          <p:cNvSpPr txBox="1"/>
-          <p:nvPr/>
-        </p:nvSpPr>
-        <p:spPr>
-          <a:xfrm>
-            <a:off x="365760" y="4828031"/>
+              <a:t>    ✅ STM32CubeG4 (3,063파일) — HAL 예제</a:t>
+            </a:r>
+          </a:p>
+        </p:txBody>
+      </p:sp>
+      <p:sp>
+        <p:nvSpPr>
+          <p:cNvPr id="20" name="TextBox 19"/>
+          <p:cNvSpPr txBox="1"/>
+          <p:nvPr/>
+        </p:nvSpPr>
+        <p:spPr>
+          <a:xfrm>
+            <a:off x="365760" y="4974336"/>
             <a:ext cx="5486400" cy="329184"/>
           </a:xfrm>
           <a:prstGeom prst="rect">
@@ -68550,23 +68584,23 @@
             <a:r>
               <a:rPr sz="1200" b="0" i="0">
                 <a:solidFill>
-                  <a:srgbClr val="107C10"/>
-                </a:solidFill>
-              </a:rPr>
-              <a:t>    ✅ foc_speed_pi / foc_position_pi</a:t>
-            </a:r>
-          </a:p>
-        </p:txBody>
-      </p:sp>
-      <p:sp>
-        <p:nvSpPr>
-          <p:cNvPr id="20" name="TextBox 19"/>
-          <p:cNvSpPr txBox="1"/>
-          <p:nvPr/>
-        </p:nvSpPr>
-        <p:spPr>
-          <a:xfrm>
-            <a:off x="365760" y="5175504"/>
+                  <a:srgbClr val="E66C00"/>
+                </a:solidFill>
+              </a:rPr>
+              <a:t>    ⬜ Arduino-FOC / stm32-esc / moteus</a:t>
+            </a:r>
+          </a:p>
+        </p:txBody>
+      </p:sp>
+      <p:sp>
+        <p:nvSpPr>
+          <p:cNvPr id="21" name="TextBox 20"/>
+          <p:cNvSpPr txBox="1"/>
+          <p:nvPr/>
+        </p:nvSpPr>
+        <p:spPr>
+          <a:xfrm>
+            <a:off x="365760" y="5321808"/>
             <a:ext cx="5486400" cy="329184"/>
           </a:xfrm>
           <a:prstGeom prst="rect">
@@ -68584,44 +68618,10 @@
             <a:r>
               <a:rPr sz="1200" b="0" i="0">
                 <a:solidFill>
-                  <a:srgbClr val="107C10"/>
-                </a:solidFill>
-              </a:rPr>
-              <a:t>    ✅ foc_angle_encoder / hall / smo</a:t>
-            </a:r>
-          </a:p>
-        </p:txBody>
-      </p:sp>
-      <p:sp>
-        <p:nvSpPr>
-          <p:cNvPr id="21" name="TextBox 20"/>
-          <p:cNvSpPr txBox="1"/>
-          <p:nvPr/>
-        </p:nvSpPr>
-        <p:spPr>
-          <a:xfrm>
-            <a:off x="365760" y="5522975"/>
-            <a:ext cx="5486400" cy="329184"/>
-          </a:xfrm>
-          <a:prstGeom prst="rect">
-            <a:avLst/>
-          </a:prstGeom>
-          <a:noFill/>
-        </p:spPr>
-        <p:txBody>
-          <a:bodyPr wrap="square">
-            <a:spAutoFit/>
-          </a:bodyPr>
-          <a:lstStyle/>
-          <a:p>
-            <a:pPr algn="l"/>
-            <a:r>
-              <a:rPr sz="1200" b="0" i="0">
-                <a:solidFill>
-                  <a:srgbClr val="107C10"/>
-                </a:solidFill>
-              </a:rPr>
-              <a:t>    ✅ foc_current_sense (G4 OPAMP 연동)</a:t>
+                  <a:srgbClr val="E66C00"/>
+                </a:solidFill>
+              </a:rPr>
+              <a:t>    ⬜ MESC / VESC / ODrive (submodule 미초기화)</a:t>
             </a:r>
           </a:p>
         </p:txBody>
@@ -68655,7 +68655,7 @@
                   <a:srgbClr val="E66C00"/>
                 </a:solidFill>
               </a:rPr>
-              <a:t>③ 신규 작성 모듈</a:t>
+              <a:t>③ Golden Module (작성 현황)</a:t>
             </a:r>
           </a:p>
         </p:txBody>
@@ -68669,6 +68669,450 @@
         <p:spPr>
           <a:xfrm>
             <a:off x="6217920" y="2084831"/>
+            <a:ext cx="5486400" cy="475488"/>
+          </a:xfrm>
+          <a:prstGeom prst="rect">
+            <a:avLst/>
+          </a:prstGeom>
+          <a:solidFill>
+            <a:srgbClr val="D9F0D9"/>
+          </a:solidFill>
+          <a:ln>
+            <a:noFill/>
+          </a:ln>
+        </p:spPr>
+        <p:style>
+          <a:lnRef idx="1">
+            <a:schemeClr val="accent1"/>
+          </a:lnRef>
+          <a:fillRef idx="3">
+            <a:schemeClr val="accent1"/>
+          </a:fillRef>
+          <a:effectRef idx="2">
+            <a:schemeClr val="accent1"/>
+          </a:effectRef>
+          <a:fontRef idx="minor">
+            <a:schemeClr val="lt1"/>
+          </a:fontRef>
+        </p:style>
+        <p:txBody>
+          <a:bodyPr rtlCol="0" anchor="ctr"/>
+          <a:lstStyle/>
+          <a:p>
+            <a:pPr algn="ctr"/>
+          </a:p>
+        </p:txBody>
+      </p:sp>
+      <p:sp>
+        <p:nvSpPr>
+          <p:cNvPr id="24" name="TextBox 23"/>
+          <p:cNvSpPr txBox="1"/>
+          <p:nvPr/>
+        </p:nvSpPr>
+        <p:spPr>
+          <a:xfrm>
+            <a:off x="6355080" y="2103120"/>
+            <a:ext cx="2560320" cy="256032"/>
+          </a:xfrm>
+          <a:prstGeom prst="rect">
+            <a:avLst/>
+          </a:prstGeom>
+          <a:noFill/>
+        </p:spPr>
+        <p:txBody>
+          <a:bodyPr wrap="square">
+            <a:spAutoFit/>
+          </a:bodyPr>
+          <a:lstStyle/>
+          <a:p>
+            <a:pPr algn="l"/>
+            <a:r>
+              <a:rPr sz="1200" b="1" i="0">
+                <a:solidFill>
+                  <a:srgbClr val="107C10"/>
+                </a:solidFill>
+              </a:rPr>
+              <a:t>✅ bldc_6step_hall.c</a:t>
+            </a:r>
+          </a:p>
+        </p:txBody>
+      </p:sp>
+      <p:sp>
+        <p:nvSpPr>
+          <p:cNvPr id="25" name="TextBox 24"/>
+          <p:cNvSpPr txBox="1"/>
+          <p:nvPr/>
+        </p:nvSpPr>
+        <p:spPr>
+          <a:xfrm>
+            <a:off x="9052560" y="2103120"/>
+            <a:ext cx="2468880" cy="256032"/>
+          </a:xfrm>
+          <a:prstGeom prst="rect">
+            <a:avLst/>
+          </a:prstGeom>
+          <a:noFill/>
+        </p:spPr>
+        <p:txBody>
+          <a:bodyPr wrap="square">
+            <a:spAutoFit/>
+          </a:bodyPr>
+          <a:lstStyle/>
+          <a:p>
+            <a:pPr algn="l"/>
+            <a:r>
+              <a:rPr sz="1150" b="0" i="0">
+                <a:solidFill>
+                  <a:srgbClr val="606060"/>
+                </a:solidFill>
+              </a:rPr>
+              <a:t>6-step Hall + BRK 보호</a:t>
+            </a:r>
+          </a:p>
+        </p:txBody>
+      </p:sp>
+      <p:sp>
+        <p:nvSpPr>
+          <p:cNvPr id="26" name="Rectangle 25"/>
+          <p:cNvSpPr/>
+          <p:nvPr/>
+        </p:nvSpPr>
+        <p:spPr>
+          <a:xfrm>
+            <a:off x="6217920" y="2615184"/>
+            <a:ext cx="5486400" cy="475488"/>
+          </a:xfrm>
+          <a:prstGeom prst="rect">
+            <a:avLst/>
+          </a:prstGeom>
+          <a:solidFill>
+            <a:srgbClr val="D9F0D9"/>
+          </a:solidFill>
+          <a:ln>
+            <a:noFill/>
+          </a:ln>
+        </p:spPr>
+        <p:style>
+          <a:lnRef idx="1">
+            <a:schemeClr val="accent1"/>
+          </a:lnRef>
+          <a:fillRef idx="3">
+            <a:schemeClr val="accent1"/>
+          </a:fillRef>
+          <a:effectRef idx="2">
+            <a:schemeClr val="accent1"/>
+          </a:effectRef>
+          <a:fontRef idx="minor">
+            <a:schemeClr val="lt1"/>
+          </a:fontRef>
+        </p:style>
+        <p:txBody>
+          <a:bodyPr rtlCol="0" anchor="ctr"/>
+          <a:lstStyle/>
+          <a:p>
+            <a:pPr algn="ctr"/>
+          </a:p>
+        </p:txBody>
+      </p:sp>
+      <p:sp>
+        <p:nvSpPr>
+          <p:cNvPr id="27" name="TextBox 26"/>
+          <p:cNvSpPr txBox="1"/>
+          <p:nvPr/>
+        </p:nvSpPr>
+        <p:spPr>
+          <a:xfrm>
+            <a:off x="6355080" y="2633472"/>
+            <a:ext cx="2560320" cy="256032"/>
+          </a:xfrm>
+          <a:prstGeom prst="rect">
+            <a:avLst/>
+          </a:prstGeom>
+          <a:noFill/>
+        </p:spPr>
+        <p:txBody>
+          <a:bodyPr wrap="square">
+            <a:spAutoFit/>
+          </a:bodyPr>
+          <a:lstStyle/>
+          <a:p>
+            <a:pPr algn="l"/>
+            <a:r>
+              <a:rPr sz="1200" b="1" i="0">
+                <a:solidFill>
+                  <a:srgbClr val="107C10"/>
+                </a:solidFill>
+              </a:rPr>
+              <a:t>✅ dc_motor_pid.c</a:t>
+            </a:r>
+          </a:p>
+        </p:txBody>
+      </p:sp>
+      <p:sp>
+        <p:nvSpPr>
+          <p:cNvPr id="28" name="TextBox 27"/>
+          <p:cNvSpPr txBox="1"/>
+          <p:nvPr/>
+        </p:nvSpPr>
+        <p:spPr>
+          <a:xfrm>
+            <a:off x="9052560" y="2633472"/>
+            <a:ext cx="2468880" cy="256032"/>
+          </a:xfrm>
+          <a:prstGeom prst="rect">
+            <a:avLst/>
+          </a:prstGeom>
+          <a:noFill/>
+        </p:spPr>
+        <p:txBody>
+          <a:bodyPr wrap="square">
+            <a:spAutoFit/>
+          </a:bodyPr>
+          <a:lstStyle/>
+          <a:p>
+            <a:pPr algn="l"/>
+            <a:r>
+              <a:rPr sz="1150" b="0" i="0">
+                <a:solidFill>
+                  <a:srgbClr val="606060"/>
+                </a:solidFill>
+              </a:rPr>
+              <a:t>H-bridge PWM + PID</a:t>
+            </a:r>
+          </a:p>
+        </p:txBody>
+      </p:sp>
+      <p:sp>
+        <p:nvSpPr>
+          <p:cNvPr id="29" name="Rectangle 28"/>
+          <p:cNvSpPr/>
+          <p:nvPr/>
+        </p:nvSpPr>
+        <p:spPr>
+          <a:xfrm>
+            <a:off x="6217920" y="3145535"/>
+            <a:ext cx="5486400" cy="475488"/>
+          </a:xfrm>
+          <a:prstGeom prst="rect">
+            <a:avLst/>
+          </a:prstGeom>
+          <a:solidFill>
+            <a:srgbClr val="D9F0D9"/>
+          </a:solidFill>
+          <a:ln>
+            <a:noFill/>
+          </a:ln>
+        </p:spPr>
+        <p:style>
+          <a:lnRef idx="1">
+            <a:schemeClr val="accent1"/>
+          </a:lnRef>
+          <a:fillRef idx="3">
+            <a:schemeClr val="accent1"/>
+          </a:fillRef>
+          <a:effectRef idx="2">
+            <a:schemeClr val="accent1"/>
+          </a:effectRef>
+          <a:fontRef idx="minor">
+            <a:schemeClr val="lt1"/>
+          </a:fontRef>
+        </p:style>
+        <p:txBody>
+          <a:bodyPr rtlCol="0" anchor="ctr"/>
+          <a:lstStyle/>
+          <a:p>
+            <a:pPr algn="ctr"/>
+          </a:p>
+        </p:txBody>
+      </p:sp>
+      <p:sp>
+        <p:nvSpPr>
+          <p:cNvPr id="30" name="TextBox 29"/>
+          <p:cNvSpPr txBox="1"/>
+          <p:nvPr/>
+        </p:nvSpPr>
+        <p:spPr>
+          <a:xfrm>
+            <a:off x="6355080" y="3163824"/>
+            <a:ext cx="2560320" cy="256032"/>
+          </a:xfrm>
+          <a:prstGeom prst="rect">
+            <a:avLst/>
+          </a:prstGeom>
+          <a:noFill/>
+        </p:spPr>
+        <p:txBody>
+          <a:bodyPr wrap="square">
+            <a:spAutoFit/>
+          </a:bodyPr>
+          <a:lstStyle/>
+          <a:p>
+            <a:pPr algn="l"/>
+            <a:r>
+              <a:rPr sz="1200" b="1" i="0">
+                <a:solidFill>
+                  <a:srgbClr val="107C10"/>
+                </a:solidFill>
+              </a:rPr>
+              <a:t>✅ fdcan_motor_cmd.c</a:t>
+            </a:r>
+          </a:p>
+        </p:txBody>
+      </p:sp>
+      <p:sp>
+        <p:nvSpPr>
+          <p:cNvPr id="31" name="TextBox 30"/>
+          <p:cNvSpPr txBox="1"/>
+          <p:nvPr/>
+        </p:nvSpPr>
+        <p:spPr>
+          <a:xfrm>
+            <a:off x="9052560" y="3163824"/>
+            <a:ext cx="2468880" cy="256032"/>
+          </a:xfrm>
+          <a:prstGeom prst="rect">
+            <a:avLst/>
+          </a:prstGeom>
+          <a:noFill/>
+        </p:spPr>
+        <p:txBody>
+          <a:bodyPr wrap="square">
+            <a:spAutoFit/>
+          </a:bodyPr>
+          <a:lstStyle/>
+          <a:p>
+            <a:pPr algn="l"/>
+            <a:r>
+              <a:rPr sz="1150" b="0" i="0">
+                <a:solidFill>
+                  <a:srgbClr val="606060"/>
+                </a:solidFill>
+              </a:rPr>
+              <a:t>FDCAN 커맨드 파싱</a:t>
+            </a:r>
+          </a:p>
+        </p:txBody>
+      </p:sp>
+      <p:sp>
+        <p:nvSpPr>
+          <p:cNvPr id="32" name="Rectangle 31"/>
+          <p:cNvSpPr/>
+          <p:nvPr/>
+        </p:nvSpPr>
+        <p:spPr>
+          <a:xfrm>
+            <a:off x="6217920" y="3675887"/>
+            <a:ext cx="5486400" cy="475488"/>
+          </a:xfrm>
+          <a:prstGeom prst="rect">
+            <a:avLst/>
+          </a:prstGeom>
+          <a:solidFill>
+            <a:srgbClr val="D9F0D9"/>
+          </a:solidFill>
+          <a:ln>
+            <a:noFill/>
+          </a:ln>
+        </p:spPr>
+        <p:style>
+          <a:lnRef idx="1">
+            <a:schemeClr val="accent1"/>
+          </a:lnRef>
+          <a:fillRef idx="3">
+            <a:schemeClr val="accent1"/>
+          </a:fillRef>
+          <a:effectRef idx="2">
+            <a:schemeClr val="accent1"/>
+          </a:effectRef>
+          <a:fontRef idx="minor">
+            <a:schemeClr val="lt1"/>
+          </a:fontRef>
+        </p:style>
+        <p:txBody>
+          <a:bodyPr rtlCol="0" anchor="ctr"/>
+          <a:lstStyle/>
+          <a:p>
+            <a:pPr algn="ctr"/>
+          </a:p>
+        </p:txBody>
+      </p:sp>
+      <p:sp>
+        <p:nvSpPr>
+          <p:cNvPr id="33" name="TextBox 32"/>
+          <p:cNvSpPr txBox="1"/>
+          <p:nvPr/>
+        </p:nvSpPr>
+        <p:spPr>
+          <a:xfrm>
+            <a:off x="6355080" y="3694175"/>
+            <a:ext cx="2560320" cy="256032"/>
+          </a:xfrm>
+          <a:prstGeom prst="rect">
+            <a:avLst/>
+          </a:prstGeom>
+          <a:noFill/>
+        </p:spPr>
+        <p:txBody>
+          <a:bodyPr wrap="square">
+            <a:spAutoFit/>
+          </a:bodyPr>
+          <a:lstStyle/>
+          <a:p>
+            <a:pPr algn="l"/>
+            <a:r>
+              <a:rPr sz="1200" b="1" i="0">
+                <a:solidFill>
+                  <a:srgbClr val="107C10"/>
+                </a:solidFill>
+              </a:rPr>
+              <a:t>✅ multi_axis_sync.c</a:t>
+            </a:r>
+          </a:p>
+        </p:txBody>
+      </p:sp>
+      <p:sp>
+        <p:nvSpPr>
+          <p:cNvPr id="34" name="TextBox 33"/>
+          <p:cNvSpPr txBox="1"/>
+          <p:nvPr/>
+        </p:nvSpPr>
+        <p:spPr>
+          <a:xfrm>
+            <a:off x="9052560" y="3694175"/>
+            <a:ext cx="2468880" cy="256032"/>
+          </a:xfrm>
+          <a:prstGeom prst="rect">
+            <a:avLst/>
+          </a:prstGeom>
+          <a:noFill/>
+        </p:spPr>
+        <p:txBody>
+          <a:bodyPr wrap="square">
+            <a:spAutoFit/>
+          </a:bodyPr>
+          <a:lstStyle/>
+          <a:p>
+            <a:pPr algn="l"/>
+            <a:r>
+              <a:rPr sz="1150" b="0" i="0">
+                <a:solidFill>
+                  <a:srgbClr val="606060"/>
+                </a:solidFill>
+              </a:rPr>
+              <a:t>TIM1/TIM8/TIM20 동기화</a:t>
+            </a:r>
+          </a:p>
+        </p:txBody>
+      </p:sp>
+      <p:sp>
+        <p:nvSpPr>
+          <p:cNvPr id="35" name="Rectangle 34"/>
+          <p:cNvSpPr/>
+          <p:nvPr/>
+        </p:nvSpPr>
+        <p:spPr>
+          <a:xfrm>
+            <a:off x="6217920" y="4206240"/>
             <a:ext cx="5486400" cy="475488"/>
           </a:xfrm>
           <a:prstGeom prst="rect">
@@ -68705,13 +69149,13 @@
       </p:sp>
       <p:sp>
         <p:nvSpPr>
-          <p:cNvPr id="24" name="TextBox 23"/>
-          <p:cNvSpPr txBox="1"/>
-          <p:nvPr/>
-        </p:nvSpPr>
-        <p:spPr>
-          <a:xfrm>
-            <a:off x="6355080" y="2103120"/>
+          <p:cNvPr id="36" name="TextBox 35"/>
+          <p:cNvSpPr txBox="1"/>
+          <p:nvPr/>
+        </p:nvSpPr>
+        <p:spPr>
+          <a:xfrm>
+            <a:off x="6355080" y="4224527"/>
             <a:ext cx="2560320" cy="256032"/>
           </a:xfrm>
           <a:prstGeom prst="rect">
@@ -68732,20 +69176,20 @@
                   <a:srgbClr val="E66C00"/>
                 </a:solidFill>
               </a:rPr>
-              <a:t>🔨 bldc_6step_hall.c</a:t>
-            </a:r>
-          </a:p>
-        </p:txBody>
-      </p:sp>
-      <p:sp>
-        <p:nvSpPr>
-          <p:cNvPr id="25" name="TextBox 24"/>
-          <p:cNvSpPr txBox="1"/>
-          <p:nvPr/>
-        </p:nvSpPr>
-        <p:spPr>
-          <a:xfrm>
-            <a:off x="9052560" y="2103120"/>
+              <a:t>⬜ foc_clarke/park/...</a:t>
+            </a:r>
+          </a:p>
+        </p:txBody>
+      </p:sp>
+      <p:sp>
+        <p:nvSpPr>
+          <p:cNvPr id="37" name="TextBox 36"/>
+          <p:cNvSpPr txBox="1"/>
+          <p:nvPr/>
+        </p:nvSpPr>
+        <p:spPr>
+          <a:xfrm>
+            <a:off x="9052560" y="4224527"/>
             <a:ext cx="2468880" cy="256032"/>
           </a:xfrm>
           <a:prstGeom prst="rect">
@@ -68766,347 +69210,14 @@
                   <a:srgbClr val="606060"/>
                 </a:solidFill>
               </a:rPr>
-              <a:t>6-step 전환 로직 (Hall 인터럽트)</a:t>
-            </a:r>
-          </a:p>
-        </p:txBody>
-      </p:sp>
-      <p:sp>
-        <p:nvSpPr>
-          <p:cNvPr id="26" name="Rectangle 25"/>
-          <p:cNvSpPr/>
-          <p:nvPr/>
-        </p:nvSpPr>
-        <p:spPr>
-          <a:xfrm>
-            <a:off x="6217920" y="2615184"/>
-            <a:ext cx="5486400" cy="475488"/>
-          </a:xfrm>
-          <a:prstGeom prst="rect">
-            <a:avLst/>
-          </a:prstGeom>
-          <a:solidFill>
-            <a:srgbClr val="FFF0D6"/>
-          </a:solidFill>
-          <a:ln>
-            <a:noFill/>
-          </a:ln>
-        </p:spPr>
-        <p:style>
-          <a:lnRef idx="1">
-            <a:schemeClr val="accent1"/>
-          </a:lnRef>
-          <a:fillRef idx="3">
-            <a:schemeClr val="accent1"/>
-          </a:fillRef>
-          <a:effectRef idx="2">
-            <a:schemeClr val="accent1"/>
-          </a:effectRef>
-          <a:fontRef idx="minor">
-            <a:schemeClr val="lt1"/>
-          </a:fontRef>
-        </p:style>
-        <p:txBody>
-          <a:bodyPr rtlCol="0" anchor="ctr"/>
-          <a:lstStyle/>
-          <a:p>
-            <a:pPr algn="ctr"/>
-          </a:p>
-        </p:txBody>
-      </p:sp>
-      <p:sp>
-        <p:nvSpPr>
-          <p:cNvPr id="27" name="TextBox 26"/>
-          <p:cNvSpPr txBox="1"/>
-          <p:nvPr/>
-        </p:nvSpPr>
-        <p:spPr>
-          <a:xfrm>
-            <a:off x="6355080" y="2633472"/>
-            <a:ext cx="2560320" cy="256032"/>
-          </a:xfrm>
-          <a:prstGeom prst="rect">
-            <a:avLst/>
-          </a:prstGeom>
-          <a:noFill/>
-        </p:spPr>
-        <p:txBody>
-          <a:bodyPr wrap="square">
-            <a:spAutoFit/>
-          </a:bodyPr>
-          <a:lstStyle/>
-          <a:p>
-            <a:pPr algn="l"/>
-            <a:r>
-              <a:rPr sz="1200" b="1" i="0">
-                <a:solidFill>
-                  <a:srgbClr val="E66C00"/>
-                </a:solidFill>
-              </a:rPr>
-              <a:t>🔨 dc_motor_pid.c</a:t>
-            </a:r>
-          </a:p>
-        </p:txBody>
-      </p:sp>
-      <p:sp>
-        <p:nvSpPr>
-          <p:cNvPr id="28" name="TextBox 27"/>
-          <p:cNvSpPr txBox="1"/>
-          <p:nvPr/>
-        </p:nvSpPr>
-        <p:spPr>
-          <a:xfrm>
-            <a:off x="9052560" y="2633472"/>
-            <a:ext cx="2468880" cy="256032"/>
-          </a:xfrm>
-          <a:prstGeom prst="rect">
-            <a:avLst/>
-          </a:prstGeom>
-          <a:noFill/>
-        </p:spPr>
-        <p:txBody>
-          <a:bodyPr wrap="square">
-            <a:spAutoFit/>
-          </a:bodyPr>
-          <a:lstStyle/>
-          <a:p>
-            <a:pPr algn="l"/>
-            <a:r>
-              <a:rPr sz="1150" b="0" i="0">
-                <a:solidFill>
-                  <a:srgbClr val="606060"/>
-                </a:solidFill>
-              </a:rPr>
-              <a:t>H-bridge PWM + PID 제어</a:t>
-            </a:r>
-          </a:p>
-        </p:txBody>
-      </p:sp>
-      <p:sp>
-        <p:nvSpPr>
-          <p:cNvPr id="29" name="Rectangle 28"/>
-          <p:cNvSpPr/>
-          <p:nvPr/>
-        </p:nvSpPr>
-        <p:spPr>
-          <a:xfrm>
-            <a:off x="6217920" y="3145535"/>
-            <a:ext cx="5486400" cy="475488"/>
-          </a:xfrm>
-          <a:prstGeom prst="rect">
-            <a:avLst/>
-          </a:prstGeom>
-          <a:solidFill>
-            <a:srgbClr val="FFF0D6"/>
-          </a:solidFill>
-          <a:ln>
-            <a:noFill/>
-          </a:ln>
-        </p:spPr>
-        <p:style>
-          <a:lnRef idx="1">
-            <a:schemeClr val="accent1"/>
-          </a:lnRef>
-          <a:fillRef idx="3">
-            <a:schemeClr val="accent1"/>
-          </a:fillRef>
-          <a:effectRef idx="2">
-            <a:schemeClr val="accent1"/>
-          </a:effectRef>
-          <a:fontRef idx="minor">
-            <a:schemeClr val="lt1"/>
-          </a:fontRef>
-        </p:style>
-        <p:txBody>
-          <a:bodyPr rtlCol="0" anchor="ctr"/>
-          <a:lstStyle/>
-          <a:p>
-            <a:pPr algn="ctr"/>
-          </a:p>
-        </p:txBody>
-      </p:sp>
-      <p:sp>
-        <p:nvSpPr>
-          <p:cNvPr id="30" name="TextBox 29"/>
-          <p:cNvSpPr txBox="1"/>
-          <p:nvPr/>
-        </p:nvSpPr>
-        <p:spPr>
-          <a:xfrm>
-            <a:off x="6355080" y="3163824"/>
-            <a:ext cx="2560320" cy="256032"/>
-          </a:xfrm>
-          <a:prstGeom prst="rect">
-            <a:avLst/>
-          </a:prstGeom>
-          <a:noFill/>
-        </p:spPr>
-        <p:txBody>
-          <a:bodyPr wrap="square">
-            <a:spAutoFit/>
-          </a:bodyPr>
-          <a:lstStyle/>
-          <a:p>
-            <a:pPr algn="l"/>
-            <a:r>
-              <a:rPr sz="1200" b="1" i="0">
-                <a:solidFill>
-                  <a:srgbClr val="E66C00"/>
-                </a:solidFill>
-              </a:rPr>
-              <a:t>🔨 fdcan_motor_cmd.c</a:t>
-            </a:r>
-          </a:p>
-        </p:txBody>
-      </p:sp>
-      <p:sp>
-        <p:nvSpPr>
-          <p:cNvPr id="31" name="TextBox 30"/>
-          <p:cNvSpPr txBox="1"/>
-          <p:nvPr/>
-        </p:nvSpPr>
-        <p:spPr>
-          <a:xfrm>
-            <a:off x="9052560" y="3163824"/>
-            <a:ext cx="2468880" cy="256032"/>
-          </a:xfrm>
-          <a:prstGeom prst="rect">
-            <a:avLst/>
-          </a:prstGeom>
-          <a:noFill/>
-        </p:spPr>
-        <p:txBody>
-          <a:bodyPr wrap="square">
-            <a:spAutoFit/>
-          </a:bodyPr>
-          <a:lstStyle/>
-          <a:p>
-            <a:pPr algn="l"/>
-            <a:r>
-              <a:rPr sz="1150" b="0" i="0">
-                <a:solidFill>
-                  <a:srgbClr val="606060"/>
-                </a:solidFill>
-              </a:rPr>
-              <a:t>FDCAN 커맨드 파싱/송신</a:t>
-            </a:r>
-          </a:p>
-        </p:txBody>
-      </p:sp>
-      <p:sp>
-        <p:nvSpPr>
-          <p:cNvPr id="32" name="Rectangle 31"/>
-          <p:cNvSpPr/>
-          <p:nvPr/>
-        </p:nvSpPr>
-        <p:spPr>
-          <a:xfrm>
-            <a:off x="6217920" y="3675887"/>
-            <a:ext cx="5486400" cy="475488"/>
-          </a:xfrm>
-          <a:prstGeom prst="rect">
-            <a:avLst/>
-          </a:prstGeom>
-          <a:solidFill>
-            <a:srgbClr val="FFF0D6"/>
-          </a:solidFill>
-          <a:ln>
-            <a:noFill/>
-          </a:ln>
-        </p:spPr>
-        <p:style>
-          <a:lnRef idx="1">
-            <a:schemeClr val="accent1"/>
-          </a:lnRef>
-          <a:fillRef idx="3">
-            <a:schemeClr val="accent1"/>
-          </a:fillRef>
-          <a:effectRef idx="2">
-            <a:schemeClr val="accent1"/>
-          </a:effectRef>
-          <a:fontRef idx="minor">
-            <a:schemeClr val="lt1"/>
-          </a:fontRef>
-        </p:style>
-        <p:txBody>
-          <a:bodyPr rtlCol="0" anchor="ctr"/>
-          <a:lstStyle/>
-          <a:p>
-            <a:pPr algn="ctr"/>
-          </a:p>
-        </p:txBody>
-      </p:sp>
-      <p:sp>
-        <p:nvSpPr>
-          <p:cNvPr id="33" name="TextBox 32"/>
-          <p:cNvSpPr txBox="1"/>
-          <p:nvPr/>
-        </p:nvSpPr>
-        <p:spPr>
-          <a:xfrm>
-            <a:off x="6355080" y="3694175"/>
-            <a:ext cx="2560320" cy="256032"/>
-          </a:xfrm>
-          <a:prstGeom prst="rect">
-            <a:avLst/>
-          </a:prstGeom>
-          <a:noFill/>
-        </p:spPr>
-        <p:txBody>
-          <a:bodyPr wrap="square">
-            <a:spAutoFit/>
-          </a:bodyPr>
-          <a:lstStyle/>
-          <a:p>
-            <a:pPr algn="l"/>
-            <a:r>
-              <a:rPr sz="1200" b="1" i="0">
-                <a:solidFill>
-                  <a:srgbClr val="E66C00"/>
-                </a:solidFill>
-              </a:rPr>
-              <a:t>🔨 multi_axis_sync.c</a:t>
-            </a:r>
-          </a:p>
-        </p:txBody>
-      </p:sp>
-      <p:sp>
-        <p:nvSpPr>
-          <p:cNvPr id="34" name="TextBox 33"/>
-          <p:cNvSpPr txBox="1"/>
-          <p:nvPr/>
-        </p:nvSpPr>
-        <p:spPr>
-          <a:xfrm>
-            <a:off x="9052560" y="3694175"/>
-            <a:ext cx="2468880" cy="256032"/>
-          </a:xfrm>
-          <a:prstGeom prst="rect">
-            <a:avLst/>
-          </a:prstGeom>
-          <a:noFill/>
-        </p:spPr>
-        <p:txBody>
-          <a:bodyPr wrap="square">
-            <a:spAutoFit/>
-          </a:bodyPr>
-          <a:lstStyle/>
-          <a:p>
-            <a:pPr algn="l"/>
-            <a:r>
-              <a:rPr sz="1150" b="0" i="0">
-                <a:solidFill>
-                  <a:srgbClr val="606060"/>
-                </a:solidFill>
-              </a:rPr>
-              <a:t>2축/3축 TIM 동기화</a:t>
-            </a:r>
-          </a:p>
-        </p:txBody>
-      </p:sp>
-      <p:sp>
-        <p:nvSpPr>
-          <p:cNvPr id="35" name="TextBox 34"/>
+              <a:t>오픈소스에서 가공 예정</a:t>
+            </a:r>
+          </a:p>
+        </p:txBody>
+      </p:sp>
+      <p:sp>
+        <p:nvSpPr>
+          <p:cNvPr id="38" name="TextBox 37"/>
           <p:cNvSpPr txBox="1"/>
           <p:nvPr/>
         </p:nvSpPr>
@@ -69140,7 +69251,7 @@
       </p:sp>
       <p:sp>
         <p:nvSpPr>
-          <p:cNvPr id="36" name="Rectangle 35"/>
+          <p:cNvPr id="39" name="Rectangle 38"/>
           <p:cNvSpPr/>
           <p:nvPr/>
         </p:nvSpPr>
@@ -69183,7 +69294,7 @@
       </p:sp>
       <p:sp>
         <p:nvSpPr>
-          <p:cNvPr id="37" name="TextBox 36"/>
+          <p:cNvPr id="40" name="TextBox 39"/>
           <p:cNvSpPr txBox="1"/>
           <p:nvPr/>
         </p:nvSpPr>
@@ -69211,14 +69322,14 @@
                 </a:solidFill>
               </a:rPr>
               <a:t>RAG 지식베이스
-50~80개 (품질 중심)</a:t>
-            </a:r>
-          </a:p>
-        </p:txBody>
-      </p:sp>
-      <p:sp>
-        <p:nvSpPr>
-          <p:cNvPr id="38" name="Rectangle 37"/>
+~2,600 청크</a:t>
+            </a:r>
+          </a:p>
+        </p:txBody>
+      </p:sp>
+      <p:sp>
+        <p:nvSpPr>
+          <p:cNvPr id="41" name="Rectangle 40"/>
           <p:cNvSpPr/>
           <p:nvPr/>
         </p:nvSpPr>
@@ -69261,7 +69372,7 @@
       </p:sp>
       <p:sp>
         <p:nvSpPr>
-          <p:cNvPr id="39" name="TextBox 38"/>
+          <p:cNvPr id="42" name="TextBox 41"/>
           <p:cNvSpPr txBox="1"/>
           <p:nvPr/>
         </p:nvSpPr>
@@ -69289,7 +69400,7 @@
                 </a:solidFill>
               </a:rPr>
               <a:t>Fine-tuning 데이터셋
-300~500개 (다양성)</a:t>
+500~1,000쌍 (자동생성)</a:t>
             </a:r>
           </a:p>
         </p:txBody>
@@ -69427,7 +69538,7 @@
                   <a:srgbClr val="FFFFFF"/>
                 </a:solidFill>
               </a:rPr>
-              <a:t>Phase 2 — Step 1 핀 검증 Agent</a:t>
+              <a:t>Phase 2 — Step 1 HW 설계 검증 Agent</a:t>
             </a:r>
           </a:p>
         </p:txBody>
@@ -69760,7 +69871,7 @@
                   <a:srgbClr val="007A8A"/>
                 </a:solidFill>
               </a:rPr>
-              <a:t>규칙 엔진</a:t>
+              <a:t>3계층 규칙엔진</a:t>
             </a:r>
           </a:p>
         </p:txBody>
@@ -69794,7 +69905,7 @@
                   <a:srgbClr val="1A1A1A"/>
                 </a:solidFill>
               </a:rPr>
-              <a:t>핀 AF 호환성 검사, 핀 중복, 전용핀 오용, 전원핀 누락</a:t>
+              <a:t>① 인프라 ② 모터논리(상보PWM) ③ 페리페럴(ADC/OPAMP)</a:t>
             </a:r>
           </a:p>
         </p:txBody>
@@ -69905,7 +70016,7 @@
                   <a:srgbClr val="1A1A1A"/>
                 </a:solidFill>
               </a:rPr>
-              <a:t>STM32G4 Datasheet PDF → 청킹 → BGE-M3 임베딩 → Qdrant</a:t>
+              <a:t>PDF + 오픈소스 회로도 → 청킹 → BGE-M3 → Qdrant</a:t>
             </a:r>
           </a:p>
         </p:txBody>
@@ -70016,7 +70127,7 @@
                   <a:srgbClr val="1A1A1A"/>
                 </a:solidFill>
               </a:rPr>
-              <a:t>Gemma-4-31B: 검증 결과 자연어 설명 + JSON 구조화 출력</a:t>
+              <a:t>Gemma 4 31B Dense: 자연어 설명 + JSON 구조화 출력</a:t>
             </a:r>
           </a:p>
         </p:txBody>
@@ -70161,7 +70272,7 @@
                   <a:srgbClr val="007A8A"/>
                 </a:solidFill>
               </a:rPr>
-              <a:t>검증 항목</a:t>
+              <a:t>3계층 검증 항목</a:t>
             </a:r>
           </a:p>
         </p:txBody>
@@ -70238,7 +70349,7 @@
                   <a:srgbClr val="1A1A1A"/>
                 </a:solidFill>
               </a:rPr>
-              <a:t>✅</a:t>
+              <a:t>①</a:t>
             </a:r>
           </a:p>
         </p:txBody>
@@ -70272,7 +70383,7 @@
                   <a:srgbClr val="007A8A"/>
                 </a:solidFill>
               </a:rPr>
-              <a:t>AF 호환성</a:t>
+              <a:t>VDD/VCAP</a:t>
             </a:r>
           </a:p>
         </p:txBody>
@@ -70306,7 +70417,7 @@
                   <a:srgbClr val="606060"/>
                 </a:solidFill>
               </a:rPr>
-              <a:t>PA8 → TIM1_CH1 (AF6) ✓  /  USART1_TX ✗</a:t>
+              <a:t>전원 핀 누락 확인 (ERROR)</a:t>
             </a:r>
           </a:p>
         </p:txBody>
@@ -70383,7 +70494,7 @@
                   <a:srgbClr val="1A1A1A"/>
                 </a:solidFill>
               </a:rPr>
-              <a:t>✅</a:t>
+              <a:t>①</a:t>
             </a:r>
           </a:p>
         </p:txBody>
@@ -70417,7 +70528,7 @@
                   <a:srgbClr val="007A8A"/>
                 </a:solidFill>
               </a:rPr>
-              <a:t>핀 중복</a:t>
+              <a:t>BOOT0/NRST</a:t>
             </a:r>
           </a:p>
         </p:txBody>
@@ -70451,7 +70562,7 @@
                   <a:srgbClr val="606060"/>
                 </a:solidFill>
               </a:rPr>
-              <a:t>동일 핀에 두 기능 배정 감지</a:t>
+              <a:t>플로팅 방지, 리셋 회로 (ERROR)</a:t>
             </a:r>
           </a:p>
         </p:txBody>
@@ -70528,7 +70639,7 @@
                   <a:srgbClr val="1A1A1A"/>
                 </a:solidFill>
               </a:rPr>
-              <a:t>✅</a:t>
+              <a:t>①</a:t>
             </a:r>
           </a:p>
         </p:txBody>
@@ -70562,7 +70673,7 @@
                   <a:srgbClr val="007A8A"/>
                 </a:solidFill>
               </a:rPr>
-              <a:t>전용 핀</a:t>
+              <a:t>SWD 디버그</a:t>
             </a:r>
           </a:p>
         </p:txBody>
@@ -70596,7 +70707,7 @@
                   <a:srgbClr val="606060"/>
                 </a:solidFill>
               </a:rPr>
-              <a:t>OSC_IN/OUT, NRST, BOOT0 오용 감지</a:t>
+              <a:t>SWDIO/SWCLK 연결 확인 (WARN)</a:t>
             </a:r>
           </a:p>
         </p:txBody>
@@ -70673,7 +70784,7 @@
                   <a:srgbClr val="1A1A1A"/>
                 </a:solidFill>
               </a:rPr>
-              <a:t>✅</a:t>
+              <a:t>②</a:t>
             </a:r>
           </a:p>
         </p:txBody>
@@ -70707,7 +70818,7 @@
                   <a:srgbClr val="007A8A"/>
                 </a:solidFill>
               </a:rPr>
-              <a:t>전원 핀</a:t>
+              <a:t>상보 PWM 쌍</a:t>
             </a:r>
           </a:p>
         </p:txBody>
@@ -70741,7 +70852,7 @@
                   <a:srgbClr val="606060"/>
                 </a:solidFill>
               </a:rPr>
-              <a:t>VDD, VDDA, VSS 연결 누락 확인</a:t>
+              <a:t>TIM1_CH1 + CH1N 동일 타이머 (ERROR)</a:t>
             </a:r>
           </a:p>
         </p:txBody>
@@ -70818,7 +70929,7 @@
                   <a:srgbClr val="1A1A1A"/>
                 </a:solidFill>
               </a:rPr>
-              <a:t>✅</a:t>
+              <a:t>②</a:t>
             </a:r>
           </a:p>
         </p:txBody>
@@ -70852,7 +70963,7 @@
                   <a:srgbClr val="007A8A"/>
                 </a:solidFill>
               </a:rPr>
-              <a:t>클럭 일관성</a:t>
+              <a:t>엔코더 타이머</a:t>
             </a:r>
           </a:p>
         </p:txBody>
@@ -70886,7 +70997,7 @@
                   <a:srgbClr val="606060"/>
                 </a:solidFill>
               </a:rPr>
-              <a:t>HSE/HSI/LSE 설정과 핀 일치 여부</a:t>
+              <a:t>Encoder Mode 전용 TIM 확인 (ERROR)</a:t>
             </a:r>
           </a:p>
         </p:txBody>
@@ -70963,7 +71074,7 @@
                   <a:srgbClr val="1A1A1A"/>
                 </a:solidFill>
               </a:rPr>
-              <a:t>✅</a:t>
+              <a:t>③</a:t>
             </a:r>
           </a:p>
         </p:txBody>
@@ -70997,7 +71108,7 @@
                   <a:srgbClr val="007A8A"/>
                 </a:solidFill>
               </a:rPr>
-              <a:t>G4 특화</a:t>
+              <a:t>OPAMP/ADC 충돌</a:t>
             </a:r>
           </a:p>
         </p:txBody>
@@ -71031,7 +71142,7 @@
                   <a:srgbClr val="606060"/>
                 </a:solidFill>
               </a:rPr>
-              <a:t>CORDIC/FMAC 사용 시 전용 핀 확인</a:t>
+              <a:t>내부 연결 충돌 감지 (ERROR)</a:t>
             </a:r>
           </a:p>
         </p:txBody>

--- a/STM32G4_Agent_Plan.pptx
+++ b/STM32G4_Agent_Plan.pptx
@@ -11238,7 +11238,7 @@
                   <a:srgbClr val="1B3A6B"/>
                 </a:solidFill>
               </a:rPr>
-              <a:t>Step 1</a:t>
+              <a:t>Vision</a:t>
             </a:r>
           </a:p>
         </p:txBody>
@@ -11272,8 +11272,8 @@
                   <a:srgbClr val="606060"/>
                 </a:solidFill>
               </a:rPr>
-              <a:t>HW 검증
-(추론)</a:t>
+              <a:t>회로도 이미지
+→ 핀맵 추출</a:t>
             </a:r>
           </a:p>
         </p:txBody>
@@ -11375,7 +11375,7 @@
                   <a:srgbClr val="107C10"/>
                 </a:solidFill>
               </a:rPr>
-              <a:t>~20GB</a:t>
+              <a:t>공유</a:t>
             </a:r>
           </a:p>
         </p:txBody>
@@ -11409,7 +11409,7 @@
                   <a:srgbClr val="606060"/>
                 </a:solidFill>
               </a:rPr>
-              <a:t>논리 추론 정확도 최상급, JSON 구조화 출력 우수</a:t>
+              <a:t>Step 1과 동일 인스턴스 재사용 — 이미지 → pinmap CSV + 초기 분석 생성</a:t>
             </a:r>
           </a:p>
         </p:txBody>
@@ -11486,7 +11486,7 @@
                   <a:srgbClr val="1B3A6B"/>
                 </a:solidFill>
               </a:rPr>
-              <a:t>Step 2</a:t>
+              <a:t>Step 1</a:t>
             </a:r>
           </a:p>
         </p:txBody>
@@ -11520,8 +11520,8 @@
                   <a:srgbClr val="606060"/>
                 </a:solidFill>
               </a:rPr>
-              <a:t>CubeMX
-자동화</a:t>
+              <a:t>HW 검증
+(추론)</a:t>
             </a:r>
           </a:p>
         </p:txBody>
@@ -11555,7 +11555,7 @@
                   <a:srgbClr val="2E6DB4"/>
                 </a:solidFill>
               </a:rPr>
-              <a:t>LLM 불필요</a:t>
+              <a:t>Gemma 4 31B Dense</a:t>
             </a:r>
           </a:p>
         </p:txBody>
@@ -11589,7 +11589,7 @@
                   <a:srgbClr val="1A1A1A"/>
                 </a:solidFill>
               </a:rPr>
-              <a:t>—</a:t>
+              <a:t>Q4_K_M</a:t>
             </a:r>
           </a:p>
         </p:txBody>
@@ -11623,7 +11623,7 @@
                   <a:srgbClr val="606060"/>
                 </a:solidFill>
               </a:rPr>
-              <a:t>0GB</a:t>
+              <a:t>~20GB</a:t>
             </a:r>
           </a:p>
         </p:txBody>
@@ -11657,7 +11657,7 @@
                   <a:srgbClr val="606060"/>
                 </a:solidFill>
               </a:rPr>
-              <a:t>결정론적 코드 생성 — CubeMX CLI 직접 사용</a:t>
+              <a:t>논리 추론 정확도 최상급, JSON 구조화 출력 우수 / Vision 분석 컨텍스트 포함</a:t>
             </a:r>
           </a:p>
         </p:txBody>
@@ -11734,7 +11734,7 @@
                   <a:srgbClr val="1B3A6B"/>
                 </a:solidFill>
               </a:rPr>
-              <a:t>Step 3</a:t>
+              <a:t>Step 2</a:t>
             </a:r>
           </a:p>
         </p:txBody>
@@ -11768,8 +11768,8 @@
                   <a:srgbClr val="606060"/>
                 </a:solidFill>
               </a:rPr>
-              <a:t>알고리즘
-통합</a:t>
+              <a:t>CubeMX
+자동화</a:t>
             </a:r>
           </a:p>
         </p:txBody>
@@ -11803,7 +11803,7 @@
                   <a:srgbClr val="2E6DB4"/>
                 </a:solidFill>
               </a:rPr>
-              <a:t>Gemma 4 26B MoE</a:t>
+              <a:t>LLM 불필요</a:t>
             </a:r>
           </a:p>
         </p:txBody>
@@ -11837,7 +11837,7 @@
                   <a:srgbClr val="1A1A1A"/>
                 </a:solidFill>
               </a:rPr>
-              <a:t>Q8</a:t>
+              <a:t>—</a:t>
             </a:r>
           </a:p>
         </p:txBody>
@@ -11871,7 +11871,7 @@
                   <a:srgbClr val="107C10"/>
                 </a:solidFill>
               </a:rPr>
-              <a:t>~22GB</a:t>
+              <a:t>0GB</a:t>
             </a:r>
           </a:p>
         </p:txBody>
@@ -11905,7 +11905,7 @@
                   <a:srgbClr val="606060"/>
                 </a:solidFill>
               </a:rPr>
-              <a:t>Active ~4B → 빠른 추론, USER CODE 삽입 최적화</a:t>
+              <a:t>결정론적 코드 생성 — CubeMX CLI 직접 사용</a:t>
             </a:r>
           </a:p>
         </p:txBody>
@@ -11982,7 +11982,7 @@
                   <a:srgbClr val="1B3A6B"/>
                 </a:solidFill>
               </a:rPr>
-              <a:t>임베딩</a:t>
+              <a:t>Step 3</a:t>
             </a:r>
           </a:p>
         </p:txBody>
@@ -12016,7 +12016,8 @@
                   <a:srgbClr val="606060"/>
                 </a:solidFill>
               </a:rPr>
-              <a:t>RAG 검색</a:t>
+              <a:t>알고리즘
+통합</a:t>
             </a:r>
           </a:p>
         </p:txBody>
@@ -12050,7 +12051,7 @@
                   <a:srgbClr val="2E6DB4"/>
                 </a:solidFill>
               </a:rPr>
-              <a:t>BAAI/bge-m3</a:t>
+              <a:t>Gemma 4 26B MoE</a:t>
             </a:r>
           </a:p>
         </p:txBody>
@@ -12084,7 +12085,7 @@
                   <a:srgbClr val="1A1A1A"/>
                 </a:solidFill>
               </a:rPr>
-              <a:t>FP32</a:t>
+              <a:t>Q8</a:t>
             </a:r>
           </a:p>
         </p:txBody>
@@ -12118,7 +12119,7 @@
                   <a:srgbClr val="107C10"/>
                 </a:solidFill>
               </a:rPr>
-              <a:t>~2GB</a:t>
+              <a:t>~22GB</a:t>
             </a:r>
           </a:p>
         </p:txBody>
@@ -12152,6 +12153,253 @@
                   <a:srgbClr val="606060"/>
                 </a:solidFill>
               </a:rPr>
+              <a:t>Active ~4B → 빠른 추론, USER CODE 삽입 최적화</a:t>
+            </a:r>
+          </a:p>
+        </p:txBody>
+      </p:sp>
+      <p:sp>
+        <p:nvSpPr>
+          <p:cNvPr id="44" name="Rectangle 43"/>
+          <p:cNvSpPr/>
+          <p:nvPr/>
+        </p:nvSpPr>
+        <p:spPr>
+          <a:xfrm>
+            <a:off x="365760" y="4178808"/>
+            <a:ext cx="11430000" cy="594360"/>
+          </a:xfrm>
+          <a:prstGeom prst="rect">
+            <a:avLst/>
+          </a:prstGeom>
+          <a:solidFill>
+            <a:srgbClr val="D6E8FF"/>
+          </a:solidFill>
+          <a:ln>
+            <a:noFill/>
+          </a:ln>
+        </p:spPr>
+        <p:style>
+          <a:lnRef idx="1">
+            <a:schemeClr val="accent1"/>
+          </a:lnRef>
+          <a:fillRef idx="3">
+            <a:schemeClr val="accent1"/>
+          </a:fillRef>
+          <a:effectRef idx="2">
+            <a:schemeClr val="accent1"/>
+          </a:effectRef>
+          <a:fontRef idx="minor">
+            <a:schemeClr val="lt1"/>
+          </a:fontRef>
+        </p:style>
+        <p:txBody>
+          <a:bodyPr rtlCol="0" anchor="ctr"/>
+          <a:lstStyle/>
+          <a:p>
+            <a:pPr algn="ctr"/>
+          </a:p>
+        </p:txBody>
+      </p:sp>
+      <p:sp>
+        <p:nvSpPr>
+          <p:cNvPr id="45" name="TextBox 44"/>
+          <p:cNvSpPr txBox="1"/>
+          <p:nvPr/>
+        </p:nvSpPr>
+        <p:spPr>
+          <a:xfrm>
+            <a:off x="457200" y="4224528"/>
+            <a:ext cx="822960" cy="502920"/>
+          </a:xfrm>
+          <a:prstGeom prst="rect">
+            <a:avLst/>
+          </a:prstGeom>
+          <a:noFill/>
+        </p:spPr>
+        <p:txBody>
+          <a:bodyPr wrap="square">
+            <a:spAutoFit/>
+          </a:bodyPr>
+          <a:lstStyle/>
+          <a:p>
+            <a:pPr algn="l"/>
+            <a:r>
+              <a:rPr sz="1250" b="1" i="0">
+                <a:solidFill>
+                  <a:srgbClr val="1B3A6B"/>
+                </a:solidFill>
+              </a:rPr>
+              <a:t>임베딩</a:t>
+            </a:r>
+          </a:p>
+        </p:txBody>
+      </p:sp>
+      <p:sp>
+        <p:nvSpPr>
+          <p:cNvPr id="46" name="TextBox 45"/>
+          <p:cNvSpPr txBox="1"/>
+          <p:nvPr/>
+        </p:nvSpPr>
+        <p:spPr>
+          <a:xfrm>
+            <a:off x="1280160" y="4224528"/>
+            <a:ext cx="1371600" cy="502920"/>
+          </a:xfrm>
+          <a:prstGeom prst="rect">
+            <a:avLst/>
+          </a:prstGeom>
+          <a:noFill/>
+        </p:spPr>
+        <p:txBody>
+          <a:bodyPr wrap="square">
+            <a:spAutoFit/>
+          </a:bodyPr>
+          <a:lstStyle/>
+          <a:p>
+            <a:pPr algn="l"/>
+            <a:r>
+              <a:rPr sz="1150" b="0" i="0">
+                <a:solidFill>
+                  <a:srgbClr val="606060"/>
+                </a:solidFill>
+              </a:rPr>
+              <a:t>RAG 검색</a:t>
+            </a:r>
+          </a:p>
+        </p:txBody>
+      </p:sp>
+      <p:sp>
+        <p:nvSpPr>
+          <p:cNvPr id="47" name="TextBox 46"/>
+          <p:cNvSpPr txBox="1"/>
+          <p:nvPr/>
+        </p:nvSpPr>
+        <p:spPr>
+          <a:xfrm>
+            <a:off x="2697480" y="4224528"/>
+            <a:ext cx="2560320" cy="502920"/>
+          </a:xfrm>
+          <a:prstGeom prst="rect">
+            <a:avLst/>
+          </a:prstGeom>
+          <a:noFill/>
+        </p:spPr>
+        <p:txBody>
+          <a:bodyPr wrap="square">
+            <a:spAutoFit/>
+          </a:bodyPr>
+          <a:lstStyle/>
+          <a:p>
+            <a:pPr algn="l"/>
+            <a:r>
+              <a:rPr sz="1150" b="1" i="0">
+                <a:solidFill>
+                  <a:srgbClr val="2E6DB4"/>
+                </a:solidFill>
+              </a:rPr>
+              <a:t>BAAI/bge-m3</a:t>
+            </a:r>
+          </a:p>
+        </p:txBody>
+      </p:sp>
+      <p:sp>
+        <p:nvSpPr>
+          <p:cNvPr id="48" name="TextBox 47"/>
+          <p:cNvSpPr txBox="1"/>
+          <p:nvPr/>
+        </p:nvSpPr>
+        <p:spPr>
+          <a:xfrm>
+            <a:off x="5303520" y="4224528"/>
+            <a:ext cx="822960" cy="502920"/>
+          </a:xfrm>
+          <a:prstGeom prst="rect">
+            <a:avLst/>
+          </a:prstGeom>
+          <a:noFill/>
+        </p:spPr>
+        <p:txBody>
+          <a:bodyPr wrap="square">
+            <a:spAutoFit/>
+          </a:bodyPr>
+          <a:lstStyle/>
+          <a:p>
+            <a:pPr algn="ctr"/>
+            <a:r>
+              <a:rPr sz="1150" b="0" i="0">
+                <a:solidFill>
+                  <a:srgbClr val="1A1A1A"/>
+                </a:solidFill>
+              </a:rPr>
+              <a:t>FP32</a:t>
+            </a:r>
+          </a:p>
+        </p:txBody>
+      </p:sp>
+      <p:sp>
+        <p:nvSpPr>
+          <p:cNvPr id="49" name="TextBox 48"/>
+          <p:cNvSpPr txBox="1"/>
+          <p:nvPr/>
+        </p:nvSpPr>
+        <p:spPr>
+          <a:xfrm>
+            <a:off x="6172200" y="4224528"/>
+            <a:ext cx="822960" cy="502920"/>
+          </a:xfrm>
+          <a:prstGeom prst="rect">
+            <a:avLst/>
+          </a:prstGeom>
+          <a:noFill/>
+        </p:spPr>
+        <p:txBody>
+          <a:bodyPr wrap="square">
+            <a:spAutoFit/>
+          </a:bodyPr>
+          <a:lstStyle/>
+          <a:p>
+            <a:pPr algn="ctr"/>
+            <a:r>
+              <a:rPr sz="1200" b="1" i="0">
+                <a:solidFill>
+                  <a:srgbClr val="107C10"/>
+                </a:solidFill>
+              </a:rPr>
+              <a:t>~2GB</a:t>
+            </a:r>
+          </a:p>
+        </p:txBody>
+      </p:sp>
+      <p:sp>
+        <p:nvSpPr>
+          <p:cNvPr id="50" name="TextBox 49"/>
+          <p:cNvSpPr txBox="1"/>
+          <p:nvPr/>
+        </p:nvSpPr>
+        <p:spPr>
+          <a:xfrm>
+            <a:off x="7086600" y="4224528"/>
+            <a:ext cx="4480560" cy="502920"/>
+          </a:xfrm>
+          <a:prstGeom prst="rect">
+            <a:avLst/>
+          </a:prstGeom>
+          <a:noFill/>
+        </p:spPr>
+        <p:txBody>
+          <a:bodyPr wrap="square">
+            <a:spAutoFit/>
+          </a:bodyPr>
+          <a:lstStyle/>
+          <a:p>
+            <a:pPr algn="l"/>
+            <a:r>
+              <a:rPr sz="1100" b="0" i="0">
+                <a:solidFill>
+                  <a:srgbClr val="606060"/>
+                </a:solidFill>
+              </a:rPr>
               <a:t>한국어+영어 혼재 문서 최적, 로컬 실행 가능</a:t>
             </a:r>
           </a:p>
@@ -12159,7 +12407,7 @@
       </p:sp>
       <p:sp>
         <p:nvSpPr>
-          <p:cNvPr id="44" name="TextBox 43"/>
+          <p:cNvPr id="51" name="TextBox 50"/>
           <p:cNvSpPr txBox="1"/>
           <p:nvPr/>
         </p:nvSpPr>
@@ -12193,7 +12441,7 @@
       </p:sp>
       <p:sp>
         <p:nvSpPr>
-          <p:cNvPr id="45" name="Rectangle 44"/>
+          <p:cNvPr id="52" name="Rectangle 51"/>
           <p:cNvSpPr/>
           <p:nvPr/>
         </p:nvSpPr>
@@ -12236,7 +12484,7 @@
       </p:sp>
       <p:sp>
         <p:nvSpPr>
-          <p:cNvPr id="46" name="TextBox 45"/>
+          <p:cNvPr id="53" name="TextBox 52"/>
           <p:cNvSpPr txBox="1"/>
           <p:nvPr/>
         </p:nvSpPr>
@@ -12270,7 +12518,7 @@
       </p:sp>
       <p:sp>
         <p:nvSpPr>
-          <p:cNvPr id="47" name="TextBox 46"/>
+          <p:cNvPr id="54" name="TextBox 53"/>
           <p:cNvSpPr txBox="1"/>
           <p:nvPr/>
         </p:nvSpPr>
@@ -12304,7 +12552,7 @@
       </p:sp>
       <p:sp>
         <p:nvSpPr>
-          <p:cNvPr id="48" name="TextBox 47"/>
+          <p:cNvPr id="55" name="TextBox 54"/>
           <p:cNvSpPr txBox="1"/>
           <p:nvPr/>
         </p:nvSpPr>
@@ -12338,7 +12586,7 @@
       </p:sp>
       <p:sp>
         <p:nvSpPr>
-          <p:cNvPr id="49" name="TextBox 48"/>
+          <p:cNvPr id="56" name="TextBox 55"/>
           <p:cNvSpPr txBox="1"/>
           <p:nvPr/>
         </p:nvSpPr>
@@ -12372,7 +12620,7 @@
       </p:sp>
       <p:sp>
         <p:nvSpPr>
-          <p:cNvPr id="50" name="TextBox 49"/>
+          <p:cNvPr id="57" name="TextBox 56"/>
           <p:cNvSpPr txBox="1"/>
           <p:nvPr/>
         </p:nvSpPr>
@@ -12406,7 +12654,7 @@
       </p:sp>
       <p:sp>
         <p:nvSpPr>
-          <p:cNvPr id="51" name="Rectangle 50"/>
+          <p:cNvPr id="58" name="Rectangle 57"/>
           <p:cNvSpPr/>
           <p:nvPr/>
         </p:nvSpPr>
@@ -12449,7 +12697,7 @@
       </p:sp>
       <p:sp>
         <p:nvSpPr>
-          <p:cNvPr id="52" name="TextBox 51"/>
+          <p:cNvPr id="59" name="TextBox 58"/>
           <p:cNvSpPr txBox="1"/>
           <p:nvPr/>
         </p:nvSpPr>
@@ -12483,7 +12731,7 @@
       </p:sp>
       <p:sp>
         <p:nvSpPr>
-          <p:cNvPr id="53" name="TextBox 52"/>
+          <p:cNvPr id="60" name="TextBox 59"/>
           <p:cNvSpPr txBox="1"/>
           <p:nvPr/>
         </p:nvSpPr>
@@ -12517,7 +12765,7 @@
       </p:sp>
       <p:sp>
         <p:nvSpPr>
-          <p:cNvPr id="54" name="TextBox 53"/>
+          <p:cNvPr id="61" name="TextBox 60"/>
           <p:cNvSpPr txBox="1"/>
           <p:nvPr/>
         </p:nvSpPr>
@@ -12551,7 +12799,7 @@
       </p:sp>
       <p:sp>
         <p:nvSpPr>
-          <p:cNvPr id="55" name="TextBox 54"/>
+          <p:cNvPr id="62" name="TextBox 61"/>
           <p:cNvSpPr txBox="1"/>
           <p:nvPr/>
         </p:nvSpPr>
@@ -12585,7 +12833,7 @@
       </p:sp>
       <p:sp>
         <p:nvSpPr>
-          <p:cNvPr id="56" name="TextBox 55"/>
+          <p:cNvPr id="63" name="TextBox 62"/>
           <p:cNvSpPr txBox="1"/>
           <p:nvPr/>
         </p:nvSpPr>
@@ -12619,7 +12867,7 @@
       </p:sp>
       <p:sp>
         <p:nvSpPr>
-          <p:cNvPr id="57" name="Rectangle 56"/>
+          <p:cNvPr id="64" name="Rectangle 63"/>
           <p:cNvSpPr/>
           <p:nvPr/>
         </p:nvSpPr>
@@ -12662,7 +12910,7 @@
       </p:sp>
       <p:sp>
         <p:nvSpPr>
-          <p:cNvPr id="58" name="TextBox 57"/>
+          <p:cNvPr id="65" name="TextBox 64"/>
           <p:cNvSpPr txBox="1"/>
           <p:nvPr/>
         </p:nvSpPr>
@@ -12696,7 +12944,7 @@
       </p:sp>
       <p:sp>
         <p:nvSpPr>
-          <p:cNvPr id="59" name="TextBox 58"/>
+          <p:cNvPr id="66" name="TextBox 65"/>
           <p:cNvSpPr txBox="1"/>
           <p:nvPr/>
         </p:nvSpPr>
@@ -12730,7 +12978,7 @@
       </p:sp>
       <p:sp>
         <p:nvSpPr>
-          <p:cNvPr id="60" name="TextBox 59"/>
+          <p:cNvPr id="67" name="TextBox 66"/>
           <p:cNvSpPr txBox="1"/>
           <p:nvPr/>
         </p:nvSpPr>
@@ -12764,7 +13012,7 @@
       </p:sp>
       <p:sp>
         <p:nvSpPr>
-          <p:cNvPr id="61" name="TextBox 60"/>
+          <p:cNvPr id="68" name="TextBox 67"/>
           <p:cNvSpPr txBox="1"/>
           <p:nvPr/>
         </p:nvSpPr>
@@ -12798,7 +13046,7 @@
       </p:sp>
       <p:sp>
         <p:nvSpPr>
-          <p:cNvPr id="62" name="TextBox 61"/>
+          <p:cNvPr id="69" name="TextBox 68"/>
           <p:cNvSpPr txBox="1"/>
           <p:nvPr/>
         </p:nvSpPr>
@@ -12832,7 +13080,7 @@
       </p:sp>
       <p:sp>
         <p:nvSpPr>
-          <p:cNvPr id="63" name="Rectangle 62"/>
+          <p:cNvPr id="70" name="Rectangle 69"/>
           <p:cNvSpPr/>
           <p:nvPr/>
         </p:nvSpPr>
@@ -12875,7 +13123,7 @@
       </p:sp>
       <p:sp>
         <p:nvSpPr>
-          <p:cNvPr id="64" name="TextBox 63"/>
+          <p:cNvPr id="71" name="TextBox 70"/>
           <p:cNvSpPr txBox="1"/>
           <p:nvPr/>
         </p:nvSpPr>
@@ -12909,7 +13157,7 @@
       </p:sp>
       <p:sp>
         <p:nvSpPr>
-          <p:cNvPr id="65" name="TextBox 64"/>
+          <p:cNvPr id="72" name="TextBox 71"/>
           <p:cNvSpPr txBox="1"/>
           <p:nvPr/>
         </p:nvSpPr>
@@ -12943,7 +13191,7 @@
       </p:sp>
       <p:sp>
         <p:nvSpPr>
-          <p:cNvPr id="66" name="TextBox 65"/>
+          <p:cNvPr id="73" name="TextBox 72"/>
           <p:cNvSpPr txBox="1"/>
           <p:nvPr/>
         </p:nvSpPr>
@@ -12977,7 +13225,7 @@
       </p:sp>
       <p:sp>
         <p:nvSpPr>
-          <p:cNvPr id="67" name="TextBox 66"/>
+          <p:cNvPr id="74" name="TextBox 73"/>
           <p:cNvSpPr txBox="1"/>
           <p:nvPr/>
         </p:nvSpPr>
@@ -13011,7 +13259,7 @@
       </p:sp>
       <p:sp>
         <p:nvSpPr>
-          <p:cNvPr id="68" name="TextBox 67"/>
+          <p:cNvPr id="75" name="TextBox 74"/>
           <p:cNvSpPr txBox="1"/>
           <p:nvPr/>
         </p:nvSpPr>
@@ -13045,7 +13293,7 @@
       </p:sp>
       <p:sp>
         <p:nvSpPr>
-          <p:cNvPr id="69" name="TextBox 68"/>
+          <p:cNvPr id="76" name="TextBox 75"/>
           <p:cNvSpPr txBox="1"/>
           <p:nvPr/>
         </p:nvSpPr>
@@ -13079,7 +13327,7 @@
       </p:sp>
       <p:sp>
         <p:nvSpPr>
-          <p:cNvPr id="70" name="Rectangle 69"/>
+          <p:cNvPr id="77" name="Rectangle 76"/>
           <p:cNvSpPr/>
           <p:nvPr/>
         </p:nvSpPr>
@@ -13122,7 +13370,7 @@
       </p:sp>
       <p:sp>
         <p:nvSpPr>
-          <p:cNvPr id="71" name="TextBox 70"/>
+          <p:cNvPr id="78" name="TextBox 77"/>
           <p:cNvSpPr txBox="1"/>
           <p:nvPr/>
         </p:nvSpPr>
@@ -13156,7 +13404,7 @@
       </p:sp>
       <p:sp>
         <p:nvSpPr>
-          <p:cNvPr id="72" name="TextBox 71"/>
+          <p:cNvPr id="79" name="TextBox 78"/>
           <p:cNvSpPr txBox="1"/>
           <p:nvPr/>
         </p:nvSpPr>
@@ -13190,7 +13438,7 @@
       </p:sp>
       <p:sp>
         <p:nvSpPr>
-          <p:cNvPr id="73" name="Rectangle 72"/>
+          <p:cNvPr id="80" name="Rectangle 79"/>
           <p:cNvSpPr/>
           <p:nvPr/>
         </p:nvSpPr>
@@ -13233,7 +13481,7 @@
       </p:sp>
       <p:sp>
         <p:nvSpPr>
-          <p:cNvPr id="74" name="TextBox 73"/>
+          <p:cNvPr id="81" name="TextBox 80"/>
           <p:cNvSpPr txBox="1"/>
           <p:nvPr/>
         </p:nvSpPr>
@@ -13267,7 +13515,7 @@
       </p:sp>
       <p:sp>
         <p:nvSpPr>
-          <p:cNvPr id="75" name="TextBox 74"/>
+          <p:cNvPr id="82" name="TextBox 81"/>
           <p:cNvSpPr txBox="1"/>
           <p:nvPr/>
         </p:nvSpPr>
@@ -13301,7 +13549,7 @@
       </p:sp>
       <p:sp>
         <p:nvSpPr>
-          <p:cNvPr id="76" name="Rectangle 75"/>
+          <p:cNvPr id="83" name="Rectangle 82"/>
           <p:cNvSpPr/>
           <p:nvPr/>
         </p:nvSpPr>
@@ -13344,7 +13592,7 @@
       </p:sp>
       <p:sp>
         <p:nvSpPr>
-          <p:cNvPr id="77" name="TextBox 76"/>
+          <p:cNvPr id="84" name="TextBox 83"/>
           <p:cNvSpPr txBox="1"/>
           <p:nvPr/>
         </p:nvSpPr>
@@ -13842,8 +14090,8 @@
                   <a:srgbClr val="1A1A1A"/>
                 </a:solidFill>
               </a:rPr>
-              <a:t>회로도 핀맵
-작성 (CSV)</a:t>
+              <a:t>회로도 이미지
+또는 CSV 준비</a:t>
             </a:r>
           </a:p>
         </p:txBody>
@@ -14032,7 +14280,7 @@
                 </a:solidFill>
               </a:rPr>
               <a:t>Step 1 Agent
-실행</a:t>
+(Vision + 검증)</a:t>
             </a:r>
           </a:p>
         </p:txBody>
@@ -15054,7 +15302,7 @@
                   <a:srgbClr val="107C10"/>
                 </a:solidFill>
               </a:rPr>
-              <a:t>입력 파일 포맷 (CSV 예시)</a:t>
+              <a:t>입력 방식 (권장: 회로도 이미지)</a:t>
             </a:r>
           </a:p>
         </p:txBody>
@@ -15068,7 +15316,7 @@
         <p:spPr>
           <a:xfrm>
             <a:off x="365760" y="3401568"/>
-            <a:ext cx="5303520" cy="3063240"/>
+            <a:ext cx="5303520" cy="1005840"/>
           </a:xfrm>
           <a:prstGeom prst="rect">
             <a:avLst/>
@@ -15104,54 +15352,268 @@
       </p:sp>
       <p:sp>
         <p:nvSpPr>
-          <p:cNvPr id="47" name="TextBox 46"/>
-          <p:cNvSpPr txBox="1"/>
-          <p:nvPr/>
-        </p:nvSpPr>
-        <p:spPr>
-          <a:xfrm>
-            <a:off x="502920" y="3447288"/>
-            <a:ext cx="5120640" cy="2971800"/>
-          </a:xfrm>
-          <a:prstGeom prst="rect">
-            <a:avLst/>
-          </a:prstGeom>
-          <a:noFill/>
-        </p:spPr>
-        <p:txBody>
-          <a:bodyPr wrap="square">
-            <a:spAutoFit/>
-          </a:bodyPr>
-          <a:lstStyle/>
-          <a:p>
-            <a:pPr algn="l"/>
-            <a:r>
-              <a:rPr sz="1100" b="0" i="0">
+          <p:cNvPr id="47" name="Rectangle 46"/>
+          <p:cNvSpPr/>
+          <p:nvPr/>
+        </p:nvSpPr>
+        <p:spPr>
+          <a:xfrm>
+            <a:off x="365760" y="3401568"/>
+            <a:ext cx="5303520" cy="1005840"/>
+          </a:xfrm>
+          <a:prstGeom prst="rect">
+            <a:avLst/>
+          </a:prstGeom>
+          <a:noFill/>
+          <a:ln w="19050">
+            <a:solidFill>
+              <a:srgbClr val="007A8A"/>
+            </a:solidFill>
+          </a:ln>
+        </p:spPr>
+        <p:style>
+          <a:lnRef idx="1">
+            <a:schemeClr val="accent1"/>
+          </a:lnRef>
+          <a:fillRef idx="3">
+            <a:schemeClr val="accent1"/>
+          </a:fillRef>
+          <a:effectRef idx="2">
+            <a:schemeClr val="accent1"/>
+          </a:effectRef>
+          <a:fontRef idx="minor">
+            <a:schemeClr val="lt1"/>
+          </a:fontRef>
+        </p:style>
+        <p:txBody>
+          <a:bodyPr rtlCol="0" anchor="ctr"/>
+          <a:lstStyle/>
+          <a:p>
+            <a:pPr algn="ctr"/>
+          </a:p>
+        </p:txBody>
+      </p:sp>
+      <p:sp>
+        <p:nvSpPr>
+          <p:cNvPr id="48" name="TextBox 47"/>
+          <p:cNvSpPr txBox="1"/>
+          <p:nvPr/>
+        </p:nvSpPr>
+        <p:spPr>
+          <a:xfrm>
+            <a:off x="502920" y="3438144"/>
+            <a:ext cx="5120640" cy="256032"/>
+          </a:xfrm>
+          <a:prstGeom prst="rect">
+            <a:avLst/>
+          </a:prstGeom>
+          <a:noFill/>
+        </p:spPr>
+        <p:txBody>
+          <a:bodyPr wrap="square">
+            <a:spAutoFit/>
+          </a:bodyPr>
+          <a:lstStyle/>
+          <a:p>
+            <a:pPr algn="l"/>
+            <a:r>
+              <a:rPr sz="1050" b="1" i="0">
+                <a:solidFill>
+                  <a:srgbClr val="007A8A"/>
+                </a:solidFill>
+              </a:rPr>
+              <a:t>방법 1 — 회로도 이미지 업로드 (JPEG/PNG)</a:t>
+            </a:r>
+          </a:p>
+        </p:txBody>
+      </p:sp>
+      <p:sp>
+        <p:nvSpPr>
+          <p:cNvPr id="49" name="TextBox 48"/>
+          <p:cNvSpPr txBox="1"/>
+          <p:nvPr/>
+        </p:nvSpPr>
+        <p:spPr>
+          <a:xfrm>
+            <a:off x="502920" y="3703320"/>
+            <a:ext cx="5120640" cy="228600"/>
+          </a:xfrm>
+          <a:prstGeom prst="rect">
+            <a:avLst/>
+          </a:prstGeom>
+          <a:noFill/>
+        </p:spPr>
+        <p:txBody>
+          <a:bodyPr wrap="square">
+            <a:spAutoFit/>
+          </a:bodyPr>
+          <a:lstStyle/>
+          <a:p>
+            <a:pPr algn="l"/>
+            <a:r>
+              <a:rPr sz="1000" b="0" i="0">
                 <a:solidFill>
                   <a:srgbClr val="CEF5B0"/>
                 </a:solidFill>
               </a:rPr>
-              <a:t>chip,STM32G474RET6
-hse_mhz,24
-sysclk_mhz,170
-pin,function,label
-PA8,TIM1_CH1,PWM_UH
-PA7,TIM1_CH1N,PWM_UL
-PA9,TIM1_CH2,PWM_VH
-PB0,TIM1_CH2N,PWM_VL
-PA10,TIM1_CH3,PWM_WH
-PB1,TIM1_CH3N,PWM_WL
-PA0,TIM2_CH1,ENC_A
-PA1,TIM2_CH2,ENC_B
-PB8,FDCAN1_RX,CAN_RX
-PB9,FDCAN1_TX,CAN_TX</a:t>
-            </a:r>
-          </a:p>
-        </p:txBody>
-      </p:sp>
-      <p:sp>
-        <p:nvSpPr>
-          <p:cNvPr id="48" name="TextBox 47"/>
+              <a:t>Gemma 4 31B Vision이 핀맵을 자동 추출 → 사용자 CSV 작성 불필요</a:t>
+            </a:r>
+          </a:p>
+        </p:txBody>
+      </p:sp>
+      <p:sp>
+        <p:nvSpPr>
+          <p:cNvPr id="50" name="TextBox 49"/>
+          <p:cNvSpPr txBox="1"/>
+          <p:nvPr/>
+        </p:nvSpPr>
+        <p:spPr>
+          <a:xfrm>
+            <a:off x="502920" y="3959352"/>
+            <a:ext cx="5120640" cy="228600"/>
+          </a:xfrm>
+          <a:prstGeom prst="rect">
+            <a:avLst/>
+          </a:prstGeom>
+          <a:noFill/>
+        </p:spPr>
+        <p:txBody>
+          <a:bodyPr wrap="square">
+            <a:spAutoFit/>
+          </a:bodyPr>
+          <a:lstStyle/>
+          <a:p>
+            <a:pPr algn="l"/>
+            <a:r>
+              <a:rPr sz="950" b="0" i="1">
+                <a:solidFill>
+                  <a:srgbClr val="90D090"/>
+                </a:solidFill>
+              </a:rPr>
+              <a:t>schematic_v3.png  (드래그 or 클릭 업로드)</a:t>
+            </a:r>
+          </a:p>
+        </p:txBody>
+      </p:sp>
+      <p:sp>
+        <p:nvSpPr>
+          <p:cNvPr id="51" name="Rectangle 50"/>
+          <p:cNvSpPr/>
+          <p:nvPr/>
+        </p:nvSpPr>
+        <p:spPr>
+          <a:xfrm>
+            <a:off x="365760" y="4480560"/>
+            <a:ext cx="5303520" cy="1984248"/>
+          </a:xfrm>
+          <a:prstGeom prst="rect">
+            <a:avLst/>
+          </a:prstGeom>
+          <a:solidFill>
+            <a:srgbClr val="1E1E1E"/>
+          </a:solidFill>
+          <a:ln>
+            <a:noFill/>
+          </a:ln>
+        </p:spPr>
+        <p:style>
+          <a:lnRef idx="1">
+            <a:schemeClr val="accent1"/>
+          </a:lnRef>
+          <a:fillRef idx="3">
+            <a:schemeClr val="accent1"/>
+          </a:fillRef>
+          <a:effectRef idx="2">
+            <a:schemeClr val="accent1"/>
+          </a:effectRef>
+          <a:fontRef idx="minor">
+            <a:schemeClr val="lt1"/>
+          </a:fontRef>
+        </p:style>
+        <p:txBody>
+          <a:bodyPr rtlCol="0" anchor="ctr"/>
+          <a:lstStyle/>
+          <a:p>
+            <a:pPr algn="ctr"/>
+          </a:p>
+        </p:txBody>
+      </p:sp>
+      <p:sp>
+        <p:nvSpPr>
+          <p:cNvPr id="52" name="TextBox 51"/>
+          <p:cNvSpPr txBox="1"/>
+          <p:nvPr/>
+        </p:nvSpPr>
+        <p:spPr>
+          <a:xfrm>
+            <a:off x="502920" y="4507992"/>
+            <a:ext cx="5120640" cy="256032"/>
+          </a:xfrm>
+          <a:prstGeom prst="rect">
+            <a:avLst/>
+          </a:prstGeom>
+          <a:noFill/>
+        </p:spPr>
+        <p:txBody>
+          <a:bodyPr wrap="square">
+            <a:spAutoFit/>
+          </a:bodyPr>
+          <a:lstStyle/>
+          <a:p>
+            <a:pPr algn="l"/>
+            <a:r>
+              <a:rPr sz="1050" b="1" i="0">
+                <a:solidFill>
+                  <a:srgbClr val="AAAAAA"/>
+                </a:solidFill>
+              </a:rPr>
+              <a:t>방법 2 — CSV 직접 입력 (이미지 없을 때)</a:t>
+            </a:r>
+          </a:p>
+        </p:txBody>
+      </p:sp>
+      <p:sp>
+        <p:nvSpPr>
+          <p:cNvPr id="53" name="TextBox 52"/>
+          <p:cNvSpPr txBox="1"/>
+          <p:nvPr/>
+        </p:nvSpPr>
+        <p:spPr>
+          <a:xfrm>
+            <a:off x="502920" y="4773168"/>
+            <a:ext cx="5120640" cy="1627632"/>
+          </a:xfrm>
+          <a:prstGeom prst="rect">
+            <a:avLst/>
+          </a:prstGeom>
+          <a:noFill/>
+        </p:spPr>
+        <p:txBody>
+          <a:bodyPr wrap="square">
+            <a:spAutoFit/>
+          </a:bodyPr>
+          <a:lstStyle/>
+          <a:p>
+            <a:pPr algn="l"/>
+            <a:r>
+              <a:rPr sz="1050" b="0" i="0">
+                <a:solidFill>
+                  <a:srgbClr val="CEF5B0"/>
+                </a:solidFill>
+              </a:rPr>
+              <a:t>chip,pin,function,label
+STM32G474RET6,PA8,TIM1_CH1,PWM_UH
+STM32G474RET6,PA7,TIM1_CH1N,PWM_UL
+STM32G474RET6,PB8,FDCAN1_RX,CAN_RX
+STM32G474RET6,PB9,FDCAN1_TX,CAN_TX
+...  (전체 핀 목록)</a:t>
+            </a:r>
+          </a:p>
+        </p:txBody>
+      </p:sp>
+      <p:sp>
+        <p:nvSpPr>
+          <p:cNvPr id="54" name="TextBox 53"/>
           <p:cNvSpPr txBox="1"/>
           <p:nvPr/>
         </p:nvSpPr>
@@ -15185,7 +15647,7 @@
       </p:sp>
       <p:sp>
         <p:nvSpPr>
-          <p:cNvPr id="49" name="TextBox 48"/>
+          <p:cNvPr id="55" name="TextBox 54"/>
           <p:cNvSpPr txBox="1"/>
           <p:nvPr/>
         </p:nvSpPr>
@@ -15219,7 +15681,7 @@
       </p:sp>
       <p:sp>
         <p:nvSpPr>
-          <p:cNvPr id="50" name="Rectangle 49"/>
+          <p:cNvPr id="56" name="Rectangle 55"/>
           <p:cNvSpPr/>
           <p:nvPr/>
         </p:nvSpPr>
@@ -15262,7 +15724,7 @@
       </p:sp>
       <p:sp>
         <p:nvSpPr>
-          <p:cNvPr id="51" name="Rectangle 50"/>
+          <p:cNvPr id="57" name="Rectangle 56"/>
           <p:cNvSpPr/>
           <p:nvPr/>
         </p:nvSpPr>
@@ -15305,7 +15767,7 @@
       </p:sp>
       <p:sp>
         <p:nvSpPr>
-          <p:cNvPr id="52" name="TextBox 51"/>
+          <p:cNvPr id="58" name="TextBox 57"/>
           <p:cNvSpPr txBox="1"/>
           <p:nvPr/>
         </p:nvSpPr>
@@ -15347,7 +15809,7 @@
       </p:sp>
       <p:sp>
         <p:nvSpPr>
-          <p:cNvPr id="53" name="Rectangle 52"/>
+          <p:cNvPr id="59" name="Rectangle 58"/>
           <p:cNvSpPr/>
           <p:nvPr/>
         </p:nvSpPr>
@@ -15390,7 +15852,7 @@
       </p:sp>
       <p:sp>
         <p:nvSpPr>
-          <p:cNvPr id="54" name="TextBox 53"/>
+          <p:cNvPr id="60" name="TextBox 59"/>
           <p:cNvSpPr txBox="1"/>
           <p:nvPr/>
         </p:nvSpPr>
@@ -15589,7 +16051,7 @@
                   <a:srgbClr val="FFFFFF"/>
                 </a:solidFill>
               </a:rPr>
-              <a:t>회로도 핀맵 CSV + 자연어 프롬프트 입력 → LLM 파싱 → 검증 리포트</a:t>
+              <a:t>회로도 이미지 + 자연어 프롬프트 → Vision 분석 → Rule Engine + RAG + LLM → 검증 리포트</a:t>
             </a:r>
           </a:p>
         </p:txBody>
@@ -15965,7 +16427,7 @@
                   <a:srgbClr val="1A1A1A"/>
                 </a:solidFill>
               </a:rPr>
-              <a:t>2.  핀맵 CSV 파일 업로드 (회로도에서 추출)</a:t>
+              <a:t>2.  회로도 이미지 업로드 (JPEG/PNG — Vision이 핀맵 자동 추출)</a:t>
             </a:r>
           </a:p>
         </p:txBody>
@@ -16119,7 +16581,7 @@
                   <a:srgbClr val="1A1A1A"/>
                 </a:solidFill>
               </a:rPr>
-              <a:t>4.  [핀 검증 실행] 버튼 클릭</a:t>
+              <a:t>4.  [검증 실행] 버튼 클릭</a:t>
             </a:r>
           </a:p>
         </p:txBody>
@@ -16196,7 +16658,7 @@
                   <a:srgbClr val="1A1A1A"/>
                 </a:solidFill>
               </a:rPr>
-              <a:t>5.  검증 결과 리포트 확인 (PASS / FAIL)</a:t>
+              <a:t>5.  Vision 분석 결과 확인 → 검증 리포트 확인 (PASS / FAIL)</a:t>
             </a:r>
           </a:p>
         </p:txBody>
@@ -28087,7 +28549,7 @@
                   <a:srgbClr val="FFFFFF"/>
                 </a:solidFill>
               </a:rPr>
-              <a:t>CSV 업로드 + 요구사항 JSON 입력 → 검증 결과 실시간 표시</a:t>
+              <a:t>회로도 이미지 업로드 + 자연어 프롬프트 → Vision 분석 → 검증 결과 실시간 표시</a:t>
             </a:r>
           </a:p>
         </p:txBody>
@@ -29267,7 +29729,7 @@
                   <a:srgbClr val="1B3A6B"/>
                 </a:solidFill>
               </a:rPr>
-              <a:t>1  핀맵 CSV 업로드</a:t>
+              <a:t>1  회로도 이미지 업로드 (Vision 자동 분석)</a:t>
             </a:r>
           </a:p>
         </p:txBody>
@@ -29332,7 +29794,7 @@
           <a:noFill/>
           <a:ln w="15240">
             <a:solidFill>
-              <a:srgbClr val="90B4CC"/>
+              <a:srgbClr val="007A8A"/>
             </a:solidFill>
           </a:ln>
         </p:spPr>
@@ -29366,62 +29828,62 @@
         </p:nvSpPr>
         <p:spPr>
           <a:xfrm>
-            <a:off x="4114800" y="3017520"/>
-            <a:ext cx="548640" cy="256032"/>
-          </a:xfrm>
-          <a:prstGeom prst="rect">
-            <a:avLst/>
-          </a:prstGeom>
-          <a:noFill/>
-        </p:spPr>
-        <p:txBody>
-          <a:bodyPr wrap="square">
-            <a:spAutoFit/>
-          </a:bodyPr>
-          <a:lstStyle/>
-          <a:p>
-            <a:pPr algn="ctr"/>
-            <a:r>
-              <a:rPr sz="1400" b="0" i="0">
+            <a:off x="4069079" y="3017520"/>
+            <a:ext cx="640080" cy="256032"/>
+          </a:xfrm>
+          <a:prstGeom prst="rect">
+            <a:avLst/>
+          </a:prstGeom>
+          <a:noFill/>
+        </p:spPr>
+        <p:txBody>
+          <a:bodyPr wrap="square">
+            <a:spAutoFit/>
+          </a:bodyPr>
+          <a:lstStyle/>
+          <a:p>
+            <a:pPr algn="ctr"/>
+            <a:r>
+              <a:rPr sz="1200" b="1" i="0">
+                <a:solidFill>
+                  <a:srgbClr val="007A8A"/>
+                </a:solidFill>
+              </a:rPr>
+              <a:t>[IMG]</a:t>
+            </a:r>
+          </a:p>
+        </p:txBody>
+      </p:sp>
+      <p:sp>
+        <p:nvSpPr>
+          <p:cNvPr id="40" name="TextBox 39"/>
+          <p:cNvSpPr txBox="1"/>
+          <p:nvPr/>
+        </p:nvSpPr>
+        <p:spPr>
+          <a:xfrm>
+            <a:off x="2304288" y="3264408"/>
+            <a:ext cx="4160520" cy="182880"/>
+          </a:xfrm>
+          <a:prstGeom prst="rect">
+            <a:avLst/>
+          </a:prstGeom>
+          <a:noFill/>
+        </p:spPr>
+        <p:txBody>
+          <a:bodyPr wrap="square">
+            <a:spAutoFit/>
+          </a:bodyPr>
+          <a:lstStyle/>
+          <a:p>
+            <a:pPr algn="ctr"/>
+            <a:r>
+              <a:rPr sz="850" b="0" i="0">
                 <a:solidFill>
                   <a:srgbClr val="718296"/>
                 </a:solidFill>
               </a:rPr>
-              <a:t>[  ]</a:t>
-            </a:r>
-          </a:p>
-        </p:txBody>
-      </p:sp>
-      <p:sp>
-        <p:nvSpPr>
-          <p:cNvPr id="40" name="TextBox 39"/>
-          <p:cNvSpPr txBox="1"/>
-          <p:nvPr/>
-        </p:nvSpPr>
-        <p:spPr>
-          <a:xfrm>
-            <a:off x="2377440" y="3264408"/>
-            <a:ext cx="4023359" cy="182880"/>
-          </a:xfrm>
-          <a:prstGeom prst="rect">
-            <a:avLst/>
-          </a:prstGeom>
-          <a:noFill/>
-        </p:spPr>
-        <p:txBody>
-          <a:bodyPr wrap="square">
-            <a:spAutoFit/>
-          </a:bodyPr>
-          <a:lstStyle/>
-          <a:p>
-            <a:pPr algn="ctr"/>
-            <a:r>
-              <a:rPr sz="850" b="0" i="0">
-                <a:solidFill>
-                  <a:srgbClr val="718296"/>
-                </a:solidFill>
-              </a:rPr>
-              <a:t>CSV 파일을 드래그하거나 클릭하여 업로드</a:t>
+              <a:t>회로도 이미지를 드래그하거나 클릭하여 업로드 (JPEG/PNG)</a:t>
             </a:r>
           </a:p>
         </p:txBody>
@@ -29434,8 +29896,8 @@
         </p:nvSpPr>
         <p:spPr>
           <a:xfrm>
-            <a:off x="2377440" y="3447288"/>
-            <a:ext cx="4023359" cy="182880"/>
+            <a:off x="2304288" y="3447288"/>
+            <a:ext cx="4160520" cy="182880"/>
           </a:xfrm>
           <a:prstGeom prst="rect">
             <a:avLst/>
@@ -29452,10 +29914,10 @@
             <a:r>
               <a:rPr sz="850" b="1" i="0">
                 <a:solidFill>
-                  <a:srgbClr val="107C10"/>
-                </a:solidFill>
-              </a:rPr>
-              <a:t>pinmap_BLDC_v2.csv  (업로드 완료 ✓)</a:t>
+                  <a:srgbClr val="007A8A"/>
+                </a:solidFill>
+              </a:rPr>
+              <a:t>schematic_bldc_v3.png  (업로드 완료 ✓  →  Vision 분석 예정)</a:t>
             </a:r>
           </a:p>
         </p:txBody>
@@ -29477,7 +29939,7 @@
           <a:noFill/>
           <a:ln w="12700">
             <a:solidFill>
-              <a:srgbClr val="107C10"/>
+              <a:srgbClr val="007A8A"/>
             </a:solidFill>
           </a:ln>
         </p:spPr>
@@ -61923,8 +62385,8 @@
                   <a:srgbClr val="1A1A1A"/>
                 </a:solidFill>
               </a:rPr>
-              <a:t>• 회로도 입력
-(CSV + 자연어)</a:t>
+              <a:t>• 회로도 이미지
+(Vision 자동 분석)</a:t>
             </a:r>
           </a:p>
         </p:txBody>
@@ -62104,7 +62566,7 @@
                 </a:solidFill>
               </a:rPr>
               <a:t>모델 : Gemma 4 31B Dense
-(~20GB)</a:t>
+(~20GB, Vision 겸용)</a:t>
             </a:r>
           </a:p>
         </p:txBody>
@@ -62182,7 +62644,7 @@
                 </a:solidFill>
               </a:rPr>
               <a:t>출력 : 검증 완료
-핀 JSON</a:t>
+핀 JSON + Vision 분석</a:t>
             </a:r>
           </a:p>
         </p:txBody>
@@ -69808,7 +70270,7 @@
         <p:spPr>
           <a:xfrm>
             <a:off x="365760" y="2103120"/>
-            <a:ext cx="5303520" cy="594360"/>
+            <a:ext cx="5303520" cy="475488"/>
           </a:xfrm>
           <a:prstGeom prst="rect">
             <a:avLst/>
@@ -69851,27 +70313,27 @@
         <p:spPr>
           <a:xfrm>
             <a:off x="502920" y="2139696"/>
-            <a:ext cx="1280160" cy="274320"/>
-          </a:xfrm>
-          <a:prstGeom prst="rect">
-            <a:avLst/>
-          </a:prstGeom>
-          <a:noFill/>
-        </p:spPr>
-        <p:txBody>
-          <a:bodyPr wrap="square">
-            <a:spAutoFit/>
-          </a:bodyPr>
-          <a:lstStyle/>
-          <a:p>
-            <a:pPr algn="l"/>
-            <a:r>
-              <a:rPr sz="1200" b="1" i="0">
+            <a:ext cx="1463040" cy="274320"/>
+          </a:xfrm>
+          <a:prstGeom prst="rect">
+            <a:avLst/>
+          </a:prstGeom>
+          <a:noFill/>
+        </p:spPr>
+        <p:txBody>
+          <a:bodyPr wrap="square">
+            <a:spAutoFit/>
+          </a:bodyPr>
+          <a:lstStyle/>
+          <a:p>
+            <a:pPr algn="l"/>
+            <a:r>
+              <a:rPr sz="1100" b="1" i="0">
                 <a:solidFill>
                   <a:srgbClr val="007A8A"/>
                 </a:solidFill>
               </a:rPr>
-              <a:t>3계층 규칙엔진</a:t>
+              <a:t>Vision 분석</a:t>
             </a:r>
           </a:p>
         </p:txBody>
@@ -69884,28 +70346,28 @@
         </p:nvSpPr>
         <p:spPr>
           <a:xfrm>
-            <a:off x="1920240" y="2139696"/>
-            <a:ext cx="3566160" cy="502920"/>
-          </a:xfrm>
-          <a:prstGeom prst="rect">
-            <a:avLst/>
-          </a:prstGeom>
-          <a:noFill/>
-        </p:spPr>
-        <p:txBody>
-          <a:bodyPr wrap="square">
-            <a:spAutoFit/>
-          </a:bodyPr>
-          <a:lstStyle/>
-          <a:p>
-            <a:pPr algn="l"/>
-            <a:r>
-              <a:rPr sz="1200" b="0" i="0">
+            <a:off x="2103120" y="2139696"/>
+            <a:ext cx="3383280" cy="411480"/>
+          </a:xfrm>
+          <a:prstGeom prst="rect">
+            <a:avLst/>
+          </a:prstGeom>
+          <a:noFill/>
+        </p:spPr>
+        <p:txBody>
+          <a:bodyPr wrap="square">
+            <a:spAutoFit/>
+          </a:bodyPr>
+          <a:lstStyle/>
+          <a:p>
+            <a:pPr algn="l"/>
+            <a:r>
+              <a:rPr sz="1050" b="0" i="0">
                 <a:solidFill>
                   <a:srgbClr val="1A1A1A"/>
                 </a:solidFill>
               </a:rPr>
-              <a:t>① 인프라 ② 모터논리(상보PWM) ③ 페리페럴(ADC/OPAMP)</a:t>
+              <a:t>Gemma 4 31B Multimodal: 회로도 이미지 → 핀맵 자동 추출 + 초기 분석</a:t>
             </a:r>
           </a:p>
         </p:txBody>
@@ -69918,8 +70380,8 @@
         </p:nvSpPr>
         <p:spPr>
           <a:xfrm>
-            <a:off x="365760" y="2761487"/>
-            <a:ext cx="5303520" cy="594360"/>
+            <a:off x="365760" y="2633472"/>
+            <a:ext cx="5303520" cy="475488"/>
           </a:xfrm>
           <a:prstGeom prst="rect">
             <a:avLst/>
@@ -69961,28 +70423,28 @@
         </p:nvSpPr>
         <p:spPr>
           <a:xfrm>
-            <a:off x="502920" y="2798063"/>
-            <a:ext cx="1280160" cy="274320"/>
-          </a:xfrm>
-          <a:prstGeom prst="rect">
-            <a:avLst/>
-          </a:prstGeom>
-          <a:noFill/>
-        </p:spPr>
-        <p:txBody>
-          <a:bodyPr wrap="square">
-            <a:spAutoFit/>
-          </a:bodyPr>
-          <a:lstStyle/>
-          <a:p>
-            <a:pPr algn="l"/>
-            <a:r>
-              <a:rPr sz="1200" b="1" i="0">
+            <a:off x="502920" y="2670048"/>
+            <a:ext cx="1463040" cy="274320"/>
+          </a:xfrm>
+          <a:prstGeom prst="rect">
+            <a:avLst/>
+          </a:prstGeom>
+          <a:noFill/>
+        </p:spPr>
+        <p:txBody>
+          <a:bodyPr wrap="square">
+            <a:spAutoFit/>
+          </a:bodyPr>
+          <a:lstStyle/>
+          <a:p>
+            <a:pPr algn="l"/>
+            <a:r>
+              <a:rPr sz="1100" b="1" i="0">
                 <a:solidFill>
                   <a:srgbClr val="007A8A"/>
                 </a:solidFill>
               </a:rPr>
-              <a:t>RAG 구성</a:t>
+              <a:t>3계층 규칙엔진</a:t>
             </a:r>
           </a:p>
         </p:txBody>
@@ -69995,28 +70457,28 @@
         </p:nvSpPr>
         <p:spPr>
           <a:xfrm>
-            <a:off x="1920240" y="2798063"/>
-            <a:ext cx="3566160" cy="502920"/>
-          </a:xfrm>
-          <a:prstGeom prst="rect">
-            <a:avLst/>
-          </a:prstGeom>
-          <a:noFill/>
-        </p:spPr>
-        <p:txBody>
-          <a:bodyPr wrap="square">
-            <a:spAutoFit/>
-          </a:bodyPr>
-          <a:lstStyle/>
-          <a:p>
-            <a:pPr algn="l"/>
-            <a:r>
-              <a:rPr sz="1200" b="0" i="0">
+            <a:off x="2103120" y="2670048"/>
+            <a:ext cx="3383280" cy="411480"/>
+          </a:xfrm>
+          <a:prstGeom prst="rect">
+            <a:avLst/>
+          </a:prstGeom>
+          <a:noFill/>
+        </p:spPr>
+        <p:txBody>
+          <a:bodyPr wrap="square">
+            <a:spAutoFit/>
+          </a:bodyPr>
+          <a:lstStyle/>
+          <a:p>
+            <a:pPr algn="l"/>
+            <a:r>
+              <a:rPr sz="1050" b="0" i="0">
                 <a:solidFill>
                   <a:srgbClr val="1A1A1A"/>
                 </a:solidFill>
               </a:rPr>
-              <a:t>PDF + 오픈소스 회로도 → 청킹 → BGE-M3 → Qdrant</a:t>
+              <a:t>① 인프라 ② 모터논리(상보PWM) ③ 페리페럴(ADC/OPAMP)</a:t>
             </a:r>
           </a:p>
         </p:txBody>
@@ -70029,8 +70491,8 @@
         </p:nvSpPr>
         <p:spPr>
           <a:xfrm>
-            <a:off x="365760" y="3419856"/>
-            <a:ext cx="5303520" cy="594360"/>
+            <a:off x="365760" y="3163824"/>
+            <a:ext cx="5303520" cy="475488"/>
           </a:xfrm>
           <a:prstGeom prst="rect">
             <a:avLst/>
@@ -70072,28 +70534,28 @@
         </p:nvSpPr>
         <p:spPr>
           <a:xfrm>
-            <a:off x="502920" y="3456432"/>
-            <a:ext cx="1280160" cy="274320"/>
-          </a:xfrm>
-          <a:prstGeom prst="rect">
-            <a:avLst/>
-          </a:prstGeom>
-          <a:noFill/>
-        </p:spPr>
-        <p:txBody>
-          <a:bodyPr wrap="square">
-            <a:spAutoFit/>
-          </a:bodyPr>
-          <a:lstStyle/>
-          <a:p>
-            <a:pPr algn="l"/>
-            <a:r>
-              <a:rPr sz="1200" b="1" i="0">
+            <a:off x="502920" y="3200400"/>
+            <a:ext cx="1463040" cy="274320"/>
+          </a:xfrm>
+          <a:prstGeom prst="rect">
+            <a:avLst/>
+          </a:prstGeom>
+          <a:noFill/>
+        </p:spPr>
+        <p:txBody>
+          <a:bodyPr wrap="square">
+            <a:spAutoFit/>
+          </a:bodyPr>
+          <a:lstStyle/>
+          <a:p>
+            <a:pPr algn="l"/>
+            <a:r>
+              <a:rPr sz="1100" b="1" i="0">
                 <a:solidFill>
                   <a:srgbClr val="007A8A"/>
                 </a:solidFill>
               </a:rPr>
-              <a:t>LLM 연결</a:t>
+              <a:t>RAG 구성</a:t>
             </a:r>
           </a:p>
         </p:txBody>
@@ -70106,28 +70568,28 @@
         </p:nvSpPr>
         <p:spPr>
           <a:xfrm>
-            <a:off x="1920240" y="3456432"/>
-            <a:ext cx="3566160" cy="502920"/>
-          </a:xfrm>
-          <a:prstGeom prst="rect">
-            <a:avLst/>
-          </a:prstGeom>
-          <a:noFill/>
-        </p:spPr>
-        <p:txBody>
-          <a:bodyPr wrap="square">
-            <a:spAutoFit/>
-          </a:bodyPr>
-          <a:lstStyle/>
-          <a:p>
-            <a:pPr algn="l"/>
-            <a:r>
-              <a:rPr sz="1200" b="0" i="0">
+            <a:off x="2103120" y="3200400"/>
+            <a:ext cx="3383280" cy="411480"/>
+          </a:xfrm>
+          <a:prstGeom prst="rect">
+            <a:avLst/>
+          </a:prstGeom>
+          <a:noFill/>
+        </p:spPr>
+        <p:txBody>
+          <a:bodyPr wrap="square">
+            <a:spAutoFit/>
+          </a:bodyPr>
+          <a:lstStyle/>
+          <a:p>
+            <a:pPr algn="l"/>
+            <a:r>
+              <a:rPr sz="1050" b="0" i="0">
                 <a:solidFill>
                   <a:srgbClr val="1A1A1A"/>
                 </a:solidFill>
               </a:rPr>
-              <a:t>Gemma 4 31B Dense: 자연어 설명 + JSON 구조화 출력</a:t>
+              <a:t>PDF + 오픈소스 회로도 → 청킹 → BGE-M3 → Qdrant (Vision 분석으로 쿼리 보강)</a:t>
             </a:r>
           </a:p>
         </p:txBody>
@@ -70140,8 +70602,8 @@
         </p:nvSpPr>
         <p:spPr>
           <a:xfrm>
-            <a:off x="365760" y="4078224"/>
-            <a:ext cx="5303520" cy="594360"/>
+            <a:off x="365760" y="3694175"/>
+            <a:ext cx="5303520" cy="475488"/>
           </a:xfrm>
           <a:prstGeom prst="rect">
             <a:avLst/>
@@ -70183,27 +70645,138 @@
         </p:nvSpPr>
         <p:spPr>
           <a:xfrm>
-            <a:off x="502920" y="4114800"/>
-            <a:ext cx="1280160" cy="274320"/>
-          </a:xfrm>
-          <a:prstGeom prst="rect">
-            <a:avLst/>
-          </a:prstGeom>
-          <a:noFill/>
-        </p:spPr>
-        <p:txBody>
-          <a:bodyPr wrap="square">
-            <a:spAutoFit/>
-          </a:bodyPr>
-          <a:lstStyle/>
-          <a:p>
-            <a:pPr algn="l"/>
-            <a:r>
-              <a:rPr sz="1200" b="1" i="0">
+            <a:off x="502920" y="3730752"/>
+            <a:ext cx="1463040" cy="274320"/>
+          </a:xfrm>
+          <a:prstGeom prst="rect">
+            <a:avLst/>
+          </a:prstGeom>
+          <a:noFill/>
+        </p:spPr>
+        <p:txBody>
+          <a:bodyPr wrap="square">
+            <a:spAutoFit/>
+          </a:bodyPr>
+          <a:lstStyle/>
+          <a:p>
+            <a:pPr algn="l"/>
+            <a:r>
+              <a:rPr sz="1100" b="1" i="0">
                 <a:solidFill>
                   <a:srgbClr val="007A8A"/>
                 </a:solidFill>
               </a:rPr>
+              <a:t>LLM 연결</a:t>
+            </a:r>
+          </a:p>
+        </p:txBody>
+      </p:sp>
+      <p:sp>
+        <p:nvSpPr>
+          <p:cNvPr id="23" name="TextBox 22"/>
+          <p:cNvSpPr txBox="1"/>
+          <p:nvPr/>
+        </p:nvSpPr>
+        <p:spPr>
+          <a:xfrm>
+            <a:off x="2103120" y="3730752"/>
+            <a:ext cx="3383280" cy="411480"/>
+          </a:xfrm>
+          <a:prstGeom prst="rect">
+            <a:avLst/>
+          </a:prstGeom>
+          <a:noFill/>
+        </p:spPr>
+        <p:txBody>
+          <a:bodyPr wrap="square">
+            <a:spAutoFit/>
+          </a:bodyPr>
+          <a:lstStyle/>
+          <a:p>
+            <a:pPr algn="l"/>
+            <a:r>
+              <a:rPr sz="1050" b="0" i="0">
+                <a:solidFill>
+                  <a:srgbClr val="1A1A1A"/>
+                </a:solidFill>
+              </a:rPr>
+              <a:t>Gemma 4 31B Dense: 자연어 설명 + JSON 구조화 출력 (Vision 분석 컨텍스트 포함)</a:t>
+            </a:r>
+          </a:p>
+        </p:txBody>
+      </p:sp>
+      <p:sp>
+        <p:nvSpPr>
+          <p:cNvPr id="24" name="Rectangle 23"/>
+          <p:cNvSpPr/>
+          <p:nvPr/>
+        </p:nvSpPr>
+        <p:spPr>
+          <a:xfrm>
+            <a:off x="365760" y="4224527"/>
+            <a:ext cx="5303520" cy="475488"/>
+          </a:xfrm>
+          <a:prstGeom prst="rect">
+            <a:avLst/>
+          </a:prstGeom>
+          <a:solidFill>
+            <a:srgbClr val="D0F0F4"/>
+          </a:solidFill>
+          <a:ln>
+            <a:noFill/>
+          </a:ln>
+        </p:spPr>
+        <p:style>
+          <a:lnRef idx="1">
+            <a:schemeClr val="accent1"/>
+          </a:lnRef>
+          <a:fillRef idx="3">
+            <a:schemeClr val="accent1"/>
+          </a:fillRef>
+          <a:effectRef idx="2">
+            <a:schemeClr val="accent1"/>
+          </a:effectRef>
+          <a:fontRef idx="minor">
+            <a:schemeClr val="lt1"/>
+          </a:fontRef>
+        </p:style>
+        <p:txBody>
+          <a:bodyPr rtlCol="0" anchor="ctr"/>
+          <a:lstStyle/>
+          <a:p>
+            <a:pPr algn="ctr"/>
+          </a:p>
+        </p:txBody>
+      </p:sp>
+      <p:sp>
+        <p:nvSpPr>
+          <p:cNvPr id="25" name="TextBox 24"/>
+          <p:cNvSpPr txBox="1"/>
+          <p:nvPr/>
+        </p:nvSpPr>
+        <p:spPr>
+          <a:xfrm>
+            <a:off x="502920" y="4261104"/>
+            <a:ext cx="1463040" cy="274320"/>
+          </a:xfrm>
+          <a:prstGeom prst="rect">
+            <a:avLst/>
+          </a:prstGeom>
+          <a:noFill/>
+        </p:spPr>
+        <p:txBody>
+          <a:bodyPr wrap="square">
+            <a:spAutoFit/>
+          </a:bodyPr>
+          <a:lstStyle/>
+          <a:p>
+            <a:pPr algn="l"/>
+            <a:r>
+              <a:rPr sz="1100" b="1" i="0">
+                <a:solidFill>
+                  <a:srgbClr val="007A8A"/>
+                </a:solidFill>
+              </a:rPr>
               <a:t>UI 구성</a:t>
             </a:r>
           </a:p>
@@ -70211,41 +70784,41 @@
       </p:sp>
       <p:sp>
         <p:nvSpPr>
-          <p:cNvPr id="23" name="TextBox 22"/>
-          <p:cNvSpPr txBox="1"/>
-          <p:nvPr/>
-        </p:nvSpPr>
-        <p:spPr>
-          <a:xfrm>
-            <a:off x="1920240" y="4114800"/>
-            <a:ext cx="3566160" cy="502920"/>
-          </a:xfrm>
-          <a:prstGeom prst="rect">
-            <a:avLst/>
-          </a:prstGeom>
-          <a:noFill/>
-        </p:spPr>
-        <p:txBody>
-          <a:bodyPr wrap="square">
-            <a:spAutoFit/>
-          </a:bodyPr>
-          <a:lstStyle/>
-          <a:p>
-            <a:pPr algn="l"/>
-            <a:r>
-              <a:rPr sz="1200" b="0" i="0">
+          <p:cNvPr id="26" name="TextBox 25"/>
+          <p:cNvSpPr txBox="1"/>
+          <p:nvPr/>
+        </p:nvSpPr>
+        <p:spPr>
+          <a:xfrm>
+            <a:off x="2103120" y="4261104"/>
+            <a:ext cx="3383280" cy="411480"/>
+          </a:xfrm>
+          <a:prstGeom prst="rect">
+            <a:avLst/>
+          </a:prstGeom>
+          <a:noFill/>
+        </p:spPr>
+        <p:txBody>
+          <a:bodyPr wrap="square">
+            <a:spAutoFit/>
+          </a:bodyPr>
+          <a:lstStyle/>
+          <a:p>
+            <a:pPr algn="l"/>
+            <a:r>
+              <a:rPr sz="1050" b="0" i="0">
                 <a:solidFill>
                   <a:srgbClr val="1A1A1A"/>
                 </a:solidFill>
               </a:rPr>
-              <a:t>Streamlit: 회로도 업로드 → 검증 진행 → 리포트 표시</a:t>
-            </a:r>
-          </a:p>
-        </p:txBody>
-      </p:sp>
-      <p:sp>
-        <p:nvSpPr>
-          <p:cNvPr id="24" name="TextBox 23"/>
+              <a:t>Streamlit: 이미지 업로드 → Vision 분석 → 검증 리포트 + vision_analysis 표시</a:t>
+            </a:r>
+          </a:p>
+        </p:txBody>
+      </p:sp>
+      <p:sp>
+        <p:nvSpPr>
+          <p:cNvPr id="27" name="TextBox 26"/>
           <p:cNvSpPr txBox="1"/>
           <p:nvPr/>
         </p:nvSpPr>
@@ -70279,7 +70852,7 @@
       </p:sp>
       <p:sp>
         <p:nvSpPr>
-          <p:cNvPr id="25" name="Rectangle 24"/>
+          <p:cNvPr id="28" name="Rectangle 27"/>
           <p:cNvSpPr/>
           <p:nvPr/>
         </p:nvSpPr>
@@ -70322,7 +70895,7 @@
       </p:sp>
       <p:sp>
         <p:nvSpPr>
-          <p:cNvPr id="26" name="TextBox 25"/>
+          <p:cNvPr id="29" name="TextBox 28"/>
           <p:cNvSpPr txBox="1"/>
           <p:nvPr/>
         </p:nvSpPr>
@@ -70356,7 +70929,7 @@
       </p:sp>
       <p:sp>
         <p:nvSpPr>
-          <p:cNvPr id="27" name="TextBox 26"/>
+          <p:cNvPr id="30" name="TextBox 29"/>
           <p:cNvSpPr txBox="1"/>
           <p:nvPr/>
         </p:nvSpPr>
@@ -70390,7 +70963,7 @@
       </p:sp>
       <p:sp>
         <p:nvSpPr>
-          <p:cNvPr id="28" name="TextBox 27"/>
+          <p:cNvPr id="31" name="TextBox 30"/>
           <p:cNvSpPr txBox="1"/>
           <p:nvPr/>
         </p:nvSpPr>
@@ -70424,7 +70997,7 @@
       </p:sp>
       <p:sp>
         <p:nvSpPr>
-          <p:cNvPr id="29" name="Rectangle 28"/>
+          <p:cNvPr id="32" name="Rectangle 31"/>
           <p:cNvSpPr/>
           <p:nvPr/>
         </p:nvSpPr>
@@ -70467,7 +71040,7 @@
       </p:sp>
       <p:sp>
         <p:nvSpPr>
-          <p:cNvPr id="30" name="TextBox 29"/>
+          <p:cNvPr id="33" name="TextBox 32"/>
           <p:cNvSpPr txBox="1"/>
           <p:nvPr/>
         </p:nvSpPr>
@@ -70501,7 +71074,7 @@
       </p:sp>
       <p:sp>
         <p:nvSpPr>
-          <p:cNvPr id="31" name="TextBox 30"/>
+          <p:cNvPr id="34" name="TextBox 33"/>
           <p:cNvSpPr txBox="1"/>
           <p:nvPr/>
         </p:nvSpPr>
@@ -70535,7 +71108,7 @@
       </p:sp>
       <p:sp>
         <p:nvSpPr>
-          <p:cNvPr id="32" name="TextBox 31"/>
+          <p:cNvPr id="35" name="TextBox 34"/>
           <p:cNvSpPr txBox="1"/>
           <p:nvPr/>
         </p:nvSpPr>
@@ -70569,7 +71142,7 @@
       </p:sp>
       <p:sp>
         <p:nvSpPr>
-          <p:cNvPr id="33" name="Rectangle 32"/>
+          <p:cNvPr id="36" name="Rectangle 35"/>
           <p:cNvSpPr/>
           <p:nvPr/>
         </p:nvSpPr>
@@ -70612,7 +71185,7 @@
       </p:sp>
       <p:sp>
         <p:nvSpPr>
-          <p:cNvPr id="34" name="TextBox 33"/>
+          <p:cNvPr id="37" name="TextBox 36"/>
           <p:cNvSpPr txBox="1"/>
           <p:nvPr/>
         </p:nvSpPr>
@@ -70646,7 +71219,7 @@
       </p:sp>
       <p:sp>
         <p:nvSpPr>
-          <p:cNvPr id="35" name="TextBox 34"/>
+          <p:cNvPr id="38" name="TextBox 37"/>
           <p:cNvSpPr txBox="1"/>
           <p:nvPr/>
         </p:nvSpPr>
@@ -70680,7 +71253,7 @@
       </p:sp>
       <p:sp>
         <p:nvSpPr>
-          <p:cNvPr id="36" name="TextBox 35"/>
+          <p:cNvPr id="39" name="TextBox 38"/>
           <p:cNvSpPr txBox="1"/>
           <p:nvPr/>
         </p:nvSpPr>
@@ -70714,7 +71287,7 @@
       </p:sp>
       <p:sp>
         <p:nvSpPr>
-          <p:cNvPr id="37" name="Rectangle 36"/>
+          <p:cNvPr id="40" name="Rectangle 39"/>
           <p:cNvSpPr/>
           <p:nvPr/>
         </p:nvSpPr>
@@ -70757,7 +71330,7 @@
       </p:sp>
       <p:sp>
         <p:nvSpPr>
-          <p:cNvPr id="38" name="TextBox 37"/>
+          <p:cNvPr id="41" name="TextBox 40"/>
           <p:cNvSpPr txBox="1"/>
           <p:nvPr/>
         </p:nvSpPr>
@@ -70791,7 +71364,7 @@
       </p:sp>
       <p:sp>
         <p:nvSpPr>
-          <p:cNvPr id="39" name="TextBox 38"/>
+          <p:cNvPr id="42" name="TextBox 41"/>
           <p:cNvSpPr txBox="1"/>
           <p:nvPr/>
         </p:nvSpPr>
@@ -70825,7 +71398,7 @@
       </p:sp>
       <p:sp>
         <p:nvSpPr>
-          <p:cNvPr id="40" name="TextBox 39"/>
+          <p:cNvPr id="43" name="TextBox 42"/>
           <p:cNvSpPr txBox="1"/>
           <p:nvPr/>
         </p:nvSpPr>
@@ -70859,7 +71432,7 @@
       </p:sp>
       <p:sp>
         <p:nvSpPr>
-          <p:cNvPr id="41" name="Rectangle 40"/>
+          <p:cNvPr id="44" name="Rectangle 43"/>
           <p:cNvSpPr/>
           <p:nvPr/>
         </p:nvSpPr>
@@ -70902,7 +71475,7 @@
       </p:sp>
       <p:sp>
         <p:nvSpPr>
-          <p:cNvPr id="42" name="TextBox 41"/>
+          <p:cNvPr id="45" name="TextBox 44"/>
           <p:cNvSpPr txBox="1"/>
           <p:nvPr/>
         </p:nvSpPr>
@@ -70936,7 +71509,7 @@
       </p:sp>
       <p:sp>
         <p:nvSpPr>
-          <p:cNvPr id="43" name="TextBox 42"/>
+          <p:cNvPr id="46" name="TextBox 45"/>
           <p:cNvSpPr txBox="1"/>
           <p:nvPr/>
         </p:nvSpPr>
@@ -70970,7 +71543,7 @@
       </p:sp>
       <p:sp>
         <p:nvSpPr>
-          <p:cNvPr id="44" name="TextBox 43"/>
+          <p:cNvPr id="47" name="TextBox 46"/>
           <p:cNvSpPr txBox="1"/>
           <p:nvPr/>
         </p:nvSpPr>
@@ -71004,7 +71577,7 @@
       </p:sp>
       <p:sp>
         <p:nvSpPr>
-          <p:cNvPr id="45" name="Rectangle 44"/>
+          <p:cNvPr id="48" name="Rectangle 47"/>
           <p:cNvSpPr/>
           <p:nvPr/>
         </p:nvSpPr>
@@ -71047,7 +71620,7 @@
       </p:sp>
       <p:sp>
         <p:nvSpPr>
-          <p:cNvPr id="46" name="TextBox 45"/>
+          <p:cNvPr id="49" name="TextBox 48"/>
           <p:cNvSpPr txBox="1"/>
           <p:nvPr/>
         </p:nvSpPr>
@@ -71081,7 +71654,7 @@
       </p:sp>
       <p:sp>
         <p:nvSpPr>
-          <p:cNvPr id="47" name="TextBox 46"/>
+          <p:cNvPr id="50" name="TextBox 49"/>
           <p:cNvSpPr txBox="1"/>
           <p:nvPr/>
         </p:nvSpPr>
@@ -71115,7 +71688,7 @@
       </p:sp>
       <p:sp>
         <p:nvSpPr>
-          <p:cNvPr id="48" name="TextBox 47"/>
+          <p:cNvPr id="51" name="TextBox 50"/>
           <p:cNvSpPr txBox="1"/>
           <p:nvPr/>
         </p:nvSpPr>
@@ -71149,7 +71722,7 @@
       </p:sp>
       <p:sp>
         <p:nvSpPr>
-          <p:cNvPr id="49" name="Rectangle 48"/>
+          <p:cNvPr id="52" name="Rectangle 51"/>
           <p:cNvSpPr/>
           <p:nvPr/>
         </p:nvSpPr>
@@ -71192,7 +71765,7 @@
       </p:sp>
       <p:sp>
         <p:nvSpPr>
-          <p:cNvPr id="50" name="TextBox 49"/>
+          <p:cNvPr id="53" name="TextBox 52"/>
           <p:cNvSpPr txBox="1"/>
           <p:nvPr/>
         </p:nvSpPr>
